--- a/docs/demo/outputs/en/charge-while-you-shop-slide-deck.pptx
+++ b/docs/demo/outputs/en/charge-while-you-shop-slide-deck.pptx
@@ -509,9 +509,10 @@
           <a:p>
             <a:r>
               <a:rPr lang="en-US" dirty="0"/>
-              <a:t>Open with the big idea: fast charging at retail locations transforms idle shopping time into useful road-trip time. Emphasize that this is not just about technology—it’s about convenience, cost savings, and accessibility for all drivers.
+              <a:t>Opening the presentation on how retail charging infrastructure aligns routine shopping intervals with necessary electric vehicle recharging.
 [Sources]
-- Image: https://www.pexels.com/photo/public-charger-for-electric-vehicles-4678065/</a:t>
+- [[S1]]
+- Image: https://www.pexels.com/photo/electric-vehicle-charging-station-in-urban-setting-37576194/</a:t>
             </a:r>
             <a:endParaRPr lang="en-US" dirty="0"/>
           </a:p>
@@ -599,12 +600,9 @@
           <a:p>
             <a:r>
               <a:rPr lang="en-US" dirty="0"/>
-              <a:t>Explain that home charging is the most convenient and cost-effective option for most EV drivers, but fast public charging is critical for road trips and those without home access. Retail locations are a natural fit because they already attract customers who spend time on-site.
+              <a:t>Explains the distinction between Level 2 and DC fast charging in public retail environments as modeled in national infrastructure projections.
 [Sources]
-- [S5]
-- [S7]
-- [S10]
-- Image: https://www.pexels.com/photo/electric-car-charging-at-station-with-multiple-chargers-37576187/</a:t>
+- [[S2]]</a:t>
             </a:r>
             <a:endParaRPr lang="en-US" dirty="0"/>
           </a:p>
@@ -692,9 +690,10 @@
           <a:p>
             <a:r>
               <a:rPr lang="en-US" dirty="0"/>
-              <a:t>Highlight the scale of the Ricker’s deployment and the partnership with Nissan. Emphasize the business benefit: EV chargers attracted more customers, showing that infrastructure investments can pay off for retailers.
+              <a:t>Highlights Walmart's strategy of utilizing widespread retail footprints to make EV ownership accessible across rural, suburban, and urban communities.
 [Sources]
-- [S2]</a:t>
+- [[S5]]
+- Image: https://www.pexels.com/photo/aerial-footage-of-solar-panels-9799757/</a:t>
             </a:r>
             <a:endParaRPr lang="en-US" dirty="0"/>
           </a:p>
@@ -782,13 +781,11 @@
           <a:p>
             <a:r>
               <a:rPr lang="en-US" dirty="0"/>
-              <a:t>Break down the key takeaways for drivers: fast charging saves time, retail locations provide access for those without home charging, and low-cost options help reduce transportation expenses.
+              <a:t>Examines how convenience store chains and automotive manufacturers collaborated to establish early dense deployment models.
 [Sources]
-- [S1]
-- [S3]
-- [S5]
-- [S6]
-- [S7]</a:t>
+- [[S4]]
+- [[S8]]
+- Image: https://www.pexels.com/photo/electric-vehicle-charging-station-on-roadside-5864153/</a:t>
             </a:r>
             <a:endParaRPr lang="en-US" dirty="0"/>
           </a:p>
@@ -876,14 +873,11 @@
           <a:p>
             <a:r>
               <a:rPr lang="en-US" dirty="0"/>
-              <a:t>Compare the benefits for retailers and drivers side by side. For retailers, emphasize foot traffic, loyalty, and future-proofing. For drivers, focus on convenience, time savings, and cost.
+              <a:t>Details the NREL modeling suite used to project infrastructure requirements across diverse light-duty vehicle use cases.
 [Sources]
-- [S1]
-- [S2]
-- [S3]
-- [S5]
-- [S6]
-- [S7]</a:t>
+- [[S7]]
+- [[S9]]
+- [[S10]]</a:t>
             </a:r>
             <a:endParaRPr lang="en-US" dirty="0"/>
           </a:p>
@@ -971,9 +965,9 @@
           <a:p>
             <a:r>
               <a:rPr lang="en-US" dirty="0"/>
-              <a:t>Explain the chart: home charging dominates, but fast public charging is essential for road trips and drivers without home access. Note that fast chargers are a smaller but critical part of the network.
+              <a:t>Outlines the importance of pairing retail EV charging deployment with advanced grid management and demand shifting.
 [Sources]
-- [S9]</a:t>
+- [[S3]]</a:t>
             </a:r>
             <a:endParaRPr lang="en-US" dirty="0"/>
           </a:p>
@@ -1061,10 +1055,11 @@
           <a:p>
             <a:r>
               <a:rPr lang="en-US" dirty="0"/>
-              <a:t>Connect retail charging to grid reliability. Explain how smart charging can help balance renewable energy and reduce peak demand, benefiting both drivers and utilities.
+              <a:t>Demonstrates the direct business and consumer benefits realized when routine retail visits double as reliable vehicle recharging opportunities.
 [Sources]
-- [S4]
-- Image: https://www.pexels.com/photo/wind-turbines-and-solar-panels-during-daytime-9800092/</a:t>
+- [[S5]]
+- [[S8]]
+- Image: https://www.pexels.com/photo/modern-woman-using-station-for-charging-electromobile-4005049/</a:t>
             </a:r>
             <a:endParaRPr lang="en-US" dirty="0"/>
           </a:p>
@@ -1152,10 +1147,11 @@
           <a:p>
             <a:r>
               <a:rPr lang="en-US" dirty="0"/>
-              <a:t>Close with actionable steps for retailers, drivers, and planners. Emphasize that retail charging is a win-win-win: it benefits businesses, drivers, and the grid.
+              <a:t>Concluding summary on actionable steps for expanding retail charging networks to turn parking intervals into productive travel range.
 [Sources]
-- [S4]
-- [S6]</a:t>
+- [[S1]]
+- [[S2]]
+- [[S5]]</a:t>
             </a:r>
             <a:endParaRPr lang="en-US" dirty="0"/>
           </a:p>
@@ -1233,7 +1229,7 @@
     <p:bg>
       <p:bgPr>
         <a:solidFill>
-          <a:srgbClr val="FAFAFA"/>
+          <a:srgbClr val="F8F9FA"/>
         </a:solidFill>
       </p:bgPr>
     </p:bg>
@@ -1564,7 +1560,7 @@
         </p:nvPicPr>
         <p:blipFill>
           <a:blip r:embed="rId1"/>
-          <a:srcRect l="0" r="0" t="7800" b="7800"/>
+          <a:srcRect l="0" r="0" t="12506" b="12506"/>
           <a:stretch/>
         </p:blipFill>
         <p:spPr>
@@ -1650,13 +1646,13 @@
             <a:avLst/>
           </a:prstGeom>
           <a:solidFill>
-            <a:srgbClr val="FF9800">
+            <a:srgbClr val="E76F51">
               <a:alpha val="30000"/>
             </a:srgbClr>
           </a:solidFill>
           <a:ln w="12700">
             <a:solidFill>
-              <a:srgbClr val="FF9800">
+              <a:srgbClr val="E76F51">
                 <a:alpha val="0"/>
               </a:srgbClr>
             </a:solidFill>
@@ -1679,11 +1675,11 @@
             <a:avLst/>
           </a:prstGeom>
           <a:solidFill>
-            <a:srgbClr val="FFC107"/>
+            <a:srgbClr val="F4A261"/>
           </a:solidFill>
           <a:ln w="12700">
             <a:solidFill>
-              <a:srgbClr val="FFC107">
+              <a:srgbClr val="F4A261">
                 <a:alpha val="0"/>
               </a:srgbClr>
             </a:solidFill>
@@ -1718,13 +1714,13 @@
             <a:r>
               <a:rPr lang="en-US" altLang="en-US" sz="1000" b="1" dirty="0">
                 <a:solidFill>
-                  <a:srgbClr val="FF9800"/>
-                </a:solidFill>
-                <a:latin typeface="Vazirmatn" pitchFamily="34" charset="0"/>
-                <a:ea typeface="Vazirmatn" pitchFamily="34" charset="-122"/>
-                <a:cs typeface="Vazirmatn" pitchFamily="34" charset="-120"/>
-              </a:rPr>
-              <a:t>01</a:t>
+                  <a:srgbClr val="E76F51"/>
+                </a:solidFill>
+                <a:latin typeface="Vazirmatn" pitchFamily="34" charset="0"/>
+                <a:ea typeface="Vazirmatn" pitchFamily="34" charset="-122"/>
+                <a:cs typeface="Vazirmatn" pitchFamily="34" charset="-120"/>
+              </a:rPr>
+              <a:t>Infrastructure Playbook</a:t>
             </a:r>
             <a:endParaRPr lang="en-US" sz="1000" dirty="0"/>
           </a:p>
@@ -1765,7 +1761,7 @@
                 <a:ea typeface="Vazirmatn" pitchFamily="34" charset="-122"/>
                 <a:cs typeface="Vazirmatn" pitchFamily="34" charset="-120"/>
               </a:rPr>
-              <a:t>Fast Charging at Retail: Turn Shopping Stops into Road-Trip Time</a:t>
+              <a:t>Turning Shopping Time into Travel Time</a:t>
             </a:r>
             <a:endParaRPr lang="en-US" sz="2800" dirty="0"/>
           </a:p>
@@ -1806,7 +1802,7 @@
                 <a:ea typeface="Vazirmatn" pitchFamily="34" charset="-122"/>
                 <a:cs typeface="Vazirmatn" pitchFamily="34" charset="-120"/>
               </a:rPr>
-              <a:t>How EV infrastructure at stores benefits drivers, retailers, and planners</a:t>
+              <a:t>Integrating EV charging into retail destinations to convert parking dwell into useful driving range</a:t>
             </a:r>
             <a:endParaRPr lang="en-US" sz="1400" dirty="0"/>
           </a:p>
@@ -1829,7 +1825,7 @@
           <a:noFill/>
           <a:ln w="27940">
             <a:solidFill>
-              <a:srgbClr val="FFC107"/>
+              <a:srgbClr val="F4A261"/>
             </a:solidFill>
             <a:prstDash val="solid"/>
             <a:headEnd type="none"/>
@@ -2069,7 +2065,7 @@
                 <a:ea typeface="Vazirmatn" pitchFamily="34" charset="-122"/>
                 <a:cs typeface="Vazirmatn" pitchFamily="34" charset="-120"/>
               </a:rPr>
-              <a:t>Reinhard Bruckner</a:t>
+              <a:t>Giant Asparagus</a:t>
             </a:r>
             <a:endParaRPr lang="en-US" sz="620" dirty="0"/>
           </a:p>
@@ -2089,7 +2085,807 @@
     <p:bg>
       <p:bgPr>
         <a:solidFill>
-          <a:srgbClr val="FAFAFA"/>
+          <a:srgbClr val="F8F9FA"/>
+        </a:solidFill>
+      </p:bgPr>
+    </p:bg>
+    <p:spTree>
+      <p:nvGrpSpPr>
+        <p:cNvPr id="1" name=""/>
+        <p:cNvGrpSpPr/>
+        <p:nvPr/>
+      </p:nvGrpSpPr>
+      <p:grpSpPr>
+        <a:xfrm>
+          <a:off x="0" y="0"/>
+          <a:ext cx="0" cy="0"/>
+          <a:chOff x="0" y="0"/>
+          <a:chExt cx="0" cy="0"/>
+        </a:xfrm>
+      </p:grpSpPr>
+      <p:sp>
+        <p:nvSpPr>
+          <p:cNvPr id="2" name="Shape 0"/>
+          <p:cNvSpPr/>
+          <p:nvPr/>
+        </p:nvSpPr>
+        <p:spPr>
+          <a:xfrm>
+            <a:off x="11503152" y="347472"/>
+            <a:ext cx="155448" cy="310896"/>
+          </a:xfrm>
+          <a:prstGeom prst="rect">
+            <a:avLst/>
+          </a:prstGeom>
+          <a:solidFill>
+            <a:srgbClr val="F4A261"/>
+          </a:solidFill>
+          <a:ln w="12700">
+            <a:solidFill>
+              <a:srgbClr val="F4A261">
+                <a:alpha val="0"/>
+              </a:srgbClr>
+            </a:solidFill>
+            <a:prstDash val="solid"/>
+          </a:ln>
+        </p:spPr>
+      </p:sp>
+      <p:sp>
+        <p:nvSpPr>
+          <p:cNvPr id="3" name="Text 1"/>
+          <p:cNvSpPr txBox="1"/>
+          <p:nvPr/>
+        </p:nvSpPr>
+        <p:spPr>
+          <a:xfrm>
+            <a:off x="5166360" y="329184"/>
+            <a:ext cx="6217920" cy="365760"/>
+          </a:xfrm>
+          <a:prstGeom prst="rect">
+            <a:avLst/>
+          </a:prstGeom>
+          <a:noFill/>
+          <a:ln/>
+        </p:spPr>
+        <p:txBody>
+          <a:bodyPr wrap="square" lIns="0" tIns="0" rIns="0" bIns="0" rtlCol="0" anchor="ctr"/>
+          <a:lstStyle/>
+          <a:p>
+            <a:pPr algn="r" indent="0" marL="0">
+              <a:buNone/>
+            </a:pPr>
+            <a:r>
+              <a:rPr lang="en-US" altLang="en-US" sz="1050" b="1" spc="50" kern="0" dirty="0">
+                <a:solidFill>
+                  <a:srgbClr val="F4A261"/>
+                </a:solidFill>
+                <a:latin typeface="Vazirmatn" pitchFamily="34" charset="0"/>
+                <a:ea typeface="Vazirmatn" pitchFamily="34" charset="-122"/>
+                <a:cs typeface="Vazirmatn" pitchFamily="34" charset="-120"/>
+              </a:rPr>
+              <a:t>02</a:t>
+            </a:r>
+            <a:endParaRPr lang="en-US" sz="1050" dirty="0"/>
+          </a:p>
+        </p:txBody>
+      </p:sp>
+      <p:sp>
+        <p:nvSpPr>
+          <p:cNvPr id="4" name="Text 2"/>
+          <p:cNvSpPr txBox="1"/>
+          <p:nvPr/>
+        </p:nvSpPr>
+        <p:spPr>
+          <a:xfrm>
+            <a:off x="5166360" y="731520"/>
+            <a:ext cx="6492240" cy="868680"/>
+          </a:xfrm>
+          <a:prstGeom prst="rect">
+            <a:avLst/>
+          </a:prstGeom>
+          <a:noFill/>
+          <a:ln/>
+        </p:spPr>
+        <p:txBody>
+          <a:bodyPr wrap="square" lIns="0" tIns="0" rIns="0" bIns="0" rtlCol="0" anchor="t"/>
+          <a:lstStyle/>
+          <a:p>
+            <a:pPr algn="r" indent="0" marL="0">
+              <a:buNone/>
+            </a:pPr>
+            <a:r>
+              <a:rPr lang="en-US" altLang="en-US" sz="2400" b="1" dirty="0">
+                <a:solidFill>
+                  <a:srgbClr val="1D3557"/>
+                </a:solidFill>
+                <a:latin typeface="Vazirmatn" pitchFamily="34" charset="0"/>
+                <a:ea typeface="Vazirmatn" pitchFamily="34" charset="-122"/>
+                <a:cs typeface="Vazirmatn" pitchFamily="34" charset="-120"/>
+              </a:rPr>
+              <a:t>Dual-Purpose Dwell Times</a:t>
+            </a:r>
+            <a:endParaRPr lang="en-US" sz="2400" dirty="0"/>
+          </a:p>
+        </p:txBody>
+      </p:sp>
+      <p:sp>
+        <p:nvSpPr>
+          <p:cNvPr id="5" name="Text 3"/>
+          <p:cNvSpPr txBox="1"/>
+          <p:nvPr/>
+        </p:nvSpPr>
+        <p:spPr>
+          <a:xfrm>
+            <a:off x="5166360" y="1645920"/>
+            <a:ext cx="6492240" cy="594360"/>
+          </a:xfrm>
+          <a:prstGeom prst="rect">
+            <a:avLst/>
+          </a:prstGeom>
+          <a:noFill/>
+          <a:ln/>
+        </p:spPr>
+        <p:txBody>
+          <a:bodyPr wrap="square" lIns="0" tIns="0" rIns="0" bIns="0" rtlCol="0" anchor="t"/>
+          <a:lstStyle/>
+          <a:p>
+            <a:pPr algn="r" indent="0" marL="0">
+              <a:buNone/>
+            </a:pPr>
+            <a:r>
+              <a:rPr lang="en-US" altLang="en-US" sz="1250" dirty="0">
+                <a:solidFill>
+                  <a:srgbClr val="6C757D"/>
+                </a:solidFill>
+                <a:latin typeface="Vazirmatn" pitchFamily="34" charset="0"/>
+                <a:ea typeface="Vazirmatn" pitchFamily="34" charset="-122"/>
+                <a:cs typeface="Vazirmatn" pitchFamily="34" charset="-120"/>
+              </a:rPr>
+              <a:t>Balancing long-duration Level 2 convenience with rapid DC fast charging at retail sites</a:t>
+            </a:r>
+            <a:endParaRPr lang="en-US" sz="1250" dirty="0"/>
+          </a:p>
+        </p:txBody>
+      </p:sp>
+      <p:sp>
+        <p:nvSpPr>
+          <p:cNvPr id="6" name="Shape 4"/>
+          <p:cNvSpPr/>
+          <p:nvPr/>
+        </p:nvSpPr>
+        <p:spPr>
+          <a:xfrm>
+            <a:off x="502920" y="2304288"/>
+            <a:ext cx="3593592" cy="3794760"/>
+          </a:xfrm>
+          <a:prstGeom prst="roundRect">
+            <a:avLst/>
+          </a:prstGeom>
+          <a:solidFill>
+            <a:srgbClr val="FFFFFF"/>
+          </a:solidFill>
+          <a:ln w="8890">
+            <a:solidFill>
+              <a:srgbClr val="DCE4EE">
+                <a:alpha val="65000"/>
+              </a:srgbClr>
+            </a:solidFill>
+            <a:prstDash val="solid"/>
+          </a:ln>
+          <a:effectLst>
+            <a:outerShdw sx="100000" sy="100000" kx="0" ky="0" algn="bl" rotWithShape="0" blurRad="25400" dist="13970" dir="2700000">
+              <a:srgbClr val="000000">
+                <a:alpha val="16000"/>
+              </a:srgbClr>
+            </a:outerShdw>
+          </a:effectLst>
+        </p:spPr>
+      </p:sp>
+      <p:sp>
+        <p:nvSpPr>
+          <p:cNvPr id="7" name="Shape 5"/>
+          <p:cNvSpPr/>
+          <p:nvPr/>
+        </p:nvSpPr>
+        <p:spPr>
+          <a:xfrm>
+            <a:off x="3383280" y="2624328"/>
+            <a:ext cx="457200" cy="457200"/>
+          </a:xfrm>
+          <a:prstGeom prst="ellipse">
+            <a:avLst/>
+          </a:prstGeom>
+          <a:solidFill>
+            <a:srgbClr val="F4A261"/>
+          </a:solidFill>
+          <a:ln w="12700">
+            <a:solidFill>
+              <a:srgbClr val="F4A261">
+                <a:alpha val="0"/>
+              </a:srgbClr>
+            </a:solidFill>
+            <a:prstDash val="solid"/>
+          </a:ln>
+        </p:spPr>
+      </p:sp>
+      <p:pic>
+        <p:nvPicPr>
+          <p:cNvPr id="8" name="Image 0" descr="preencoded.png">    </p:cNvPr>
+          <p:cNvPicPr>
+            <a:picLocks noChangeAspect="1"/>
+          </p:cNvPicPr>
+          <p:nvPr/>
+        </p:nvPicPr>
+        <p:blipFill>
+          <a:blip r:embed="rId1">
+            <a:extLst>
+              <a:ext uri="{96DAC541-7B7A-43D3-8B79-37D633B846F1}">
+                <asvg:svgBlip xmlns:asvg="http://schemas.microsoft.com/office/drawing/2016/SVG/main" r:embed="rId2"/>
+              </a:ext>
+            </a:extLst>
+          </a:blip>
+          <a:stretch>
+            <a:fillRect/>
+          </a:stretch>
+        </p:blipFill>
+        <p:spPr>
+          <a:xfrm>
+            <a:off x="3488436" y="2729484"/>
+            <a:ext cx="246888" cy="246888"/>
+          </a:xfrm>
+          <a:prstGeom prst="rect">
+            <a:avLst/>
+          </a:prstGeom>
+        </p:spPr>
+      </p:pic>
+      <p:sp>
+        <p:nvSpPr>
+          <p:cNvPr id="9" name="Text 6"/>
+          <p:cNvSpPr txBox="1"/>
+          <p:nvPr/>
+        </p:nvSpPr>
+        <p:spPr>
+          <a:xfrm>
+            <a:off x="777240" y="3081528"/>
+            <a:ext cx="3044952" cy="347472"/>
+          </a:xfrm>
+          <a:prstGeom prst="rect">
+            <a:avLst/>
+          </a:prstGeom>
+          <a:noFill/>
+          <a:ln/>
+        </p:spPr>
+        <p:txBody>
+          <a:bodyPr wrap="square" lIns="0" tIns="0" rIns="0" bIns="0" rtlCol="0" anchor="ctr"/>
+          <a:lstStyle/>
+          <a:p>
+            <a:pPr algn="l" indent="0" marL="0">
+              <a:buNone/>
+            </a:pPr>
+            <a:r>
+              <a:rPr lang="en-US" altLang="en-US" sz="1300" b="1" dirty="0">
+                <a:solidFill>
+                  <a:srgbClr val="1D3557"/>
+                </a:solidFill>
+                <a:latin typeface="Vazirmatn" pitchFamily="34" charset="0"/>
+                <a:ea typeface="Vazirmatn" pitchFamily="34" charset="-122"/>
+                <a:cs typeface="Vazirmatn" pitchFamily="34" charset="-120"/>
+              </a:rPr>
+              <a:t>Level 2 Ports</a:t>
+            </a:r>
+            <a:endParaRPr lang="en-US" sz="1300" dirty="0"/>
+          </a:p>
+        </p:txBody>
+      </p:sp>
+      <p:sp>
+        <p:nvSpPr>
+          <p:cNvPr id="10" name="Text 7"/>
+          <p:cNvSpPr txBox="1"/>
+          <p:nvPr/>
+        </p:nvSpPr>
+        <p:spPr>
+          <a:xfrm>
+            <a:off x="777240" y="3511296"/>
+            <a:ext cx="3044952" cy="2350008"/>
+          </a:xfrm>
+          <a:prstGeom prst="rect">
+            <a:avLst/>
+          </a:prstGeom>
+          <a:noFill/>
+          <a:ln/>
+        </p:spPr>
+        <p:txBody>
+          <a:bodyPr wrap="square" lIns="0" tIns="0" rIns="0" bIns="0" rtlCol="0" anchor="t"/>
+          <a:lstStyle/>
+          <a:p>
+            <a:pPr algn="l" indent="0" marL="0">
+              <a:buNone/>
+            </a:pPr>
+            <a:r>
+              <a:rPr lang="en-US" altLang="en-US" sz="1200" dirty="0">
+                <a:solidFill>
+                  <a:srgbClr val="6C757D"/>
+                </a:solidFill>
+                <a:latin typeface="Vazirmatn" pitchFamily="34" charset="0"/>
+                <a:ea typeface="Vazirmatn" pitchFamily="34" charset="-122"/>
+                <a:cs typeface="Vazirmatn" pitchFamily="34" charset="-120"/>
+              </a:rPr>
+              <a:t>Approx. 500,000 public L2 ports simulated across retail outlets and community centers provide occasional long-duration charging during extended visits.</a:t>
+            </a:r>
+            <a:endParaRPr lang="en-US" sz="1200" dirty="0"/>
+          </a:p>
+        </p:txBody>
+      </p:sp>
+      <p:sp>
+        <p:nvSpPr>
+          <p:cNvPr id="11" name="Shape 8"/>
+          <p:cNvSpPr/>
+          <p:nvPr/>
+        </p:nvSpPr>
+        <p:spPr>
+          <a:xfrm>
+            <a:off x="4297680" y="2304288"/>
+            <a:ext cx="3593592" cy="3794760"/>
+          </a:xfrm>
+          <a:prstGeom prst="roundRect">
+            <a:avLst/>
+          </a:prstGeom>
+          <a:solidFill>
+            <a:srgbClr val="FFFFFF"/>
+          </a:solidFill>
+          <a:ln w="8890">
+            <a:solidFill>
+              <a:srgbClr val="DCE4EE">
+                <a:alpha val="65000"/>
+              </a:srgbClr>
+            </a:solidFill>
+            <a:prstDash val="solid"/>
+          </a:ln>
+          <a:effectLst>
+            <a:outerShdw sx="100000" sy="100000" kx="0" ky="0" algn="bl" rotWithShape="0" blurRad="25400" dist="13970" dir="2700000">
+              <a:srgbClr val="000000">
+                <a:alpha val="16000"/>
+              </a:srgbClr>
+            </a:outerShdw>
+          </a:effectLst>
+        </p:spPr>
+      </p:sp>
+      <p:sp>
+        <p:nvSpPr>
+          <p:cNvPr id="12" name="Shape 9"/>
+          <p:cNvSpPr/>
+          <p:nvPr/>
+        </p:nvSpPr>
+        <p:spPr>
+          <a:xfrm>
+            <a:off x="7178040" y="2624328"/>
+            <a:ext cx="457200" cy="457200"/>
+          </a:xfrm>
+          <a:prstGeom prst="ellipse">
+            <a:avLst/>
+          </a:prstGeom>
+          <a:solidFill>
+            <a:srgbClr val="E76F51"/>
+          </a:solidFill>
+          <a:ln w="12700">
+            <a:solidFill>
+              <a:srgbClr val="E76F51">
+                <a:alpha val="0"/>
+              </a:srgbClr>
+            </a:solidFill>
+            <a:prstDash val="solid"/>
+          </a:ln>
+        </p:spPr>
+      </p:sp>
+      <p:pic>
+        <p:nvPicPr>
+          <p:cNvPr id="13" name="Image 1" descr="preencoded.png">    </p:cNvPr>
+          <p:cNvPicPr>
+            <a:picLocks noChangeAspect="1"/>
+          </p:cNvPicPr>
+          <p:nvPr/>
+        </p:nvPicPr>
+        <p:blipFill>
+          <a:blip r:embed="rId3">
+            <a:extLst>
+              <a:ext uri="{96DAC541-7B7A-43D3-8B79-37D633B846F1}">
+                <asvg:svgBlip xmlns:asvg="http://schemas.microsoft.com/office/drawing/2016/SVG/main" r:embed="rId4"/>
+              </a:ext>
+            </a:extLst>
+          </a:blip>
+          <a:stretch>
+            <a:fillRect/>
+          </a:stretch>
+        </p:blipFill>
+        <p:spPr>
+          <a:xfrm>
+            <a:off x="7283196" y="2729484"/>
+            <a:ext cx="246888" cy="246888"/>
+          </a:xfrm>
+          <a:prstGeom prst="rect">
+            <a:avLst/>
+          </a:prstGeom>
+        </p:spPr>
+      </p:pic>
+      <p:sp>
+        <p:nvSpPr>
+          <p:cNvPr id="14" name="Text 10"/>
+          <p:cNvSpPr txBox="1"/>
+          <p:nvPr/>
+        </p:nvSpPr>
+        <p:spPr>
+          <a:xfrm>
+            <a:off x="4572000" y="3081528"/>
+            <a:ext cx="3044952" cy="347472"/>
+          </a:xfrm>
+          <a:prstGeom prst="rect">
+            <a:avLst/>
+          </a:prstGeom>
+          <a:noFill/>
+          <a:ln/>
+        </p:spPr>
+        <p:txBody>
+          <a:bodyPr wrap="square" lIns="0" tIns="0" rIns="0" bIns="0" rtlCol="0" anchor="ctr"/>
+          <a:lstStyle/>
+          <a:p>
+            <a:pPr algn="l" indent="0" marL="0">
+              <a:buNone/>
+            </a:pPr>
+            <a:r>
+              <a:rPr lang="en-US" altLang="en-US" sz="1300" b="1" dirty="0">
+                <a:solidFill>
+                  <a:srgbClr val="1D3557"/>
+                </a:solidFill>
+                <a:latin typeface="Vazirmatn" pitchFamily="34" charset="0"/>
+                <a:ea typeface="Vazirmatn" pitchFamily="34" charset="-122"/>
+                <a:cs typeface="Vazirmatn" pitchFamily="34" charset="-120"/>
+              </a:rPr>
+              <a:t>DC Fast Charging</a:t>
+            </a:r>
+            <a:endParaRPr lang="en-US" sz="1300" dirty="0"/>
+          </a:p>
+        </p:txBody>
+      </p:sp>
+      <p:sp>
+        <p:nvSpPr>
+          <p:cNvPr id="15" name="Text 11"/>
+          <p:cNvSpPr txBox="1"/>
+          <p:nvPr/>
+        </p:nvSpPr>
+        <p:spPr>
+          <a:xfrm>
+            <a:off x="4572000" y="3511296"/>
+            <a:ext cx="3044952" cy="2350008"/>
+          </a:xfrm>
+          <a:prstGeom prst="rect">
+            <a:avLst/>
+          </a:prstGeom>
+          <a:noFill/>
+          <a:ln/>
+        </p:spPr>
+        <p:txBody>
+          <a:bodyPr wrap="square" lIns="0" tIns="0" rIns="0" bIns="0" rtlCol="0" anchor="t"/>
+          <a:lstStyle/>
+          <a:p>
+            <a:pPr algn="l" indent="0" marL="0">
+              <a:buNone/>
+            </a:pPr>
+            <a:r>
+              <a:rPr lang="en-US" altLang="en-US" sz="1200" dirty="0">
+                <a:solidFill>
+                  <a:srgbClr val="6C757D"/>
+                </a:solidFill>
+                <a:latin typeface="Vazirmatn" pitchFamily="34" charset="0"/>
+                <a:ea typeface="Vazirmatn" pitchFamily="34" charset="-122"/>
+                <a:cs typeface="Vazirmatn" pitchFamily="34" charset="-120"/>
+              </a:rPr>
+              <a:t>182,000 public DC fast ports (ranging from 50 kW to 350+ kW) core to network success, giving drivers assurance of rapid turnaround when needed.</a:t>
+            </a:r>
+            <a:endParaRPr lang="en-US" sz="1200" dirty="0"/>
+          </a:p>
+        </p:txBody>
+      </p:sp>
+      <p:sp>
+        <p:nvSpPr>
+          <p:cNvPr id="16" name="Shape 12"/>
+          <p:cNvSpPr/>
+          <p:nvPr/>
+        </p:nvSpPr>
+        <p:spPr>
+          <a:xfrm>
+            <a:off x="8092440" y="2304288"/>
+            <a:ext cx="3593592" cy="3794760"/>
+          </a:xfrm>
+          <a:prstGeom prst="roundRect">
+            <a:avLst/>
+          </a:prstGeom>
+          <a:solidFill>
+            <a:srgbClr val="FFFFFF"/>
+          </a:solidFill>
+          <a:ln w="8890">
+            <a:solidFill>
+              <a:srgbClr val="DCE4EE">
+                <a:alpha val="65000"/>
+              </a:srgbClr>
+            </a:solidFill>
+            <a:prstDash val="solid"/>
+          </a:ln>
+          <a:effectLst>
+            <a:outerShdw sx="100000" sy="100000" kx="0" ky="0" algn="bl" rotWithShape="0" blurRad="25400" dist="13970" dir="2700000">
+              <a:srgbClr val="000000">
+                <a:alpha val="16000"/>
+              </a:srgbClr>
+            </a:outerShdw>
+          </a:effectLst>
+        </p:spPr>
+      </p:sp>
+      <p:sp>
+        <p:nvSpPr>
+          <p:cNvPr id="17" name="Shape 13"/>
+          <p:cNvSpPr/>
+          <p:nvPr/>
+        </p:nvSpPr>
+        <p:spPr>
+          <a:xfrm>
+            <a:off x="10972800" y="2624328"/>
+            <a:ext cx="457200" cy="457200"/>
+          </a:xfrm>
+          <a:prstGeom prst="ellipse">
+            <a:avLst/>
+          </a:prstGeom>
+          <a:solidFill>
+            <a:srgbClr val="2E8B57"/>
+          </a:solidFill>
+          <a:ln w="12700">
+            <a:solidFill>
+              <a:srgbClr val="2E8B57">
+                <a:alpha val="0"/>
+              </a:srgbClr>
+            </a:solidFill>
+            <a:prstDash val="solid"/>
+          </a:ln>
+        </p:spPr>
+      </p:sp>
+      <p:pic>
+        <p:nvPicPr>
+          <p:cNvPr id="18" name="Image 2" descr="preencoded.png">    </p:cNvPr>
+          <p:cNvPicPr>
+            <a:picLocks noChangeAspect="1"/>
+          </p:cNvPicPr>
+          <p:nvPr/>
+        </p:nvPicPr>
+        <p:blipFill>
+          <a:blip r:embed="rId5">
+            <a:extLst>
+              <a:ext uri="{96DAC541-7B7A-43D3-8B79-37D633B846F1}">
+                <asvg:svgBlip xmlns:asvg="http://schemas.microsoft.com/office/drawing/2016/SVG/main" r:embed="rId6"/>
+              </a:ext>
+            </a:extLst>
+          </a:blip>
+          <a:stretch>
+            <a:fillRect/>
+          </a:stretch>
+        </p:blipFill>
+        <p:spPr>
+          <a:xfrm>
+            <a:off x="11077956" y="2729484"/>
+            <a:ext cx="246888" cy="246888"/>
+          </a:xfrm>
+          <a:prstGeom prst="rect">
+            <a:avLst/>
+          </a:prstGeom>
+        </p:spPr>
+      </p:pic>
+      <p:sp>
+        <p:nvSpPr>
+          <p:cNvPr id="19" name="Text 14"/>
+          <p:cNvSpPr txBox="1"/>
+          <p:nvPr/>
+        </p:nvSpPr>
+        <p:spPr>
+          <a:xfrm>
+            <a:off x="8366760" y="3081528"/>
+            <a:ext cx="3044952" cy="347472"/>
+          </a:xfrm>
+          <a:prstGeom prst="rect">
+            <a:avLst/>
+          </a:prstGeom>
+          <a:noFill/>
+          <a:ln/>
+        </p:spPr>
+        <p:txBody>
+          <a:bodyPr wrap="square" lIns="0" tIns="0" rIns="0" bIns="0" rtlCol="0" anchor="ctr"/>
+          <a:lstStyle/>
+          <a:p>
+            <a:pPr algn="l" indent="0" marL="0">
+              <a:buNone/>
+            </a:pPr>
+            <a:r>
+              <a:rPr lang="en-US" altLang="en-US" sz="1300" b="1" dirty="0">
+                <a:solidFill>
+                  <a:srgbClr val="1D3557"/>
+                </a:solidFill>
+                <a:latin typeface="Vazirmatn" pitchFamily="34" charset="0"/>
+                <a:ea typeface="Vazirmatn" pitchFamily="34" charset="-122"/>
+                <a:cs typeface="Vazirmatn" pitchFamily="34" charset="-120"/>
+              </a:rPr>
+              <a:t>Strategic Placement</a:t>
+            </a:r>
+            <a:endParaRPr lang="en-US" sz="1300" dirty="0"/>
+          </a:p>
+        </p:txBody>
+      </p:sp>
+      <p:sp>
+        <p:nvSpPr>
+          <p:cNvPr id="20" name="Text 15"/>
+          <p:cNvSpPr txBox="1"/>
+          <p:nvPr/>
+        </p:nvSpPr>
+        <p:spPr>
+          <a:xfrm>
+            <a:off x="8366760" y="3511296"/>
+            <a:ext cx="3044952" cy="2350008"/>
+          </a:xfrm>
+          <a:prstGeom prst="rect">
+            <a:avLst/>
+          </a:prstGeom>
+          <a:noFill/>
+          <a:ln/>
+        </p:spPr>
+        <p:txBody>
+          <a:bodyPr wrap="square" lIns="0" tIns="0" rIns="0" bIns="0" rtlCol="0" anchor="t"/>
+          <a:lstStyle/>
+          <a:p>
+            <a:pPr algn="l" indent="0" marL="0">
+              <a:buNone/>
+            </a:pPr>
+            <a:r>
+              <a:rPr lang="en-US" altLang="en-US" sz="1200" dirty="0">
+                <a:solidFill>
+                  <a:srgbClr val="6C757D"/>
+                </a:solidFill>
+                <a:latin typeface="Vazirmatn" pitchFamily="34" charset="0"/>
+                <a:ea typeface="Vazirmatn" pitchFamily="34" charset="-122"/>
+                <a:cs typeface="Vazirmatn" pitchFamily="34" charset="-120"/>
+              </a:rPr>
+              <a:t>Locating chargers where drivers already park for other activities minimizes perceived friction and turns idle vehicle time into travel range.</a:t>
+            </a:r>
+            <a:endParaRPr lang="en-US" sz="1200" dirty="0"/>
+          </a:p>
+        </p:txBody>
+      </p:sp>
+      <p:sp>
+        <p:nvSpPr>
+          <p:cNvPr id="21" name="Text 16"/>
+          <p:cNvSpPr txBox="1"/>
+          <p:nvPr/>
+        </p:nvSpPr>
+        <p:spPr>
+          <a:xfrm>
+            <a:off x="320040" y="6510528"/>
+            <a:ext cx="237744" cy="164592"/>
+          </a:xfrm>
+          <a:prstGeom prst="rect">
+            <a:avLst/>
+          </a:prstGeom>
+          <a:noFill/>
+          <a:ln/>
+        </p:spPr>
+        <p:txBody>
+          <a:bodyPr wrap="square" lIns="0" tIns="0" rIns="0" bIns="0" rtlCol="0" anchor="ctr"/>
+          <a:lstStyle/>
+          <a:p>
+            <a:pPr algn="ctr" indent="0" marL="0">
+              <a:buNone/>
+            </a:pPr>
+            <a:r>
+              <a:rPr lang="en-US" altLang="en-US" sz="750" dirty="0">
+                <a:solidFill>
+                  <a:srgbClr val="6C757D"/>
+                </a:solidFill>
+                <a:latin typeface="Vazirmatn" pitchFamily="34" charset="0"/>
+                <a:ea typeface="Vazirmatn" pitchFamily="34" charset="-122"/>
+                <a:cs typeface="Vazirmatn" pitchFamily="34" charset="-120"/>
+              </a:rPr>
+              <a:t>02</a:t>
+            </a:r>
+            <a:endParaRPr lang="en-US" sz="750" dirty="0"/>
+          </a:p>
+        </p:txBody>
+      </p:sp>
+      <p:sp>
+        <p:nvSpPr>
+          <p:cNvPr id="22" name="Text 17"/>
+          <p:cNvSpPr txBox="1"/>
+          <p:nvPr/>
+        </p:nvSpPr>
+        <p:spPr>
+          <a:xfrm>
+            <a:off x="557784" y="6510528"/>
+            <a:ext cx="128016" cy="164592"/>
+          </a:xfrm>
+          <a:prstGeom prst="rect">
+            <a:avLst/>
+          </a:prstGeom>
+          <a:noFill/>
+          <a:ln/>
+        </p:spPr>
+        <p:txBody>
+          <a:bodyPr wrap="square" lIns="0" tIns="0" rIns="0" bIns="0" rtlCol="0" anchor="ctr"/>
+          <a:lstStyle/>
+          <a:p>
+            <a:pPr algn="ctr" indent="0" marL="0">
+              <a:buNone/>
+            </a:pPr>
+            <a:r>
+              <a:rPr lang="en-US" altLang="en-US" sz="750" dirty="0">
+                <a:solidFill>
+                  <a:srgbClr val="6C757D"/>
+                </a:solidFill>
+                <a:latin typeface="Vazirmatn" pitchFamily="34" charset="0"/>
+                <a:ea typeface="Vazirmatn" pitchFamily="34" charset="-122"/>
+                <a:cs typeface="Vazirmatn" pitchFamily="34" charset="-120"/>
+              </a:rPr>
+              <a:t>/</a:t>
+            </a:r>
+            <a:endParaRPr lang="en-US" sz="750" dirty="0"/>
+          </a:p>
+        </p:txBody>
+      </p:sp>
+      <p:sp>
+        <p:nvSpPr>
+          <p:cNvPr id="23" name="Text 18"/>
+          <p:cNvSpPr txBox="1"/>
+          <p:nvPr/>
+        </p:nvSpPr>
+        <p:spPr>
+          <a:xfrm>
+            <a:off x="685800" y="6510528"/>
+            <a:ext cx="237744" cy="164592"/>
+          </a:xfrm>
+          <a:prstGeom prst="rect">
+            <a:avLst/>
+          </a:prstGeom>
+          <a:noFill/>
+          <a:ln/>
+        </p:spPr>
+        <p:txBody>
+          <a:bodyPr wrap="square" lIns="0" tIns="0" rIns="0" bIns="0" rtlCol="0" anchor="ctr"/>
+          <a:lstStyle/>
+          <a:p>
+            <a:pPr algn="ctr" indent="0" marL="0">
+              <a:buNone/>
+            </a:pPr>
+            <a:r>
+              <a:rPr lang="en-US" altLang="en-US" sz="750" dirty="0">
+                <a:solidFill>
+                  <a:srgbClr val="6C757D"/>
+                </a:solidFill>
+                <a:latin typeface="Vazirmatn" pitchFamily="34" charset="0"/>
+                <a:ea typeface="Vazirmatn" pitchFamily="34" charset="-122"/>
+                <a:cs typeface="Vazirmatn" pitchFamily="34" charset="-120"/>
+              </a:rPr>
+              <a:t>08</a:t>
+            </a:r>
+            <a:endParaRPr lang="en-US" sz="750" dirty="0"/>
+          </a:p>
+        </p:txBody>
+      </p:sp>
+    </p:spTree>
+  </p:cSld>
+  <p:clrMapOvr>
+    <a:masterClrMapping/>
+  </p:clrMapOvr>
+</p:sld>
+</file>
+
+<file path=ppt/slides/slide3.xml><?xml version="1.0" encoding="utf-8"?>
+<p:sld xmlns:a="http://schemas.openxmlformats.org/drawingml/2006/main" xmlns:r="http://schemas.openxmlformats.org/officeDocument/2006/relationships" xmlns:p="http://schemas.openxmlformats.org/presentationml/2006/main">
+  <p:cSld name="Slide 3">
+    <p:bg>
+      <p:bgPr>
+        <a:solidFill>
+          <a:srgbClr val="F8F9FA"/>
         </a:solidFill>
       </p:bgPr>
     </p:bg>
@@ -2145,13 +2941,13 @@
             <a:avLst/>
           </a:prstGeom>
           <a:solidFill>
-            <a:srgbClr val="2E7D32">
+            <a:srgbClr val="0D5C75">
               <a:alpha val="22000"/>
             </a:srgbClr>
           </a:solidFill>
           <a:ln w="12700">
             <a:solidFill>
-              <a:srgbClr val="2E7D32">
+              <a:srgbClr val="0D5C75">
                 <a:alpha val="0"/>
               </a:srgbClr>
             </a:solidFill>
@@ -2174,11 +2970,11 @@
             <a:avLst/>
           </a:prstGeom>
           <a:solidFill>
-            <a:srgbClr val="FFC107"/>
+            <a:srgbClr val="F4A261"/>
           </a:solidFill>
           <a:ln w="12700">
             <a:solidFill>
-              <a:srgbClr val="FFC107">
+              <a:srgbClr val="F4A261">
                 <a:alpha val="0"/>
               </a:srgbClr>
             </a:solidFill>
@@ -2201,11 +2997,11 @@
             <a:avLst/>
           </a:prstGeom>
           <a:solidFill>
-            <a:srgbClr val="FFC107"/>
+            <a:srgbClr val="F4A261"/>
           </a:solidFill>
           <a:ln w="12700">
             <a:solidFill>
-              <a:srgbClr val="FFC107">
+              <a:srgbClr val="F4A261">
                 <a:alpha val="0"/>
               </a:srgbClr>
             </a:solidFill>
@@ -2240,13 +3036,13 @@
             <a:r>
               <a:rPr lang="en-US" altLang="en-US" sz="1050" b="1" spc="50" kern="0" dirty="0">
                 <a:solidFill>
-                  <a:srgbClr val="FFC107"/>
-                </a:solidFill>
-                <a:latin typeface="Vazirmatn" pitchFamily="34" charset="0"/>
-                <a:ea typeface="Vazirmatn" pitchFamily="34" charset="-122"/>
-                <a:cs typeface="Vazirmatn" pitchFamily="34" charset="-120"/>
-              </a:rPr>
-              <a:t>The Core Insight</a:t>
+                  <a:srgbClr val="F4A261"/>
+                </a:solidFill>
+                <a:latin typeface="Vazirmatn" pitchFamily="34" charset="0"/>
+                <a:ea typeface="Vazirmatn" pitchFamily="34" charset="-122"/>
+                <a:cs typeface="Vazirmatn" pitchFamily="34" charset="-120"/>
+              </a:rPr>
+              <a:t>03</a:t>
             </a:r>
             <a:endParaRPr lang="en-US" sz="1050" dirty="0"/>
           </a:p>
@@ -2279,13 +3075,13 @@
             <a:r>
               <a:rPr lang="en-US" altLang="en-US" sz="2500" b="1" dirty="0">
                 <a:solidFill>
-                  <a:srgbClr val="212121"/>
-                </a:solidFill>
-                <a:latin typeface="Vazirmatn" pitchFamily="34" charset="0"/>
-                <a:ea typeface="Vazirmatn" pitchFamily="34" charset="-122"/>
-                <a:cs typeface="Vazirmatn" pitchFamily="34" charset="-120"/>
-              </a:rPr>
-              <a:t>Why Fast Charging at Retail Works</a:t>
+                  <a:srgbClr val="1D3557"/>
+                </a:solidFill>
+                <a:latin typeface="Vazirmatn" pitchFamily="34" charset="0"/>
+                <a:ea typeface="Vazirmatn" pitchFamily="34" charset="-122"/>
+                <a:cs typeface="Vazirmatn" pitchFamily="34" charset="-120"/>
+              </a:rPr>
+              <a:t>Bridging Convenience and Scale</a:t>
             </a:r>
             <a:endParaRPr lang="en-US" sz="2500" dirty="0"/>
           </a:p>
@@ -2318,13 +3114,13 @@
             <a:r>
               <a:rPr lang="en-US" altLang="en-US" sz="1250" dirty="0">
                 <a:solidFill>
-                  <a:srgbClr val="757575"/>
-                </a:solidFill>
-                <a:latin typeface="Vazirmatn" pitchFamily="34" charset="0"/>
-                <a:ea typeface="Vazirmatn" pitchFamily="34" charset="-122"/>
-                <a:cs typeface="Vazirmatn" pitchFamily="34" charset="-120"/>
-              </a:rPr>
-              <a:t>Most EV charging happens at home—but fast public charging is essential for road trips and drivers without home access.</a:t>
+                  <a:srgbClr val="6C757D"/>
+                </a:solidFill>
+                <a:latin typeface="Vazirmatn" pitchFamily="34" charset="0"/>
+                <a:ea typeface="Vazirmatn" pitchFamily="34" charset="-122"/>
+                <a:cs typeface="Vazirmatn" pitchFamily="34" charset="-120"/>
+              </a:rPr>
+              <a:t>National retail footprints provide unmatched proximity for everyday drivers</a:t>
             </a:r>
             <a:endParaRPr lang="en-US" sz="1250" dirty="0"/>
           </a:p>
@@ -2357,13 +3153,13 @@
             <a:r>
               <a:rPr lang="en-US" altLang="en-US" sz="750" dirty="0">
                 <a:solidFill>
-                  <a:srgbClr val="757575"/>
-                </a:solidFill>
-                <a:latin typeface="Vazirmatn" pitchFamily="34" charset="0"/>
-                <a:ea typeface="Vazirmatn" pitchFamily="34" charset="-122"/>
-                <a:cs typeface="Vazirmatn" pitchFamily="34" charset="-120"/>
-              </a:rPr>
-              <a:t>02</a:t>
+                  <a:srgbClr val="6C757D"/>
+                </a:solidFill>
+                <a:latin typeface="Vazirmatn" pitchFamily="34" charset="0"/>
+                <a:ea typeface="Vazirmatn" pitchFamily="34" charset="-122"/>
+                <a:cs typeface="Vazirmatn" pitchFamily="34" charset="-120"/>
+              </a:rPr>
+              <a:t>03</a:t>
             </a:r>
             <a:endParaRPr lang="en-US" sz="750" dirty="0"/>
           </a:p>
@@ -2396,7 +3192,7 @@
             <a:r>
               <a:rPr lang="en-US" altLang="en-US" sz="750" dirty="0">
                 <a:solidFill>
-                  <a:srgbClr val="757575"/>
+                  <a:srgbClr val="6C757D"/>
                 </a:solidFill>
                 <a:latin typeface="Vazirmatn" pitchFamily="34" charset="0"/>
                 <a:ea typeface="Vazirmatn" pitchFamily="34" charset="-122"/>
@@ -2435,7 +3231,7 @@
             <a:r>
               <a:rPr lang="en-US" altLang="en-US" sz="750" dirty="0">
                 <a:solidFill>
-                  <a:srgbClr val="757575"/>
+                  <a:srgbClr val="6C757D"/>
                 </a:solidFill>
                 <a:latin typeface="Vazirmatn" pitchFamily="34" charset="0"/>
                 <a:ea typeface="Vazirmatn" pitchFamily="34" charset="-122"/>
@@ -2474,401 +3270,15 @@
             <a:r>
               <a:rPr lang="en-US" altLang="en-US" sz="620" dirty="0">
                 <a:solidFill>
-                  <a:srgbClr val="757575"/>
-                </a:solidFill>
-                <a:latin typeface="Vazirmatn" pitchFamily="34" charset="0"/>
-                <a:ea typeface="Vazirmatn" pitchFamily="34" charset="-122"/>
-                <a:cs typeface="Vazirmatn" pitchFamily="34" charset="-120"/>
-              </a:rPr>
-              <a:t>Giant Asparagus</a:t>
+                  <a:srgbClr val="6C757D"/>
+                </a:solidFill>
+                <a:latin typeface="Vazirmatn" pitchFamily="34" charset="0"/>
+                <a:ea typeface="Vazirmatn" pitchFamily="34" charset="-122"/>
+                <a:cs typeface="Vazirmatn" pitchFamily="34" charset="-120"/>
+              </a:rPr>
+              <a:t>Kindel Media</a:t>
             </a:r>
             <a:endParaRPr lang="en-US" sz="620" dirty="0"/>
-          </a:p>
-        </p:txBody>
-      </p:sp>
-    </p:spTree>
-  </p:cSld>
-  <p:clrMapOvr>
-    <a:masterClrMapping/>
-  </p:clrMapOvr>
-</p:sld>
-</file>
-
-<file path=ppt/slides/slide3.xml><?xml version="1.0" encoding="utf-8"?>
-<p:sld xmlns:a="http://schemas.openxmlformats.org/drawingml/2006/main" xmlns:r="http://schemas.openxmlformats.org/officeDocument/2006/relationships" xmlns:p="http://schemas.openxmlformats.org/presentationml/2006/main">
-  <p:cSld name="Slide 3">
-    <p:bg>
-      <p:bgPr>
-        <a:solidFill>
-          <a:srgbClr val="FAFAFA"/>
-        </a:solidFill>
-      </p:bgPr>
-    </p:bg>
-    <p:spTree>
-      <p:nvGrpSpPr>
-        <p:cNvPr id="1" name=""/>
-        <p:cNvGrpSpPr/>
-        <p:nvPr/>
-      </p:nvGrpSpPr>
-      <p:grpSpPr>
-        <a:xfrm>
-          <a:off x="0" y="0"/>
-          <a:ext cx="0" cy="0"/>
-          <a:chOff x="0" y="0"/>
-          <a:chExt cx="0" cy="0"/>
-        </a:xfrm>
-      </p:grpSpPr>
-      <p:sp>
-        <p:nvSpPr>
-          <p:cNvPr id="2" name="Shape 0"/>
-          <p:cNvSpPr/>
-          <p:nvPr/>
-        </p:nvSpPr>
-        <p:spPr>
-          <a:xfrm>
-            <a:off x="-777240" y="-914400"/>
-            <a:ext cx="3200400" cy="3200400"/>
-          </a:xfrm>
-          <a:prstGeom prst="ellipse">
-            <a:avLst/>
-          </a:prstGeom>
-          <a:solidFill>
-            <a:srgbClr val="FF9800">
-              <a:alpha val="30000"/>
-            </a:srgbClr>
-          </a:solidFill>
-          <a:ln w="12700">
-            <a:solidFill>
-              <a:srgbClr val="FF9800">
-                <a:alpha val="0"/>
-              </a:srgbClr>
-            </a:solidFill>
-            <a:prstDash val="solid"/>
-          </a:ln>
-        </p:spPr>
-      </p:sp>
-      <p:sp>
-        <p:nvSpPr>
-          <p:cNvPr id="3" name="Shape 1"/>
-          <p:cNvSpPr/>
-          <p:nvPr/>
-        </p:nvSpPr>
-        <p:spPr>
-          <a:xfrm>
-            <a:off x="9875520" y="4663440"/>
-            <a:ext cx="3017520" cy="3017520"/>
-          </a:xfrm>
-          <a:prstGeom prst="ellipse">
-            <a:avLst/>
-          </a:prstGeom>
-          <a:solidFill>
-            <a:srgbClr val="FFC107">
-              <a:alpha val="32000"/>
-            </a:srgbClr>
-          </a:solidFill>
-          <a:ln w="12700">
-            <a:solidFill>
-              <a:srgbClr val="FFC107">
-                <a:alpha val="0"/>
-              </a:srgbClr>
-            </a:solidFill>
-            <a:prstDash val="solid"/>
-          </a:ln>
-        </p:spPr>
-      </p:sp>
-      <p:sp>
-        <p:nvSpPr>
-          <p:cNvPr id="4" name="Text 2"/>
-          <p:cNvSpPr txBox="1"/>
-          <p:nvPr/>
-        </p:nvSpPr>
-        <p:spPr>
-          <a:xfrm>
-            <a:off x="7315200" y="594360"/>
-            <a:ext cx="4160520" cy="320040"/>
-          </a:xfrm>
-          <a:prstGeom prst="rect">
-            <a:avLst/>
-          </a:prstGeom>
-          <a:noFill/>
-          <a:ln/>
-        </p:spPr>
-        <p:txBody>
-          <a:bodyPr wrap="square" lIns="0" tIns="0" rIns="0" bIns="0" rtlCol="0" anchor="ctr"/>
-          <a:lstStyle/>
-          <a:p>
-            <a:pPr algn="l" indent="0" marL="0">
-              <a:buNone/>
-            </a:pPr>
-            <a:r>
-              <a:rPr lang="en-US" altLang="en-US" sz="1000" b="1" dirty="0">
-                <a:solidFill>
-                  <a:srgbClr val="FFC107"/>
-                </a:solidFill>
-                <a:latin typeface="Vazirmatn" pitchFamily="34" charset="0"/>
-                <a:ea typeface="Vazirmatn" pitchFamily="34" charset="-122"/>
-                <a:cs typeface="Vazirmatn" pitchFamily="34" charset="-120"/>
-              </a:rPr>
-              <a:t>Case Study</a:t>
-            </a:r>
-            <a:endParaRPr lang="en-US" sz="1000" dirty="0"/>
-          </a:p>
-        </p:txBody>
-      </p:sp>
-      <p:sp>
-        <p:nvSpPr>
-          <p:cNvPr id="5" name="Text 3"/>
-          <p:cNvSpPr txBox="1"/>
-          <p:nvPr/>
-        </p:nvSpPr>
-        <p:spPr>
-          <a:xfrm>
-            <a:off x="1005840" y="1115568"/>
-            <a:ext cx="10058400" cy="1600200"/>
-          </a:xfrm>
-          <a:prstGeom prst="rect">
-            <a:avLst/>
-          </a:prstGeom>
-          <a:noFill/>
-          <a:ln/>
-        </p:spPr>
-        <p:txBody>
-          <a:bodyPr wrap="square" lIns="0" tIns="0" rIns="0" bIns="0" rtlCol="0" anchor="ctr">
-            <a:normAutofit/>
-          </a:bodyPr>
-          <a:lstStyle/>
-          <a:p>
-            <a:pPr algn="ctr" indent="0" marL="0">
-              <a:buNone/>
-            </a:pPr>
-            <a:r>
-              <a:rPr lang="en-US" altLang="en-US" sz="2900" b="1" dirty="0">
-                <a:solidFill>
-                  <a:srgbClr val="212121"/>
-                </a:solidFill>
-                <a:latin typeface="Vazirmatn" pitchFamily="34" charset="0"/>
-                <a:ea typeface="Vazirmatn" pitchFamily="34" charset="-122"/>
-                <a:cs typeface="Vazirmatn" pitchFamily="34" charset="-120"/>
-              </a:rPr>
-              <a:t>Ricker’s: The Largest Citywide Retail Fast-Charging Deployment</a:t>
-            </a:r>
-            <a:endParaRPr lang="en-US" sz="2900" dirty="0"/>
-          </a:p>
-        </p:txBody>
-      </p:sp>
-      <p:sp>
-        <p:nvSpPr>
-          <p:cNvPr id="6" name="Shape 4"/>
-          <p:cNvSpPr/>
-          <p:nvPr/>
-        </p:nvSpPr>
-        <p:spPr>
-          <a:xfrm>
-            <a:off x="5212080" y="2944368"/>
-            <a:ext cx="1737360" cy="0"/>
-          </a:xfrm>
-          <a:prstGeom prst="line">
-            <a:avLst/>
-          </a:prstGeom>
-          <a:noFill/>
-          <a:ln w="38100">
-            <a:solidFill>
-              <a:srgbClr val="FFC107"/>
-            </a:solidFill>
-            <a:prstDash val="solid"/>
-            <a:headEnd type="none"/>
-            <a:tailEnd type="none"/>
-          </a:ln>
-        </p:spPr>
-      </p:sp>
-      <p:sp>
-        <p:nvSpPr>
-          <p:cNvPr id="7" name="Text 5"/>
-          <p:cNvSpPr txBox="1"/>
-          <p:nvPr/>
-        </p:nvSpPr>
-        <p:spPr>
-          <a:xfrm>
-            <a:off x="2148840" y="3200400"/>
-            <a:ext cx="7909560" cy="566928"/>
-          </a:xfrm>
-          <a:prstGeom prst="rect">
-            <a:avLst/>
-          </a:prstGeom>
-          <a:noFill/>
-          <a:ln/>
-        </p:spPr>
-        <p:txBody>
-          <a:bodyPr wrap="square" lIns="0" tIns="0" rIns="0" bIns="0" rtlCol="0" anchor="t">
-            <a:normAutofit/>
-          </a:bodyPr>
-          <a:lstStyle/>
-          <a:p>
-            <a:pPr algn="ctr" indent="0" marL="0">
-              <a:buNone/>
-            </a:pPr>
-            <a:endParaRPr lang="en-US" sz="1400" dirty="0"/>
-          </a:p>
-        </p:txBody>
-      </p:sp>
-      <p:sp>
-        <p:nvSpPr>
-          <p:cNvPr id="8" name="Text 6"/>
-          <p:cNvSpPr txBox="1"/>
-          <p:nvPr/>
-        </p:nvSpPr>
-        <p:spPr>
-          <a:xfrm>
-            <a:off x="1828800" y="3886200"/>
-            <a:ext cx="8549640" cy="1325880"/>
-          </a:xfrm>
-          <a:prstGeom prst="rect">
-            <a:avLst/>
-          </a:prstGeom>
-          <a:noFill/>
-          <a:ln/>
-        </p:spPr>
-        <p:txBody>
-          <a:bodyPr wrap="square" lIns="0" tIns="0" rIns="0" bIns="0" rtlCol="0" anchor="t">
-            <a:normAutofit/>
-          </a:bodyPr>
-          <a:lstStyle/>
-          <a:p>
-            <a:pPr algn="ctr" indent="0" marL="0">
-              <a:lnSpc>
-                <a:spcPct val="108000"/>
-              </a:lnSpc>
-              <a:buNone/>
-            </a:pPr>
-            <a:r>
-              <a:rPr lang="en-US" altLang="en-US" sz="1280" dirty="0">
-                <a:solidFill>
-                  <a:srgbClr val="212121"/>
-                </a:solidFill>
-                <a:latin typeface="Vazirmatn" pitchFamily="34" charset="0"/>
-                <a:ea typeface="Vazirmatn" pitchFamily="34" charset="-122"/>
-                <a:cs typeface="Vazirmatn" pitchFamily="34" charset="-120"/>
-              </a:rPr>
-              <a:t>When Nissan expanded its No Charge to Charge program in Indianapolis, it partnered with Ricker’s, a local convenience store chain with 56 locations. The installation marked the largest citywide deployment of DC fast chargers at retail fueling stations in the U.S. . Ricker’s owner Jay Ricker noted that customer visits increased after the chargers were installed, demonstrating how EV infrastructure can drive foot traffic and loyalty.</a:t>
-            </a:r>
-            <a:endParaRPr lang="en-US" sz="1280" dirty="0"/>
-          </a:p>
-        </p:txBody>
-      </p:sp>
-      <p:sp>
-        <p:nvSpPr>
-          <p:cNvPr id="9" name="Text 7"/>
-          <p:cNvSpPr txBox="1"/>
-          <p:nvPr/>
-        </p:nvSpPr>
-        <p:spPr>
-          <a:xfrm>
-            <a:off x="320040" y="6510528"/>
-            <a:ext cx="237744" cy="164592"/>
-          </a:xfrm>
-          <a:prstGeom prst="rect">
-            <a:avLst/>
-          </a:prstGeom>
-          <a:noFill/>
-          <a:ln/>
-        </p:spPr>
-        <p:txBody>
-          <a:bodyPr wrap="square" lIns="0" tIns="0" rIns="0" bIns="0" rtlCol="0" anchor="ctr"/>
-          <a:lstStyle/>
-          <a:p>
-            <a:pPr algn="ctr" indent="0" marL="0">
-              <a:buNone/>
-            </a:pPr>
-            <a:r>
-              <a:rPr lang="en-US" altLang="en-US" sz="750" dirty="0">
-                <a:solidFill>
-                  <a:srgbClr val="757575"/>
-                </a:solidFill>
-                <a:latin typeface="Vazirmatn" pitchFamily="34" charset="0"/>
-                <a:ea typeface="Vazirmatn" pitchFamily="34" charset="-122"/>
-                <a:cs typeface="Vazirmatn" pitchFamily="34" charset="-120"/>
-              </a:rPr>
-              <a:t>03</a:t>
-            </a:r>
-            <a:endParaRPr lang="en-US" sz="750" dirty="0"/>
-          </a:p>
-        </p:txBody>
-      </p:sp>
-      <p:sp>
-        <p:nvSpPr>
-          <p:cNvPr id="10" name="Text 8"/>
-          <p:cNvSpPr txBox="1"/>
-          <p:nvPr/>
-        </p:nvSpPr>
-        <p:spPr>
-          <a:xfrm>
-            <a:off x="557784" y="6510528"/>
-            <a:ext cx="128016" cy="164592"/>
-          </a:xfrm>
-          <a:prstGeom prst="rect">
-            <a:avLst/>
-          </a:prstGeom>
-          <a:noFill/>
-          <a:ln/>
-        </p:spPr>
-        <p:txBody>
-          <a:bodyPr wrap="square" lIns="0" tIns="0" rIns="0" bIns="0" rtlCol="0" anchor="ctr"/>
-          <a:lstStyle/>
-          <a:p>
-            <a:pPr algn="ctr" indent="0" marL="0">
-              <a:buNone/>
-            </a:pPr>
-            <a:r>
-              <a:rPr lang="en-US" altLang="en-US" sz="750" dirty="0">
-                <a:solidFill>
-                  <a:srgbClr val="757575"/>
-                </a:solidFill>
-                <a:latin typeface="Vazirmatn" pitchFamily="34" charset="0"/>
-                <a:ea typeface="Vazirmatn" pitchFamily="34" charset="-122"/>
-                <a:cs typeface="Vazirmatn" pitchFamily="34" charset="-120"/>
-              </a:rPr>
-              <a:t>/</a:t>
-            </a:r>
-            <a:endParaRPr lang="en-US" sz="750" dirty="0"/>
-          </a:p>
-        </p:txBody>
-      </p:sp>
-      <p:sp>
-        <p:nvSpPr>
-          <p:cNvPr id="11" name="Text 9"/>
-          <p:cNvSpPr txBox="1"/>
-          <p:nvPr/>
-        </p:nvSpPr>
-        <p:spPr>
-          <a:xfrm>
-            <a:off x="685800" y="6510528"/>
-            <a:ext cx="237744" cy="164592"/>
-          </a:xfrm>
-          <a:prstGeom prst="rect">
-            <a:avLst/>
-          </a:prstGeom>
-          <a:noFill/>
-          <a:ln/>
-        </p:spPr>
-        <p:txBody>
-          <a:bodyPr wrap="square" lIns="0" tIns="0" rIns="0" bIns="0" rtlCol="0" anchor="ctr"/>
-          <a:lstStyle/>
-          <a:p>
-            <a:pPr algn="ctr" indent="0" marL="0">
-              <a:buNone/>
-            </a:pPr>
-            <a:r>
-              <a:rPr lang="en-US" altLang="en-US" sz="750" dirty="0">
-                <a:solidFill>
-                  <a:srgbClr val="757575"/>
-                </a:solidFill>
-                <a:latin typeface="Vazirmatn" pitchFamily="34" charset="0"/>
-                <a:ea typeface="Vazirmatn" pitchFamily="34" charset="-122"/>
-                <a:cs typeface="Vazirmatn" pitchFamily="34" charset="-120"/>
-              </a:rPr>
-              <a:t>08</a:t>
-            </a:r>
-            <a:endParaRPr lang="en-US" sz="750" dirty="0"/>
           </a:p>
         </p:txBody>
       </p:sp>
@@ -2886,2261 +3296,7 @@
     <p:bg>
       <p:bgPr>
         <a:solidFill>
-          <a:srgbClr val="FAFAFA"/>
-        </a:solidFill>
-      </p:bgPr>
-    </p:bg>
-    <p:spTree>
-      <p:nvGrpSpPr>
-        <p:cNvPr id="1" name=""/>
-        <p:cNvGrpSpPr/>
-        <p:nvPr/>
-      </p:nvGrpSpPr>
-      <p:grpSpPr>
-        <a:xfrm>
-          <a:off x="0" y="0"/>
-          <a:ext cx="0" cy="0"/>
-          <a:chOff x="0" y="0"/>
-          <a:chExt cx="0" cy="0"/>
-        </a:xfrm>
-      </p:grpSpPr>
-      <p:sp>
-        <p:nvSpPr>
-          <p:cNvPr id="2" name="Shape 0"/>
-          <p:cNvSpPr/>
-          <p:nvPr/>
-        </p:nvSpPr>
-        <p:spPr>
-          <a:xfrm>
-            <a:off x="11503152" y="347472"/>
-            <a:ext cx="155448" cy="310896"/>
-          </a:xfrm>
-          <a:prstGeom prst="rect">
-            <a:avLst/>
-          </a:prstGeom>
-          <a:solidFill>
-            <a:srgbClr val="FFC107"/>
-          </a:solidFill>
-          <a:ln w="12700">
-            <a:solidFill>
-              <a:srgbClr val="FFC107">
-                <a:alpha val="0"/>
-              </a:srgbClr>
-            </a:solidFill>
-            <a:prstDash val="solid"/>
-          </a:ln>
-        </p:spPr>
-      </p:sp>
-      <p:sp>
-        <p:nvSpPr>
-          <p:cNvPr id="3" name="Text 1"/>
-          <p:cNvSpPr txBox="1"/>
-          <p:nvPr/>
-        </p:nvSpPr>
-        <p:spPr>
-          <a:xfrm>
-            <a:off x="5166360" y="329184"/>
-            <a:ext cx="6217920" cy="365760"/>
-          </a:xfrm>
-          <a:prstGeom prst="rect">
-            <a:avLst/>
-          </a:prstGeom>
-          <a:noFill/>
-          <a:ln/>
-        </p:spPr>
-        <p:txBody>
-          <a:bodyPr wrap="square" lIns="0" tIns="0" rIns="0" bIns="0" rtlCol="0" anchor="ctr"/>
-          <a:lstStyle/>
-          <a:p>
-            <a:pPr algn="r" indent="0" marL="0">
-              <a:buNone/>
-            </a:pPr>
-            <a:r>
-              <a:rPr lang="en-US" altLang="en-US" sz="1050" b="1" spc="50" kern="0" dirty="0">
-                <a:solidFill>
-                  <a:srgbClr val="FFC107"/>
-                </a:solidFill>
-                <a:latin typeface="Vazirmatn" pitchFamily="34" charset="0"/>
-                <a:ea typeface="Vazirmatn" pitchFamily="34" charset="-122"/>
-                <a:cs typeface="Vazirmatn" pitchFamily="34" charset="-120"/>
-              </a:rPr>
-              <a:t>For EV Owners</a:t>
-            </a:r>
-            <a:endParaRPr lang="en-US" sz="1050" dirty="0"/>
-          </a:p>
-        </p:txBody>
-      </p:sp>
-      <p:sp>
-        <p:nvSpPr>
-          <p:cNvPr id="4" name="Text 2"/>
-          <p:cNvSpPr txBox="1"/>
-          <p:nvPr/>
-        </p:nvSpPr>
-        <p:spPr>
-          <a:xfrm>
-            <a:off x="5166360" y="731520"/>
-            <a:ext cx="6492240" cy="868680"/>
-          </a:xfrm>
-          <a:prstGeom prst="rect">
-            <a:avLst/>
-          </a:prstGeom>
-          <a:noFill/>
-          <a:ln/>
-        </p:spPr>
-        <p:txBody>
-          <a:bodyPr wrap="square" lIns="0" tIns="0" rIns="0" bIns="0" rtlCol="0" anchor="t"/>
-          <a:lstStyle/>
-          <a:p>
-            <a:pPr algn="r" indent="0" marL="0">
-              <a:buNone/>
-            </a:pPr>
-            <a:r>
-              <a:rPr lang="en-US" altLang="en-US" sz="2400" b="1" dirty="0">
-                <a:solidFill>
-                  <a:srgbClr val="212121"/>
-                </a:solidFill>
-                <a:latin typeface="Vazirmatn" pitchFamily="34" charset="0"/>
-                <a:ea typeface="Vazirmatn" pitchFamily="34" charset="-122"/>
-                <a:cs typeface="Vazirmatn" pitchFamily="34" charset="-120"/>
-              </a:rPr>
-              <a:t>What Drivers Need to Know</a:t>
-            </a:r>
-            <a:endParaRPr lang="en-US" sz="2400" dirty="0"/>
-          </a:p>
-        </p:txBody>
-      </p:sp>
-      <p:sp>
-        <p:nvSpPr>
-          <p:cNvPr id="5" name="Shape 3"/>
-          <p:cNvSpPr/>
-          <p:nvPr/>
-        </p:nvSpPr>
-        <p:spPr>
-          <a:xfrm>
-            <a:off x="502920" y="2304288"/>
-            <a:ext cx="3593592" cy="3794760"/>
-          </a:xfrm>
-          <a:prstGeom prst="roundRect">
-            <a:avLst/>
-          </a:prstGeom>
-          <a:solidFill>
-            <a:srgbClr val="FFFFFF"/>
-          </a:solidFill>
-          <a:ln w="8890">
-            <a:solidFill>
-              <a:srgbClr val="DCE4EE">
-                <a:alpha val="65000"/>
-              </a:srgbClr>
-            </a:solidFill>
-            <a:prstDash val="solid"/>
-          </a:ln>
-          <a:effectLst>
-            <a:outerShdw sx="100000" sy="100000" kx="0" ky="0" algn="bl" rotWithShape="0" blurRad="25400" dist="13970" dir="2700000">
-              <a:srgbClr val="000000">
-                <a:alpha val="16000"/>
-              </a:srgbClr>
-            </a:outerShdw>
-          </a:effectLst>
-        </p:spPr>
-      </p:sp>
-      <p:sp>
-        <p:nvSpPr>
-          <p:cNvPr id="6" name="Shape 4"/>
-          <p:cNvSpPr/>
-          <p:nvPr/>
-        </p:nvSpPr>
-        <p:spPr>
-          <a:xfrm>
-            <a:off x="3383280" y="2624328"/>
-            <a:ext cx="457200" cy="457200"/>
-          </a:xfrm>
-          <a:prstGeom prst="ellipse">
-            <a:avLst/>
-          </a:prstGeom>
-          <a:solidFill>
-            <a:srgbClr val="FFC107"/>
-          </a:solidFill>
-          <a:ln w="12700">
-            <a:solidFill>
-              <a:srgbClr val="FFC107">
-                <a:alpha val="0"/>
-              </a:srgbClr>
-            </a:solidFill>
-            <a:prstDash val="solid"/>
-          </a:ln>
-        </p:spPr>
-      </p:sp>
-      <p:pic>
-        <p:nvPicPr>
-          <p:cNvPr id="7" name="Image 0" descr="preencoded.png">    </p:cNvPr>
-          <p:cNvPicPr>
-            <a:picLocks noChangeAspect="1"/>
-          </p:cNvPicPr>
-          <p:nvPr/>
-        </p:nvPicPr>
-        <p:blipFill>
-          <a:blip r:embed="rId1">
-            <a:extLst>
-              <a:ext uri="{96DAC541-7B7A-43D3-8B79-37D633B846F1}">
-                <asvg:svgBlip xmlns:asvg="http://schemas.microsoft.com/office/drawing/2016/SVG/main" r:embed="rId2"/>
-              </a:ext>
-            </a:extLst>
-          </a:blip>
-          <a:stretch>
-            <a:fillRect/>
-          </a:stretch>
-        </p:blipFill>
-        <p:spPr>
-          <a:xfrm>
-            <a:off x="3488436" y="2729484"/>
-            <a:ext cx="246888" cy="246888"/>
-          </a:xfrm>
-          <a:prstGeom prst="rect">
-            <a:avLst/>
-          </a:prstGeom>
-        </p:spPr>
-      </p:pic>
-      <p:sp>
-        <p:nvSpPr>
-          <p:cNvPr id="8" name="Text 5"/>
-          <p:cNvSpPr txBox="1"/>
-          <p:nvPr/>
-        </p:nvSpPr>
-        <p:spPr>
-          <a:xfrm>
-            <a:off x="777240" y="3081528"/>
-            <a:ext cx="3044952" cy="347472"/>
-          </a:xfrm>
-          <a:prstGeom prst="rect">
-            <a:avLst/>
-          </a:prstGeom>
-          <a:noFill/>
-          <a:ln/>
-        </p:spPr>
-        <p:txBody>
-          <a:bodyPr wrap="square" lIns="0" tIns="0" rIns="0" bIns="0" rtlCol="0" anchor="ctr"/>
-          <a:lstStyle/>
-          <a:p>
-            <a:pPr algn="l" indent="0" marL="0">
-              <a:buNone/>
-            </a:pPr>
-            <a:r>
-              <a:rPr lang="en-US" altLang="en-US" sz="1300" b="1" dirty="0">
-                <a:solidFill>
-                  <a:srgbClr val="212121"/>
-                </a:solidFill>
-                <a:latin typeface="Vazirmatn" pitchFamily="34" charset="0"/>
-                <a:ea typeface="Vazirmatn" pitchFamily="34" charset="-122"/>
-                <a:cs typeface="Vazirmatn" pitchFamily="34" charset="-120"/>
-              </a:rPr>
-              <a:t>Fast Charging is a Time-Saver</a:t>
-            </a:r>
-            <a:endParaRPr lang="en-US" sz="1300" dirty="0"/>
-          </a:p>
-        </p:txBody>
-      </p:sp>
-      <p:sp>
-        <p:nvSpPr>
-          <p:cNvPr id="9" name="Text 6"/>
-          <p:cNvSpPr txBox="1"/>
-          <p:nvPr/>
-        </p:nvSpPr>
-        <p:spPr>
-          <a:xfrm>
-            <a:off x="777240" y="3511296"/>
-            <a:ext cx="3044952" cy="2350008"/>
-          </a:xfrm>
-          <a:prstGeom prst="rect">
-            <a:avLst/>
-          </a:prstGeom>
-          <a:noFill/>
-          <a:ln/>
-        </p:spPr>
-        <p:txBody>
-          <a:bodyPr wrap="square" lIns="0" tIns="0" rIns="0" bIns="0" rtlCol="0" anchor="t"/>
-          <a:lstStyle/>
-          <a:p>
-            <a:pPr algn="l" indent="0" marL="0">
-              <a:buNone/>
-            </a:pPr>
-            <a:r>
-              <a:rPr lang="en-US" altLang="en-US" sz="1200" dirty="0">
-                <a:solidFill>
-                  <a:srgbClr val="757575"/>
-                </a:solidFill>
-                <a:latin typeface="Vazirmatn" pitchFamily="34" charset="0"/>
-                <a:ea typeface="Vazirmatn" pitchFamily="34" charset="-122"/>
-                <a:cs typeface="Vazirmatn" pitchFamily="34" charset="-120"/>
-              </a:rPr>
-              <a:t>When drivers need fast charging, they prefer the highest power available (up to 350+ kW) to minimize downtime. Retail locations make this convenient by offering shopping, dining,…</a:t>
-            </a:r>
-            <a:endParaRPr lang="en-US" sz="1200" dirty="0"/>
-          </a:p>
-        </p:txBody>
-      </p:sp>
-      <p:sp>
-        <p:nvSpPr>
-          <p:cNvPr id="10" name="Shape 7"/>
-          <p:cNvSpPr/>
-          <p:nvPr/>
-        </p:nvSpPr>
-        <p:spPr>
-          <a:xfrm>
-            <a:off x="4297680" y="2304288"/>
-            <a:ext cx="3593592" cy="3794760"/>
-          </a:xfrm>
-          <a:prstGeom prst="roundRect">
-            <a:avLst/>
-          </a:prstGeom>
-          <a:solidFill>
-            <a:srgbClr val="FFFFFF"/>
-          </a:solidFill>
-          <a:ln w="8890">
-            <a:solidFill>
-              <a:srgbClr val="DCE4EE">
-                <a:alpha val="65000"/>
-              </a:srgbClr>
-            </a:solidFill>
-            <a:prstDash val="solid"/>
-          </a:ln>
-          <a:effectLst>
-            <a:outerShdw sx="100000" sy="100000" kx="0" ky="0" algn="bl" rotWithShape="0" blurRad="25400" dist="13970" dir="2700000">
-              <a:srgbClr val="000000">
-                <a:alpha val="16000"/>
-              </a:srgbClr>
-            </a:outerShdw>
-          </a:effectLst>
-        </p:spPr>
-      </p:sp>
-      <p:sp>
-        <p:nvSpPr>
-          <p:cNvPr id="11" name="Shape 8"/>
-          <p:cNvSpPr/>
-          <p:nvPr/>
-        </p:nvSpPr>
-        <p:spPr>
-          <a:xfrm>
-            <a:off x="7178040" y="2624328"/>
-            <a:ext cx="457200" cy="457200"/>
-          </a:xfrm>
-          <a:prstGeom prst="ellipse">
-            <a:avLst/>
-          </a:prstGeom>
-          <a:solidFill>
-            <a:srgbClr val="FF9800"/>
-          </a:solidFill>
-          <a:ln w="12700">
-            <a:solidFill>
-              <a:srgbClr val="FF9800">
-                <a:alpha val="0"/>
-              </a:srgbClr>
-            </a:solidFill>
-            <a:prstDash val="solid"/>
-          </a:ln>
-        </p:spPr>
-      </p:sp>
-      <p:pic>
-        <p:nvPicPr>
-          <p:cNvPr id="12" name="Image 1" descr="preencoded.png">    </p:cNvPr>
-          <p:cNvPicPr>
-            <a:picLocks noChangeAspect="1"/>
-          </p:cNvPicPr>
-          <p:nvPr/>
-        </p:nvPicPr>
-        <p:blipFill>
-          <a:blip r:embed="rId3">
-            <a:extLst>
-              <a:ext uri="{96DAC541-7B7A-43D3-8B79-37D633B846F1}">
-                <asvg:svgBlip xmlns:asvg="http://schemas.microsoft.com/office/drawing/2016/SVG/main" r:embed="rId4"/>
-              </a:ext>
-            </a:extLst>
-          </a:blip>
-          <a:stretch>
-            <a:fillRect/>
-          </a:stretch>
-        </p:blipFill>
-        <p:spPr>
-          <a:xfrm>
-            <a:off x="7283196" y="2729484"/>
-            <a:ext cx="246888" cy="246888"/>
-          </a:xfrm>
-          <a:prstGeom prst="rect">
-            <a:avLst/>
-          </a:prstGeom>
-        </p:spPr>
-      </p:pic>
-      <p:sp>
-        <p:nvSpPr>
-          <p:cNvPr id="13" name="Text 9"/>
-          <p:cNvSpPr txBox="1"/>
-          <p:nvPr/>
-        </p:nvSpPr>
-        <p:spPr>
-          <a:xfrm>
-            <a:off x="4572000" y="3081528"/>
-            <a:ext cx="3044952" cy="347472"/>
-          </a:xfrm>
-          <a:prstGeom prst="rect">
-            <a:avLst/>
-          </a:prstGeom>
-          <a:noFill/>
-          <a:ln/>
-        </p:spPr>
-        <p:txBody>
-          <a:bodyPr wrap="square" lIns="0" tIns="0" rIns="0" bIns="0" rtlCol="0" anchor="ctr"/>
-          <a:lstStyle/>
-          <a:p>
-            <a:pPr algn="l" indent="0" marL="0">
-              <a:buNone/>
-            </a:pPr>
-            <a:r>
-              <a:rPr lang="en-US" altLang="en-US" sz="1300" b="1" dirty="0">
-                <a:solidFill>
-                  <a:srgbClr val="212121"/>
-                </a:solidFill>
-                <a:latin typeface="Vazirmatn" pitchFamily="34" charset="0"/>
-                <a:ea typeface="Vazirmatn" pitchFamily="34" charset="-122"/>
-                <a:cs typeface="Vazirmatn" pitchFamily="34" charset="-120"/>
-              </a:rPr>
-              <a:t>Access for All</a:t>
-            </a:r>
-            <a:endParaRPr lang="en-US" sz="1300" dirty="0"/>
-          </a:p>
-        </p:txBody>
-      </p:sp>
-      <p:sp>
-        <p:nvSpPr>
-          <p:cNvPr id="14" name="Text 10"/>
-          <p:cNvSpPr txBox="1"/>
-          <p:nvPr/>
-        </p:nvSpPr>
-        <p:spPr>
-          <a:xfrm>
-            <a:off x="4572000" y="3511296"/>
-            <a:ext cx="3044952" cy="2350008"/>
-          </a:xfrm>
-          <a:prstGeom prst="rect">
-            <a:avLst/>
-          </a:prstGeom>
-          <a:noFill/>
-          <a:ln/>
-        </p:spPr>
-        <p:txBody>
-          <a:bodyPr wrap="square" lIns="0" tIns="0" rIns="0" bIns="0" rtlCol="0" anchor="t"/>
-          <a:lstStyle/>
-          <a:p>
-            <a:pPr algn="l" indent="0" marL="0">
-              <a:buNone/>
-            </a:pPr>
-            <a:r>
-              <a:rPr lang="en-US" altLang="en-US" sz="1200" dirty="0">
-                <a:solidFill>
-                  <a:srgbClr val="757575"/>
-                </a:solidFill>
-                <a:latin typeface="Vazirmatn" pitchFamily="34" charset="0"/>
-                <a:ea typeface="Vazirmatn" pitchFamily="34" charset="-122"/>
-                <a:cs typeface="Vazirmatn" pitchFamily="34" charset="-120"/>
-              </a:rPr>
-              <a:t>Retail charging hubs help drivers without home access, such as apartment dwellers or urban residents, by providing reliable public options. This expands EV ownership to more peopl…</a:t>
-            </a:r>
-            <a:endParaRPr lang="en-US" sz="1200" dirty="0"/>
-          </a:p>
-        </p:txBody>
-      </p:sp>
-      <p:sp>
-        <p:nvSpPr>
-          <p:cNvPr id="15" name="Shape 11"/>
-          <p:cNvSpPr/>
-          <p:nvPr/>
-        </p:nvSpPr>
-        <p:spPr>
-          <a:xfrm>
-            <a:off x="8092440" y="2304288"/>
-            <a:ext cx="3593592" cy="3794760"/>
-          </a:xfrm>
-          <a:prstGeom prst="roundRect">
-            <a:avLst/>
-          </a:prstGeom>
-          <a:solidFill>
-            <a:srgbClr val="FFFFFF"/>
-          </a:solidFill>
-          <a:ln w="8890">
-            <a:solidFill>
-              <a:srgbClr val="DCE4EE">
-                <a:alpha val="65000"/>
-              </a:srgbClr>
-            </a:solidFill>
-            <a:prstDash val="solid"/>
-          </a:ln>
-          <a:effectLst>
-            <a:outerShdw sx="100000" sy="100000" kx="0" ky="0" algn="bl" rotWithShape="0" blurRad="25400" dist="13970" dir="2700000">
-              <a:srgbClr val="000000">
-                <a:alpha val="16000"/>
-              </a:srgbClr>
-            </a:outerShdw>
-          </a:effectLst>
-        </p:spPr>
-      </p:sp>
-      <p:sp>
-        <p:nvSpPr>
-          <p:cNvPr id="16" name="Shape 12"/>
-          <p:cNvSpPr/>
-          <p:nvPr/>
-        </p:nvSpPr>
-        <p:spPr>
-          <a:xfrm>
-            <a:off x="10972800" y="2624328"/>
-            <a:ext cx="457200" cy="457200"/>
-          </a:xfrm>
-          <a:prstGeom prst="ellipse">
-            <a:avLst/>
-          </a:prstGeom>
-          <a:solidFill>
-            <a:srgbClr val="4CAF50"/>
-          </a:solidFill>
-          <a:ln w="12700">
-            <a:solidFill>
-              <a:srgbClr val="4CAF50">
-                <a:alpha val="0"/>
-              </a:srgbClr>
-            </a:solidFill>
-            <a:prstDash val="solid"/>
-          </a:ln>
-        </p:spPr>
-      </p:sp>
-      <p:pic>
-        <p:nvPicPr>
-          <p:cNvPr id="17" name="Image 2" descr="preencoded.png">    </p:cNvPr>
-          <p:cNvPicPr>
-            <a:picLocks noChangeAspect="1"/>
-          </p:cNvPicPr>
-          <p:nvPr/>
-        </p:nvPicPr>
-        <p:blipFill>
-          <a:blip r:embed="rId5">
-            <a:extLst>
-              <a:ext uri="{96DAC541-7B7A-43D3-8B79-37D633B846F1}">
-                <asvg:svgBlip xmlns:asvg="http://schemas.microsoft.com/office/drawing/2016/SVG/main" r:embed="rId6"/>
-              </a:ext>
-            </a:extLst>
-          </a:blip>
-          <a:stretch>
-            <a:fillRect/>
-          </a:stretch>
-        </p:blipFill>
-        <p:spPr>
-          <a:xfrm>
-            <a:off x="11077956" y="2729484"/>
-            <a:ext cx="246888" cy="246888"/>
-          </a:xfrm>
-          <a:prstGeom prst="rect">
-            <a:avLst/>
-          </a:prstGeom>
-        </p:spPr>
-      </p:pic>
-      <p:sp>
-        <p:nvSpPr>
-          <p:cNvPr id="18" name="Text 13"/>
-          <p:cNvSpPr txBox="1"/>
-          <p:nvPr/>
-        </p:nvSpPr>
-        <p:spPr>
-          <a:xfrm>
-            <a:off x="8366760" y="3081528"/>
-            <a:ext cx="3044952" cy="347472"/>
-          </a:xfrm>
-          <a:prstGeom prst="rect">
-            <a:avLst/>
-          </a:prstGeom>
-          <a:noFill/>
-          <a:ln/>
-        </p:spPr>
-        <p:txBody>
-          <a:bodyPr wrap="square" lIns="0" tIns="0" rIns="0" bIns="0" rtlCol="0" anchor="ctr"/>
-          <a:lstStyle/>
-          <a:p>
-            <a:pPr algn="l" indent="0" marL="0">
-              <a:buNone/>
-            </a:pPr>
-            <a:r>
-              <a:rPr lang="en-US" altLang="en-US" sz="1300" b="1" dirty="0">
-                <a:solidFill>
-                  <a:srgbClr val="212121"/>
-                </a:solidFill>
-                <a:latin typeface="Vazirmatn" pitchFamily="34" charset="0"/>
-                <a:ea typeface="Vazirmatn" pitchFamily="34" charset="-122"/>
-                <a:cs typeface="Vazirmatn" pitchFamily="34" charset="-120"/>
-              </a:rPr>
-              <a:t>Cost Savings</a:t>
-            </a:r>
-            <a:endParaRPr lang="en-US" sz="1300" dirty="0"/>
-          </a:p>
-        </p:txBody>
-      </p:sp>
-      <p:sp>
-        <p:nvSpPr>
-          <p:cNvPr id="19" name="Text 14"/>
-          <p:cNvSpPr txBox="1"/>
-          <p:nvPr/>
-        </p:nvSpPr>
-        <p:spPr>
-          <a:xfrm>
-            <a:off x="8366760" y="3511296"/>
-            <a:ext cx="3044952" cy="2350008"/>
-          </a:xfrm>
-          <a:prstGeom prst="rect">
-            <a:avLst/>
-          </a:prstGeom>
-          <a:noFill/>
-          <a:ln/>
-        </p:spPr>
-        <p:txBody>
-          <a:bodyPr wrap="square" lIns="0" tIns="0" rIns="0" bIns="0" rtlCol="0" anchor="t"/>
-          <a:lstStyle/>
-          <a:p>
-            <a:pPr algn="l" indent="0" marL="0">
-              <a:buNone/>
-            </a:pPr>
-            <a:r>
-              <a:rPr lang="en-US" altLang="en-US" sz="1200" dirty="0">
-                <a:solidFill>
-                  <a:srgbClr val="757575"/>
-                </a:solidFill>
-                <a:latin typeface="Vazirmatn" pitchFamily="34" charset="0"/>
-                <a:ea typeface="Vazirmatn" pitchFamily="34" charset="-122"/>
-                <a:cs typeface="Vazirmatn" pitchFamily="34" charset="-120"/>
-              </a:rPr>
-              <a:t>Retailers like Walmart aim to offer "Every Day Low Price" charging, helping drivers save on transportation costs, which are the second-highest household expense for many Americans…</a:t>
-            </a:r>
-            <a:endParaRPr lang="en-US" sz="1200" dirty="0"/>
-          </a:p>
-        </p:txBody>
-      </p:sp>
-      <p:sp>
-        <p:nvSpPr>
-          <p:cNvPr id="20" name="Text 15"/>
-          <p:cNvSpPr txBox="1"/>
-          <p:nvPr/>
-        </p:nvSpPr>
-        <p:spPr>
-          <a:xfrm>
-            <a:off x="320040" y="6510528"/>
-            <a:ext cx="237744" cy="164592"/>
-          </a:xfrm>
-          <a:prstGeom prst="rect">
-            <a:avLst/>
-          </a:prstGeom>
-          <a:noFill/>
-          <a:ln/>
-        </p:spPr>
-        <p:txBody>
-          <a:bodyPr wrap="square" lIns="0" tIns="0" rIns="0" bIns="0" rtlCol="0" anchor="ctr"/>
-          <a:lstStyle/>
-          <a:p>
-            <a:pPr algn="ctr" indent="0" marL="0">
-              <a:buNone/>
-            </a:pPr>
-            <a:r>
-              <a:rPr lang="en-US" altLang="en-US" sz="750" dirty="0">
-                <a:solidFill>
-                  <a:srgbClr val="757575"/>
-                </a:solidFill>
-                <a:latin typeface="Vazirmatn" pitchFamily="34" charset="0"/>
-                <a:ea typeface="Vazirmatn" pitchFamily="34" charset="-122"/>
-                <a:cs typeface="Vazirmatn" pitchFamily="34" charset="-120"/>
-              </a:rPr>
-              <a:t>04</a:t>
-            </a:r>
-            <a:endParaRPr lang="en-US" sz="750" dirty="0"/>
-          </a:p>
-        </p:txBody>
-      </p:sp>
-      <p:sp>
-        <p:nvSpPr>
-          <p:cNvPr id="21" name="Text 16"/>
-          <p:cNvSpPr txBox="1"/>
-          <p:nvPr/>
-        </p:nvSpPr>
-        <p:spPr>
-          <a:xfrm>
-            <a:off x="557784" y="6510528"/>
-            <a:ext cx="128016" cy="164592"/>
-          </a:xfrm>
-          <a:prstGeom prst="rect">
-            <a:avLst/>
-          </a:prstGeom>
-          <a:noFill/>
-          <a:ln/>
-        </p:spPr>
-        <p:txBody>
-          <a:bodyPr wrap="square" lIns="0" tIns="0" rIns="0" bIns="0" rtlCol="0" anchor="ctr"/>
-          <a:lstStyle/>
-          <a:p>
-            <a:pPr algn="ctr" indent="0" marL="0">
-              <a:buNone/>
-            </a:pPr>
-            <a:r>
-              <a:rPr lang="en-US" altLang="en-US" sz="750" dirty="0">
-                <a:solidFill>
-                  <a:srgbClr val="757575"/>
-                </a:solidFill>
-                <a:latin typeface="Vazirmatn" pitchFamily="34" charset="0"/>
-                <a:ea typeface="Vazirmatn" pitchFamily="34" charset="-122"/>
-                <a:cs typeface="Vazirmatn" pitchFamily="34" charset="-120"/>
-              </a:rPr>
-              <a:t>/</a:t>
-            </a:r>
-            <a:endParaRPr lang="en-US" sz="750" dirty="0"/>
-          </a:p>
-        </p:txBody>
-      </p:sp>
-      <p:sp>
-        <p:nvSpPr>
-          <p:cNvPr id="22" name="Text 17"/>
-          <p:cNvSpPr txBox="1"/>
-          <p:nvPr/>
-        </p:nvSpPr>
-        <p:spPr>
-          <a:xfrm>
-            <a:off x="685800" y="6510528"/>
-            <a:ext cx="237744" cy="164592"/>
-          </a:xfrm>
-          <a:prstGeom prst="rect">
-            <a:avLst/>
-          </a:prstGeom>
-          <a:noFill/>
-          <a:ln/>
-        </p:spPr>
-        <p:txBody>
-          <a:bodyPr wrap="square" lIns="0" tIns="0" rIns="0" bIns="0" rtlCol="0" anchor="ctr"/>
-          <a:lstStyle/>
-          <a:p>
-            <a:pPr algn="ctr" indent="0" marL="0">
-              <a:buNone/>
-            </a:pPr>
-            <a:r>
-              <a:rPr lang="en-US" altLang="en-US" sz="750" dirty="0">
-                <a:solidFill>
-                  <a:srgbClr val="757575"/>
-                </a:solidFill>
-                <a:latin typeface="Vazirmatn" pitchFamily="34" charset="0"/>
-                <a:ea typeface="Vazirmatn" pitchFamily="34" charset="-122"/>
-                <a:cs typeface="Vazirmatn" pitchFamily="34" charset="-120"/>
-              </a:rPr>
-              <a:t>08</a:t>
-            </a:r>
-            <a:endParaRPr lang="en-US" sz="750" dirty="0"/>
-          </a:p>
-        </p:txBody>
-      </p:sp>
-    </p:spTree>
-  </p:cSld>
-  <p:clrMapOvr>
-    <a:masterClrMapping/>
-  </p:clrMapOvr>
-</p:sld>
-</file>
-
-<file path=ppt/slides/slide5.xml><?xml version="1.0" encoding="utf-8"?>
-<p:sld xmlns:a="http://schemas.openxmlformats.org/drawingml/2006/main" xmlns:r="http://schemas.openxmlformats.org/officeDocument/2006/relationships" xmlns:p="http://schemas.openxmlformats.org/presentationml/2006/main">
-  <p:cSld name="Slide 5">
-    <p:bg>
-      <p:bgPr>
-        <a:solidFill>
-          <a:srgbClr val="2E7D32"/>
-        </a:solidFill>
-      </p:bgPr>
-    </p:bg>
-    <p:spTree>
-      <p:nvGrpSpPr>
-        <p:cNvPr id="1" name=""/>
-        <p:cNvGrpSpPr/>
-        <p:nvPr/>
-      </p:nvGrpSpPr>
-      <p:grpSpPr>
-        <a:xfrm>
-          <a:off x="0" y="0"/>
-          <a:ext cx="0" cy="0"/>
-          <a:chOff x="0" y="0"/>
-          <a:chExt cx="0" cy="0"/>
-        </a:xfrm>
-      </p:grpSpPr>
-      <p:sp>
-        <p:nvSpPr>
-          <p:cNvPr id="2" name="Shape 0"/>
-          <p:cNvSpPr/>
-          <p:nvPr/>
-        </p:nvSpPr>
-        <p:spPr>
-          <a:xfrm>
-            <a:off x="11503152" y="347472"/>
-            <a:ext cx="155448" cy="310896"/>
-          </a:xfrm>
-          <a:prstGeom prst="rect">
-            <a:avLst/>
-          </a:prstGeom>
-          <a:solidFill>
-            <a:srgbClr val="FFC107"/>
-          </a:solidFill>
-          <a:ln w="12700">
-            <a:solidFill>
-              <a:srgbClr val="FFC107">
-                <a:alpha val="0"/>
-              </a:srgbClr>
-            </a:solidFill>
-            <a:prstDash val="solid"/>
-          </a:ln>
-        </p:spPr>
-      </p:sp>
-      <p:sp>
-        <p:nvSpPr>
-          <p:cNvPr id="3" name="Text 1"/>
-          <p:cNvSpPr txBox="1"/>
-          <p:nvPr/>
-        </p:nvSpPr>
-        <p:spPr>
-          <a:xfrm>
-            <a:off x="4572000" y="329184"/>
-            <a:ext cx="6812280" cy="365760"/>
-          </a:xfrm>
-          <a:prstGeom prst="rect">
-            <a:avLst/>
-          </a:prstGeom>
-          <a:noFill/>
-          <a:ln/>
-        </p:spPr>
-        <p:txBody>
-          <a:bodyPr wrap="square" lIns="0" tIns="0" rIns="0" bIns="0" rtlCol="0" anchor="ctr"/>
-          <a:lstStyle/>
-          <a:p>
-            <a:pPr algn="r" indent="0" marL="0">
-              <a:buNone/>
-            </a:pPr>
-            <a:r>
-              <a:rPr lang="en-US" altLang="en-US" sz="1050" b="1" spc="50" kern="0" dirty="0">
-                <a:solidFill>
-                  <a:srgbClr val="FFC107"/>
-                </a:solidFill>
-                <a:latin typeface="Vazirmatn" pitchFamily="34" charset="0"/>
-                <a:ea typeface="Vazirmatn" pitchFamily="34" charset="-122"/>
-                <a:cs typeface="Vazirmatn" pitchFamily="34" charset="-120"/>
-              </a:rPr>
-              <a:t>05</a:t>
-            </a:r>
-            <a:endParaRPr lang="en-US" sz="1050" dirty="0"/>
-          </a:p>
-        </p:txBody>
-      </p:sp>
-      <p:sp>
-        <p:nvSpPr>
-          <p:cNvPr id="4" name="Text 2"/>
-          <p:cNvSpPr txBox="1"/>
-          <p:nvPr/>
-        </p:nvSpPr>
-        <p:spPr>
-          <a:xfrm>
-            <a:off x="4572000" y="731520"/>
-            <a:ext cx="7086600" cy="868680"/>
-          </a:xfrm>
-          <a:prstGeom prst="rect">
-            <a:avLst/>
-          </a:prstGeom>
-          <a:noFill/>
-          <a:ln/>
-        </p:spPr>
-        <p:txBody>
-          <a:bodyPr wrap="square" lIns="0" tIns="0" rIns="0" bIns="0" rtlCol="0" anchor="t"/>
-          <a:lstStyle/>
-          <a:p>
-            <a:pPr algn="r" indent="0" marL="0">
-              <a:buNone/>
-            </a:pPr>
-            <a:r>
-              <a:rPr lang="en-US" altLang="en-US" sz="2300" b="1" dirty="0">
-                <a:solidFill>
-                  <a:srgbClr val="F8FAFC"/>
-                </a:solidFill>
-                <a:latin typeface="Vazirmatn" pitchFamily="34" charset="0"/>
-                <a:ea typeface="Vazirmatn" pitchFamily="34" charset="-122"/>
-                <a:cs typeface="Vazirmatn" pitchFamily="34" charset="-120"/>
-              </a:rPr>
-              <a:t>Retail Charging: Benefits for Stores vs. Drivers</a:t>
-            </a:r>
-            <a:endParaRPr lang="en-US" sz="2300" dirty="0"/>
-          </a:p>
-        </p:txBody>
-      </p:sp>
-      <p:sp>
-        <p:nvSpPr>
-          <p:cNvPr id="5" name="Shape 3"/>
-          <p:cNvSpPr/>
-          <p:nvPr/>
-        </p:nvSpPr>
-        <p:spPr>
-          <a:xfrm>
-            <a:off x="566928" y="2395728"/>
-            <a:ext cx="5349240" cy="3611880"/>
-          </a:xfrm>
-          <a:prstGeom prst="roundRect">
-            <a:avLst/>
-          </a:prstGeom>
-          <a:solidFill>
-            <a:srgbClr val="172033"/>
-          </a:solidFill>
-          <a:ln w="8890">
-            <a:solidFill>
-              <a:srgbClr val="475569">
-                <a:alpha val="65000"/>
-              </a:srgbClr>
-            </a:solidFill>
-            <a:prstDash val="solid"/>
-          </a:ln>
-        </p:spPr>
-      </p:sp>
-      <p:sp>
-        <p:nvSpPr>
-          <p:cNvPr id="6" name="Text 4"/>
-          <p:cNvSpPr txBox="1"/>
-          <p:nvPr/>
-        </p:nvSpPr>
-        <p:spPr>
-          <a:xfrm>
-            <a:off x="886968" y="2651760"/>
-            <a:ext cx="4709160" cy="365760"/>
-          </a:xfrm>
-          <a:prstGeom prst="rect">
-            <a:avLst/>
-          </a:prstGeom>
-          <a:noFill/>
-          <a:ln/>
-        </p:spPr>
-        <p:txBody>
-          <a:bodyPr wrap="square" lIns="0" tIns="0" rIns="0" bIns="0" rtlCol="0" anchor="ctr"/>
-          <a:lstStyle/>
-          <a:p>
-            <a:pPr algn="l" indent="0" marL="0">
-              <a:buNone/>
-            </a:pPr>
-            <a:r>
-              <a:rPr lang="en-US" altLang="en-US" sz="1500" b="1" dirty="0">
-                <a:solidFill>
-                  <a:srgbClr val="CBD5E1"/>
-                </a:solidFill>
-                <a:latin typeface="Vazirmatn" pitchFamily="34" charset="0"/>
-                <a:ea typeface="Vazirmatn" pitchFamily="34" charset="-122"/>
-                <a:cs typeface="Vazirmatn" pitchFamily="34" charset="-120"/>
-              </a:rPr>
-              <a:t>For Retailers</a:t>
-            </a:r>
-            <a:endParaRPr lang="en-US" sz="1500" dirty="0"/>
-          </a:p>
-        </p:txBody>
-      </p:sp>
-      <p:pic>
-        <p:nvPicPr>
-          <p:cNvPr id="7" name="Image 0" descr="preencoded.png">    </p:cNvPr>
-          <p:cNvPicPr>
-            <a:picLocks noChangeAspect="1"/>
-          </p:cNvPicPr>
-          <p:nvPr/>
-        </p:nvPicPr>
-        <p:blipFill>
-          <a:blip r:embed="rId1">
-            <a:extLst>
-              <a:ext uri="{96DAC541-7B7A-43D3-8B79-37D633B846F1}">
-                <asvg:svgBlip xmlns:asvg="http://schemas.microsoft.com/office/drawing/2016/SVG/main" r:embed="rId2"/>
-              </a:ext>
-            </a:extLst>
-          </a:blip>
-          <a:stretch>
-            <a:fillRect/>
-          </a:stretch>
-        </p:blipFill>
-        <p:spPr>
-          <a:xfrm>
-            <a:off x="5157216" y="3227832"/>
-            <a:ext cx="365760" cy="365760"/>
-          </a:xfrm>
-          <a:prstGeom prst="rect">
-            <a:avLst/>
-          </a:prstGeom>
-        </p:spPr>
-      </p:pic>
-      <p:sp>
-        <p:nvSpPr>
-          <p:cNvPr id="8" name="Text 5"/>
-          <p:cNvSpPr txBox="1"/>
-          <p:nvPr/>
-        </p:nvSpPr>
-        <p:spPr>
-          <a:xfrm>
-            <a:off x="2075688" y="3191256"/>
-            <a:ext cx="2880360" cy="256032"/>
-          </a:xfrm>
-          <a:prstGeom prst="rect">
-            <a:avLst/>
-          </a:prstGeom>
-          <a:noFill/>
-          <a:ln/>
-        </p:spPr>
-        <p:txBody>
-          <a:bodyPr wrap="square" lIns="0" tIns="0" rIns="0" bIns="0" rtlCol="0" anchor="ctr"/>
-          <a:lstStyle/>
-          <a:p>
-            <a:pPr algn="l" indent="0" marL="0">
-              <a:buNone/>
-            </a:pPr>
-            <a:r>
-              <a:rPr lang="en-US" altLang="en-US" sz="1050" b="1" dirty="0">
-                <a:solidFill>
-                  <a:srgbClr val="FFFFFF"/>
-                </a:solidFill>
-                <a:latin typeface="Vazirmatn" pitchFamily="34" charset="0"/>
-                <a:ea typeface="Vazirmatn" pitchFamily="34" charset="-122"/>
-                <a:cs typeface="Vazirmatn" pitchFamily="34" charset="-120"/>
-              </a:rPr>
-              <a:t>Increased Foot Traffic</a:t>
-            </a:r>
-            <a:endParaRPr lang="en-US" sz="1050" dirty="0"/>
-          </a:p>
-        </p:txBody>
-      </p:sp>
-      <p:sp>
-        <p:nvSpPr>
-          <p:cNvPr id="9" name="Text 6"/>
-          <p:cNvSpPr txBox="1"/>
-          <p:nvPr/>
-        </p:nvSpPr>
-        <p:spPr>
-          <a:xfrm>
-            <a:off x="932688" y="3465576"/>
-            <a:ext cx="4023360" cy="365760"/>
-          </a:xfrm>
-          <a:prstGeom prst="rect">
-            <a:avLst/>
-          </a:prstGeom>
-          <a:noFill/>
-          <a:ln/>
-        </p:spPr>
-        <p:txBody>
-          <a:bodyPr wrap="square" lIns="0" tIns="0" rIns="0" bIns="0" rtlCol="0" anchor="t"/>
-          <a:lstStyle/>
-          <a:p>
-            <a:pPr algn="l" indent="0" marL="0">
-              <a:buNone/>
-            </a:pPr>
-            <a:r>
-              <a:rPr lang="en-US" altLang="en-US" sz="1050" dirty="0">
-                <a:solidFill>
-                  <a:srgbClr val="B8C3D4"/>
-                </a:solidFill>
-                <a:latin typeface="Vazirmatn" pitchFamily="34" charset="0"/>
-                <a:ea typeface="Vazirmatn" pitchFamily="34" charset="-122"/>
-                <a:cs typeface="Vazirmatn" pitchFamily="34" charset="-120"/>
-              </a:rPr>
-              <a:t>EV chargers attract new customers who spend time—and money—on-site while charging. Ricker’s saw a steady increase in customer visits after installing chargers .</a:t>
-            </a:r>
-            <a:endParaRPr lang="en-US" sz="1050" dirty="0"/>
-          </a:p>
-        </p:txBody>
-      </p:sp>
-      <p:pic>
-        <p:nvPicPr>
-          <p:cNvPr id="10" name="Image 1" descr="preencoded.png">    </p:cNvPr>
-          <p:cNvPicPr>
-            <a:picLocks noChangeAspect="1"/>
-          </p:cNvPicPr>
-          <p:nvPr/>
-        </p:nvPicPr>
-        <p:blipFill>
-          <a:blip r:embed="rId3">
-            <a:extLst>
-              <a:ext uri="{96DAC541-7B7A-43D3-8B79-37D633B846F1}">
-                <asvg:svgBlip xmlns:asvg="http://schemas.microsoft.com/office/drawing/2016/SVG/main" r:embed="rId4"/>
-              </a:ext>
-            </a:extLst>
-          </a:blip>
-          <a:stretch>
-            <a:fillRect/>
-          </a:stretch>
-        </p:blipFill>
-        <p:spPr>
-          <a:xfrm>
-            <a:off x="5157216" y="3977640"/>
-            <a:ext cx="365760" cy="365760"/>
-          </a:xfrm>
-          <a:prstGeom prst="rect">
-            <a:avLst/>
-          </a:prstGeom>
-        </p:spPr>
-      </p:pic>
-      <p:sp>
-        <p:nvSpPr>
-          <p:cNvPr id="11" name="Text 7"/>
-          <p:cNvSpPr txBox="1"/>
-          <p:nvPr/>
-        </p:nvSpPr>
-        <p:spPr>
-          <a:xfrm>
-            <a:off x="2075688" y="3941064"/>
-            <a:ext cx="2880360" cy="256032"/>
-          </a:xfrm>
-          <a:prstGeom prst="rect">
-            <a:avLst/>
-          </a:prstGeom>
-          <a:noFill/>
-          <a:ln/>
-        </p:spPr>
-        <p:txBody>
-          <a:bodyPr wrap="square" lIns="0" tIns="0" rIns="0" bIns="0" rtlCol="0" anchor="ctr"/>
-          <a:lstStyle/>
-          <a:p>
-            <a:pPr algn="l" indent="0" marL="0">
-              <a:buNone/>
-            </a:pPr>
-            <a:r>
-              <a:rPr lang="en-US" altLang="en-US" sz="1050" b="1" dirty="0">
-                <a:solidFill>
-                  <a:srgbClr val="FFFFFF"/>
-                </a:solidFill>
-                <a:latin typeface="Vazirmatn" pitchFamily="34" charset="0"/>
-                <a:ea typeface="Vazirmatn" pitchFamily="34" charset="-122"/>
-                <a:cs typeface="Vazirmatn" pitchFamily="34" charset="-120"/>
-              </a:rPr>
-              <a:t>Customer Loyalty</a:t>
-            </a:r>
-            <a:endParaRPr lang="en-US" sz="1050" dirty="0"/>
-          </a:p>
-        </p:txBody>
-      </p:sp>
-      <p:sp>
-        <p:nvSpPr>
-          <p:cNvPr id="12" name="Text 8"/>
-          <p:cNvSpPr txBox="1"/>
-          <p:nvPr/>
-        </p:nvSpPr>
-        <p:spPr>
-          <a:xfrm>
-            <a:off x="932688" y="4215384"/>
-            <a:ext cx="4023360" cy="365760"/>
-          </a:xfrm>
-          <a:prstGeom prst="rect">
-            <a:avLst/>
-          </a:prstGeom>
-          <a:noFill/>
-          <a:ln/>
-        </p:spPr>
-        <p:txBody>
-          <a:bodyPr wrap="square" lIns="0" tIns="0" rIns="0" bIns="0" rtlCol="0" anchor="t"/>
-          <a:lstStyle/>
-          <a:p>
-            <a:pPr algn="l" indent="0" marL="0">
-              <a:buNone/>
-            </a:pPr>
-            <a:r>
-              <a:rPr lang="en-US" altLang="en-US" sz="1050" dirty="0">
-                <a:solidFill>
-                  <a:srgbClr val="B8C3D4"/>
-                </a:solidFill>
-                <a:latin typeface="Vazirmatn" pitchFamily="34" charset="0"/>
-                <a:ea typeface="Vazirmatn" pitchFamily="34" charset="-122"/>
-                <a:cs typeface="Vazirmatn" pitchFamily="34" charset="-120"/>
-              </a:rPr>
-              <a:t>Offering charging aligns with sustainability goals and positions retailers as community leaders in the transition to EVs .</a:t>
-            </a:r>
-            <a:endParaRPr lang="en-US" sz="1050" dirty="0"/>
-          </a:p>
-        </p:txBody>
-      </p:sp>
-      <p:pic>
-        <p:nvPicPr>
-          <p:cNvPr id="13" name="Image 2" descr="preencoded.png">    </p:cNvPr>
-          <p:cNvPicPr>
-            <a:picLocks noChangeAspect="1"/>
-          </p:cNvPicPr>
-          <p:nvPr/>
-        </p:nvPicPr>
-        <p:blipFill>
-          <a:blip r:embed="rId5">
-            <a:extLst>
-              <a:ext uri="{96DAC541-7B7A-43D3-8B79-37D633B846F1}">
-                <asvg:svgBlip xmlns:asvg="http://schemas.microsoft.com/office/drawing/2016/SVG/main" r:embed="rId6"/>
-              </a:ext>
-            </a:extLst>
-          </a:blip>
-          <a:stretch>
-            <a:fillRect/>
-          </a:stretch>
-        </p:blipFill>
-        <p:spPr>
-          <a:xfrm>
-            <a:off x="5157216" y="4727448"/>
-            <a:ext cx="365760" cy="365760"/>
-          </a:xfrm>
-          <a:prstGeom prst="rect">
-            <a:avLst/>
-          </a:prstGeom>
-        </p:spPr>
-      </p:pic>
-      <p:sp>
-        <p:nvSpPr>
-          <p:cNvPr id="14" name="Text 9"/>
-          <p:cNvSpPr txBox="1"/>
-          <p:nvPr/>
-        </p:nvSpPr>
-        <p:spPr>
-          <a:xfrm>
-            <a:off x="2075688" y="4690872"/>
-            <a:ext cx="2880360" cy="256032"/>
-          </a:xfrm>
-          <a:prstGeom prst="rect">
-            <a:avLst/>
-          </a:prstGeom>
-          <a:noFill/>
-          <a:ln/>
-        </p:spPr>
-        <p:txBody>
-          <a:bodyPr wrap="square" lIns="0" tIns="0" rIns="0" bIns="0" rtlCol="0" anchor="ctr"/>
-          <a:lstStyle/>
-          <a:p>
-            <a:pPr algn="l" indent="0" marL="0">
-              <a:buNone/>
-            </a:pPr>
-            <a:r>
-              <a:rPr lang="en-US" altLang="en-US" sz="1050" b="1" dirty="0">
-                <a:solidFill>
-                  <a:srgbClr val="FFFFFF"/>
-                </a:solidFill>
-                <a:latin typeface="Vazirmatn" pitchFamily="34" charset="0"/>
-                <a:ea typeface="Vazirmatn" pitchFamily="34" charset="-122"/>
-                <a:cs typeface="Vazirmatn" pitchFamily="34" charset="-120"/>
-              </a:rPr>
-              <a:t>Future-Proofing</a:t>
-            </a:r>
-            <a:endParaRPr lang="en-US" sz="1050" dirty="0"/>
-          </a:p>
-        </p:txBody>
-      </p:sp>
-      <p:sp>
-        <p:nvSpPr>
-          <p:cNvPr id="15" name="Text 10"/>
-          <p:cNvSpPr txBox="1"/>
-          <p:nvPr/>
-        </p:nvSpPr>
-        <p:spPr>
-          <a:xfrm>
-            <a:off x="932688" y="4965192"/>
-            <a:ext cx="4023360" cy="365760"/>
-          </a:xfrm>
-          <a:prstGeom prst="rect">
-            <a:avLst/>
-          </a:prstGeom>
-          <a:noFill/>
-          <a:ln/>
-        </p:spPr>
-        <p:txBody>
-          <a:bodyPr wrap="square" lIns="0" tIns="0" rIns="0" bIns="0" rtlCol="0" anchor="t"/>
-          <a:lstStyle/>
-          <a:p>
-            <a:pPr algn="l" indent="0" marL="0">
-              <a:buNone/>
-            </a:pPr>
-            <a:r>
-              <a:rPr lang="en-US" altLang="en-US" sz="1050" dirty="0">
-                <a:solidFill>
-                  <a:srgbClr val="B8C3D4"/>
-                </a:solidFill>
-                <a:latin typeface="Vazirmatn" pitchFamily="34" charset="0"/>
-                <a:ea typeface="Vazirmatn" pitchFamily="34" charset="-122"/>
-                <a:cs typeface="Vazirmatn" pitchFamily="34" charset="-120"/>
-              </a:rPr>
-              <a:t>As EV adoption grows, retailers with charging infrastructure will be ahead of the curve, meeting demand before competitors .</a:t>
-            </a:r>
-            <a:endParaRPr lang="en-US" sz="1050" dirty="0"/>
-          </a:p>
-        </p:txBody>
-      </p:sp>
-      <p:sp>
-        <p:nvSpPr>
-          <p:cNvPr id="16" name="Shape 11"/>
-          <p:cNvSpPr/>
-          <p:nvPr/>
-        </p:nvSpPr>
-        <p:spPr>
-          <a:xfrm>
-            <a:off x="6272784" y="2395728"/>
-            <a:ext cx="5349240" cy="3611880"/>
-          </a:xfrm>
-          <a:prstGeom prst="roundRect">
-            <a:avLst/>
-          </a:prstGeom>
-          <a:solidFill>
-            <a:srgbClr val="132D32"/>
-          </a:solidFill>
-          <a:ln w="8890">
-            <a:solidFill>
-              <a:srgbClr val="FF9800">
-                <a:alpha val="65000"/>
-              </a:srgbClr>
-            </a:solidFill>
-            <a:prstDash val="solid"/>
-          </a:ln>
-        </p:spPr>
-      </p:sp>
-      <p:sp>
-        <p:nvSpPr>
-          <p:cNvPr id="17" name="Text 12"/>
-          <p:cNvSpPr txBox="1"/>
-          <p:nvPr/>
-        </p:nvSpPr>
-        <p:spPr>
-          <a:xfrm>
-            <a:off x="6592824" y="2651760"/>
-            <a:ext cx="4709160" cy="365760"/>
-          </a:xfrm>
-          <a:prstGeom prst="rect">
-            <a:avLst/>
-          </a:prstGeom>
-          <a:noFill/>
-          <a:ln/>
-        </p:spPr>
-        <p:txBody>
-          <a:bodyPr wrap="square" lIns="0" tIns="0" rIns="0" bIns="0" rtlCol="0" anchor="ctr"/>
-          <a:lstStyle/>
-          <a:p>
-            <a:pPr algn="l" indent="0" marL="0">
-              <a:buNone/>
-            </a:pPr>
-            <a:r>
-              <a:rPr lang="en-US" altLang="en-US" sz="1500" b="1" dirty="0">
-                <a:solidFill>
-                  <a:srgbClr val="FF9800"/>
-                </a:solidFill>
-                <a:latin typeface="Vazirmatn" pitchFamily="34" charset="0"/>
-                <a:ea typeface="Vazirmatn" pitchFamily="34" charset="-122"/>
-                <a:cs typeface="Vazirmatn" pitchFamily="34" charset="-120"/>
-              </a:rPr>
-              <a:t>For Drivers</a:t>
-            </a:r>
-            <a:endParaRPr lang="en-US" sz="1500" dirty="0"/>
-          </a:p>
-        </p:txBody>
-      </p:sp>
-      <p:pic>
-        <p:nvPicPr>
-          <p:cNvPr id="18" name="Image 3" descr="preencoded.png">    </p:cNvPr>
-          <p:cNvPicPr>
-            <a:picLocks noChangeAspect="1"/>
-          </p:cNvPicPr>
-          <p:nvPr/>
-        </p:nvPicPr>
-        <p:blipFill>
-          <a:blip r:embed="rId7">
-            <a:extLst>
-              <a:ext uri="{96DAC541-7B7A-43D3-8B79-37D633B846F1}">
-                <asvg:svgBlip xmlns:asvg="http://schemas.microsoft.com/office/drawing/2016/SVG/main" r:embed="rId8"/>
-              </a:ext>
-            </a:extLst>
-          </a:blip>
-          <a:stretch>
-            <a:fillRect/>
-          </a:stretch>
-        </p:blipFill>
-        <p:spPr>
-          <a:xfrm>
-            <a:off x="10863072" y="3227832"/>
-            <a:ext cx="365760" cy="365760"/>
-          </a:xfrm>
-          <a:prstGeom prst="rect">
-            <a:avLst/>
-          </a:prstGeom>
-        </p:spPr>
-      </p:pic>
-      <p:sp>
-        <p:nvSpPr>
-          <p:cNvPr id="19" name="Text 13"/>
-          <p:cNvSpPr txBox="1"/>
-          <p:nvPr/>
-        </p:nvSpPr>
-        <p:spPr>
-          <a:xfrm>
-            <a:off x="7781544" y="3191256"/>
-            <a:ext cx="2880360" cy="256032"/>
-          </a:xfrm>
-          <a:prstGeom prst="rect">
-            <a:avLst/>
-          </a:prstGeom>
-          <a:noFill/>
-          <a:ln/>
-        </p:spPr>
-        <p:txBody>
-          <a:bodyPr wrap="square" lIns="0" tIns="0" rIns="0" bIns="0" rtlCol="0" anchor="ctr"/>
-          <a:lstStyle/>
-          <a:p>
-            <a:pPr algn="l" indent="0" marL="0">
-              <a:buNone/>
-            </a:pPr>
-            <a:r>
-              <a:rPr lang="en-US" altLang="en-US" sz="1050" b="1" dirty="0">
-                <a:solidFill>
-                  <a:srgbClr val="FFFFFF"/>
-                </a:solidFill>
-                <a:latin typeface="Vazirmatn" pitchFamily="34" charset="0"/>
-                <a:ea typeface="Vazirmatn" pitchFamily="34" charset="-122"/>
-                <a:cs typeface="Vazirmatn" pitchFamily="34" charset="-120"/>
-              </a:rPr>
-              <a:t>Convenience</a:t>
-            </a:r>
-            <a:endParaRPr lang="en-US" sz="1050" dirty="0"/>
-          </a:p>
-        </p:txBody>
-      </p:sp>
-      <p:sp>
-        <p:nvSpPr>
-          <p:cNvPr id="20" name="Text 14"/>
-          <p:cNvSpPr txBox="1"/>
-          <p:nvPr/>
-        </p:nvSpPr>
-        <p:spPr>
-          <a:xfrm>
-            <a:off x="6638544" y="3465576"/>
-            <a:ext cx="4023360" cy="365760"/>
-          </a:xfrm>
-          <a:prstGeom prst="rect">
-            <a:avLst/>
-          </a:prstGeom>
-          <a:noFill/>
-          <a:ln/>
-        </p:spPr>
-        <p:txBody>
-          <a:bodyPr wrap="square" lIns="0" tIns="0" rIns="0" bIns="0" rtlCol="0" anchor="t"/>
-          <a:lstStyle/>
-          <a:p>
-            <a:pPr algn="l" indent="0" marL="0">
-              <a:buNone/>
-            </a:pPr>
-            <a:r>
-              <a:rPr lang="en-US" altLang="en-US" sz="1050" dirty="0">
-                <a:solidFill>
-                  <a:srgbClr val="B8C3D4"/>
-                </a:solidFill>
-                <a:latin typeface="Vazirmatn" pitchFamily="34" charset="0"/>
-                <a:ea typeface="Vazirmatn" pitchFamily="34" charset="-122"/>
-                <a:cs typeface="Vazirmatn" pitchFamily="34" charset="-120"/>
-              </a:rPr>
-              <a:t>Retail locations are already part of daily routines, making charging a seamless part of errands or road trips .</a:t>
-            </a:r>
-            <a:endParaRPr lang="en-US" sz="1050" dirty="0"/>
-          </a:p>
-        </p:txBody>
-      </p:sp>
-      <p:pic>
-        <p:nvPicPr>
-          <p:cNvPr id="21" name="Image 4" descr="preencoded.png">    </p:cNvPr>
-          <p:cNvPicPr>
-            <a:picLocks noChangeAspect="1"/>
-          </p:cNvPicPr>
-          <p:nvPr/>
-        </p:nvPicPr>
-        <p:blipFill>
-          <a:blip r:embed="rId9">
-            <a:extLst>
-              <a:ext uri="{96DAC541-7B7A-43D3-8B79-37D633B846F1}">
-                <asvg:svgBlip xmlns:asvg="http://schemas.microsoft.com/office/drawing/2016/SVG/main" r:embed="rId10"/>
-              </a:ext>
-            </a:extLst>
-          </a:blip>
-          <a:stretch>
-            <a:fillRect/>
-          </a:stretch>
-        </p:blipFill>
-        <p:spPr>
-          <a:xfrm>
-            <a:off x="10863072" y="3977640"/>
-            <a:ext cx="365760" cy="365760"/>
-          </a:xfrm>
-          <a:prstGeom prst="rect">
-            <a:avLst/>
-          </a:prstGeom>
-        </p:spPr>
-      </p:pic>
-      <p:sp>
-        <p:nvSpPr>
-          <p:cNvPr id="22" name="Text 15"/>
-          <p:cNvSpPr txBox="1"/>
-          <p:nvPr/>
-        </p:nvSpPr>
-        <p:spPr>
-          <a:xfrm>
-            <a:off x="7781544" y="3941064"/>
-            <a:ext cx="2880360" cy="256032"/>
-          </a:xfrm>
-          <a:prstGeom prst="rect">
-            <a:avLst/>
-          </a:prstGeom>
-          <a:noFill/>
-          <a:ln/>
-        </p:spPr>
-        <p:txBody>
-          <a:bodyPr wrap="square" lIns="0" tIns="0" rIns="0" bIns="0" rtlCol="0" anchor="ctr"/>
-          <a:lstStyle/>
-          <a:p>
-            <a:pPr algn="l" indent="0" marL="0">
-              <a:buNone/>
-            </a:pPr>
-            <a:r>
-              <a:rPr lang="en-US" altLang="en-US" sz="1050" b="1" dirty="0">
-                <a:solidFill>
-                  <a:srgbClr val="FFFFFF"/>
-                </a:solidFill>
-                <a:latin typeface="Vazirmatn" pitchFamily="34" charset="0"/>
-                <a:ea typeface="Vazirmatn" pitchFamily="34" charset="-122"/>
-                <a:cs typeface="Vazirmatn" pitchFamily="34" charset="-120"/>
-              </a:rPr>
-              <a:t>Time Efficiency</a:t>
-            </a:r>
-            <a:endParaRPr lang="en-US" sz="1050" dirty="0"/>
-          </a:p>
-        </p:txBody>
-      </p:sp>
-      <p:sp>
-        <p:nvSpPr>
-          <p:cNvPr id="23" name="Text 16"/>
-          <p:cNvSpPr txBox="1"/>
-          <p:nvPr/>
-        </p:nvSpPr>
-        <p:spPr>
-          <a:xfrm>
-            <a:off x="6638544" y="4215384"/>
-            <a:ext cx="4023360" cy="365760"/>
-          </a:xfrm>
-          <a:prstGeom prst="rect">
-            <a:avLst/>
-          </a:prstGeom>
-          <a:noFill/>
-          <a:ln/>
-        </p:spPr>
-        <p:txBody>
-          <a:bodyPr wrap="square" lIns="0" tIns="0" rIns="0" bIns="0" rtlCol="0" anchor="t"/>
-          <a:lstStyle/>
-          <a:p>
-            <a:pPr algn="l" indent="0" marL="0">
-              <a:buNone/>
-            </a:pPr>
-            <a:r>
-              <a:rPr lang="en-US" altLang="en-US" sz="1050" dirty="0">
-                <a:solidFill>
-                  <a:srgbClr val="B8C3D4"/>
-                </a:solidFill>
-                <a:latin typeface="Vazirmatn" pitchFamily="34" charset="0"/>
-                <a:ea typeface="Vazirmatn" pitchFamily="34" charset="-122"/>
-                <a:cs typeface="Vazirmatn" pitchFamily="34" charset="-120"/>
-              </a:rPr>
-              <a:t>Fast chargers (up to 350+ kW) minimize downtime, allowing drivers to shop, eat, or relax while their vehicle charges .</a:t>
-            </a:r>
-            <a:endParaRPr lang="en-US" sz="1050" dirty="0"/>
-          </a:p>
-        </p:txBody>
-      </p:sp>
-      <p:pic>
-        <p:nvPicPr>
-          <p:cNvPr id="24" name="Image 5" descr="preencoded.png">    </p:cNvPr>
-          <p:cNvPicPr>
-            <a:picLocks noChangeAspect="1"/>
-          </p:cNvPicPr>
-          <p:nvPr/>
-        </p:nvPicPr>
-        <p:blipFill>
-          <a:blip r:embed="rId11">
-            <a:extLst>
-              <a:ext uri="{96DAC541-7B7A-43D3-8B79-37D633B846F1}">
-                <asvg:svgBlip xmlns:asvg="http://schemas.microsoft.com/office/drawing/2016/SVG/main" r:embed="rId12"/>
-              </a:ext>
-            </a:extLst>
-          </a:blip>
-          <a:stretch>
-            <a:fillRect/>
-          </a:stretch>
-        </p:blipFill>
-        <p:spPr>
-          <a:xfrm>
-            <a:off x="10863072" y="4727448"/>
-            <a:ext cx="365760" cy="365760"/>
-          </a:xfrm>
-          <a:prstGeom prst="rect">
-            <a:avLst/>
-          </a:prstGeom>
-        </p:spPr>
-      </p:pic>
-      <p:sp>
-        <p:nvSpPr>
-          <p:cNvPr id="25" name="Text 17"/>
-          <p:cNvSpPr txBox="1"/>
-          <p:nvPr/>
-        </p:nvSpPr>
-        <p:spPr>
-          <a:xfrm>
-            <a:off x="7781544" y="4690872"/>
-            <a:ext cx="2880360" cy="256032"/>
-          </a:xfrm>
-          <a:prstGeom prst="rect">
-            <a:avLst/>
-          </a:prstGeom>
-          <a:noFill/>
-          <a:ln/>
-        </p:spPr>
-        <p:txBody>
-          <a:bodyPr wrap="square" lIns="0" tIns="0" rIns="0" bIns="0" rtlCol="0" anchor="ctr"/>
-          <a:lstStyle/>
-          <a:p>
-            <a:pPr algn="l" indent="0" marL="0">
-              <a:buNone/>
-            </a:pPr>
-            <a:r>
-              <a:rPr lang="en-US" altLang="en-US" sz="1050" b="1" dirty="0">
-                <a:solidFill>
-                  <a:srgbClr val="FFFFFF"/>
-                </a:solidFill>
-                <a:latin typeface="Vazirmatn" pitchFamily="34" charset="0"/>
-                <a:ea typeface="Vazirmatn" pitchFamily="34" charset="-122"/>
-                <a:cs typeface="Vazirmatn" pitchFamily="34" charset="-120"/>
-              </a:rPr>
-              <a:t>Cost Savings</a:t>
-            </a:r>
-            <a:endParaRPr lang="en-US" sz="1050" dirty="0"/>
-          </a:p>
-        </p:txBody>
-      </p:sp>
-      <p:sp>
-        <p:nvSpPr>
-          <p:cNvPr id="26" name="Text 18"/>
-          <p:cNvSpPr txBox="1"/>
-          <p:nvPr/>
-        </p:nvSpPr>
-        <p:spPr>
-          <a:xfrm>
-            <a:off x="6638544" y="4965192"/>
-            <a:ext cx="4023360" cy="365760"/>
-          </a:xfrm>
-          <a:prstGeom prst="rect">
-            <a:avLst/>
-          </a:prstGeom>
-          <a:noFill/>
-          <a:ln/>
-        </p:spPr>
-        <p:txBody>
-          <a:bodyPr wrap="square" lIns="0" tIns="0" rIns="0" bIns="0" rtlCol="0" anchor="t"/>
-          <a:lstStyle/>
-          <a:p>
-            <a:pPr algn="l" indent="0" marL="0">
-              <a:buNone/>
-            </a:pPr>
-            <a:r>
-              <a:rPr lang="en-US" altLang="en-US" sz="1050" dirty="0">
-                <a:solidFill>
-                  <a:srgbClr val="B8C3D4"/>
-                </a:solidFill>
-                <a:latin typeface="Vazirmatn" pitchFamily="34" charset="0"/>
-                <a:ea typeface="Vazirmatn" pitchFamily="34" charset="-122"/>
-                <a:cs typeface="Vazirmatn" pitchFamily="34" charset="-120"/>
-              </a:rPr>
-              <a:t>Retailers like Walmart aim to offer low-cost charging, helping drivers reduce transportation expenses .</a:t>
-            </a:r>
-            <a:endParaRPr lang="en-US" sz="1050" dirty="0"/>
-          </a:p>
-        </p:txBody>
-      </p:sp>
-      <p:sp>
-        <p:nvSpPr>
-          <p:cNvPr id="27" name="Shape 19"/>
-          <p:cNvSpPr/>
-          <p:nvPr/>
-        </p:nvSpPr>
-        <p:spPr>
-          <a:xfrm>
-            <a:off x="5824728" y="3767328"/>
-            <a:ext cx="530352" cy="530352"/>
-          </a:xfrm>
-          <a:prstGeom prst="ellipse">
-            <a:avLst/>
-          </a:prstGeom>
-          <a:solidFill>
-            <a:srgbClr val="FFC107"/>
-          </a:solidFill>
-          <a:ln w="12700">
-            <a:solidFill>
-              <a:srgbClr val="FFC107">
-                <a:alpha val="0"/>
-              </a:srgbClr>
-            </a:solidFill>
-            <a:prstDash val="solid"/>
-          </a:ln>
-          <a:effectLst>
-            <a:outerShdw sx="100000" sy="100000" kx="0" ky="0" algn="bl" rotWithShape="0" blurRad="25400" dist="13970" dir="2700000">
-              <a:srgbClr val="000000">
-                <a:alpha val="16000"/>
-              </a:srgbClr>
-            </a:outerShdw>
-          </a:effectLst>
-        </p:spPr>
-      </p:sp>
-      <p:sp>
-        <p:nvSpPr>
-          <p:cNvPr id="28" name="Text 20"/>
-          <p:cNvSpPr txBox="1"/>
-          <p:nvPr/>
-        </p:nvSpPr>
-        <p:spPr>
-          <a:xfrm>
-            <a:off x="5824728" y="3730752"/>
-            <a:ext cx="530352" cy="457200"/>
-          </a:xfrm>
-          <a:prstGeom prst="rect">
-            <a:avLst/>
-          </a:prstGeom>
-          <a:noFill/>
-          <a:ln/>
-        </p:spPr>
-        <p:txBody>
-          <a:bodyPr wrap="square" lIns="0" tIns="0" rIns="0" bIns="0" rtlCol="0" anchor="ctr"/>
-          <a:lstStyle/>
-          <a:p>
-            <a:pPr algn="ctr" indent="0" marL="0">
-              <a:buNone/>
-            </a:pPr>
-            <a:r>
-              <a:rPr lang="en-US" altLang="en-US" sz="2000" b="1" dirty="0">
-                <a:solidFill>
-                  <a:srgbClr val="FFFFFF"/>
-                </a:solidFill>
-                <a:latin typeface="Vazirmatn" pitchFamily="34" charset="0"/>
-                <a:ea typeface="Vazirmatn" pitchFamily="34" charset="-122"/>
-                <a:cs typeface="Vazirmatn" pitchFamily="34" charset="-120"/>
-              </a:rPr>
-              <a:t>↔</a:t>
-            </a:r>
-            <a:endParaRPr lang="en-US" sz="2000" dirty="0"/>
-          </a:p>
-        </p:txBody>
-      </p:sp>
-      <p:sp>
-        <p:nvSpPr>
-          <p:cNvPr id="29" name="Text 21"/>
-          <p:cNvSpPr txBox="1"/>
-          <p:nvPr/>
-        </p:nvSpPr>
-        <p:spPr>
-          <a:xfrm>
-            <a:off x="320040" y="6510528"/>
-            <a:ext cx="237744" cy="164592"/>
-          </a:xfrm>
-          <a:prstGeom prst="rect">
-            <a:avLst/>
-          </a:prstGeom>
-          <a:noFill/>
-          <a:ln/>
-        </p:spPr>
-        <p:txBody>
-          <a:bodyPr wrap="square" lIns="0" tIns="0" rIns="0" bIns="0" rtlCol="0" anchor="ctr"/>
-          <a:lstStyle/>
-          <a:p>
-            <a:pPr algn="ctr" indent="0" marL="0">
-              <a:buNone/>
-            </a:pPr>
-            <a:r>
-              <a:rPr lang="en-US" altLang="en-US" sz="750" dirty="0">
-                <a:solidFill>
-                  <a:srgbClr val="CBD5E1"/>
-                </a:solidFill>
-                <a:latin typeface="Vazirmatn" pitchFamily="34" charset="0"/>
-                <a:ea typeface="Vazirmatn" pitchFamily="34" charset="-122"/>
-                <a:cs typeface="Vazirmatn" pitchFamily="34" charset="-120"/>
-              </a:rPr>
-              <a:t>05</a:t>
-            </a:r>
-            <a:endParaRPr lang="en-US" sz="750" dirty="0"/>
-          </a:p>
-        </p:txBody>
-      </p:sp>
-      <p:sp>
-        <p:nvSpPr>
-          <p:cNvPr id="30" name="Text 22"/>
-          <p:cNvSpPr txBox="1"/>
-          <p:nvPr/>
-        </p:nvSpPr>
-        <p:spPr>
-          <a:xfrm>
-            <a:off x="557784" y="6510528"/>
-            <a:ext cx="128016" cy="164592"/>
-          </a:xfrm>
-          <a:prstGeom prst="rect">
-            <a:avLst/>
-          </a:prstGeom>
-          <a:noFill/>
-          <a:ln/>
-        </p:spPr>
-        <p:txBody>
-          <a:bodyPr wrap="square" lIns="0" tIns="0" rIns="0" bIns="0" rtlCol="0" anchor="ctr"/>
-          <a:lstStyle/>
-          <a:p>
-            <a:pPr algn="ctr" indent="0" marL="0">
-              <a:buNone/>
-            </a:pPr>
-            <a:r>
-              <a:rPr lang="en-US" altLang="en-US" sz="750" dirty="0">
-                <a:solidFill>
-                  <a:srgbClr val="CBD5E1"/>
-                </a:solidFill>
-                <a:latin typeface="Vazirmatn" pitchFamily="34" charset="0"/>
-                <a:ea typeface="Vazirmatn" pitchFamily="34" charset="-122"/>
-                <a:cs typeface="Vazirmatn" pitchFamily="34" charset="-120"/>
-              </a:rPr>
-              <a:t>/</a:t>
-            </a:r>
-            <a:endParaRPr lang="en-US" sz="750" dirty="0"/>
-          </a:p>
-        </p:txBody>
-      </p:sp>
-      <p:sp>
-        <p:nvSpPr>
-          <p:cNvPr id="31" name="Text 23"/>
-          <p:cNvSpPr txBox="1"/>
-          <p:nvPr/>
-        </p:nvSpPr>
-        <p:spPr>
-          <a:xfrm>
-            <a:off x="685800" y="6510528"/>
-            <a:ext cx="237744" cy="164592"/>
-          </a:xfrm>
-          <a:prstGeom prst="rect">
-            <a:avLst/>
-          </a:prstGeom>
-          <a:noFill/>
-          <a:ln/>
-        </p:spPr>
-        <p:txBody>
-          <a:bodyPr wrap="square" lIns="0" tIns="0" rIns="0" bIns="0" rtlCol="0" anchor="ctr"/>
-          <a:lstStyle/>
-          <a:p>
-            <a:pPr algn="ctr" indent="0" marL="0">
-              <a:buNone/>
-            </a:pPr>
-            <a:r>
-              <a:rPr lang="en-US" altLang="en-US" sz="750" dirty="0">
-                <a:solidFill>
-                  <a:srgbClr val="CBD5E1"/>
-                </a:solidFill>
-                <a:latin typeface="Vazirmatn" pitchFamily="34" charset="0"/>
-                <a:ea typeface="Vazirmatn" pitchFamily="34" charset="-122"/>
-                <a:cs typeface="Vazirmatn" pitchFamily="34" charset="-120"/>
-              </a:rPr>
-              <a:t>08</a:t>
-            </a:r>
-            <a:endParaRPr lang="en-US" sz="750" dirty="0"/>
-          </a:p>
-        </p:txBody>
-      </p:sp>
-    </p:spTree>
-  </p:cSld>
-  <p:clrMapOvr>
-    <a:masterClrMapping/>
-  </p:clrMapOvr>
-</p:sld>
-</file>
-
-<file path=ppt/slides/slide6.xml><?xml version="1.0" encoding="utf-8"?>
-<p:sld xmlns:a="http://schemas.openxmlformats.org/drawingml/2006/main" xmlns:r="http://schemas.openxmlformats.org/officeDocument/2006/relationships" xmlns:p="http://schemas.openxmlformats.org/presentationml/2006/main">
-  <p:cSld name="Slide 6">
-    <p:bg>
-      <p:bgPr>
-        <a:solidFill>
-          <a:srgbClr val="4CAF50"/>
-        </a:solidFill>
-      </p:bgPr>
-    </p:bg>
-    <p:spTree>
-      <p:nvGrpSpPr>
-        <p:cNvPr id="1" name=""/>
-        <p:cNvGrpSpPr/>
-        <p:nvPr/>
-      </p:nvGrpSpPr>
-      <p:grpSpPr>
-        <a:xfrm>
-          <a:off x="0" y="0"/>
-          <a:ext cx="0" cy="0"/>
-          <a:chOff x="0" y="0"/>
-          <a:chExt cx="0" cy="0"/>
-        </a:xfrm>
-      </p:grpSpPr>
-      <p:sp>
-        <p:nvSpPr>
-          <p:cNvPr id="2" name="Shape 0"/>
-          <p:cNvSpPr/>
-          <p:nvPr/>
-        </p:nvSpPr>
-        <p:spPr>
-          <a:xfrm>
-            <a:off x="-777240" y="-914400"/>
-            <a:ext cx="3200400" cy="3200400"/>
-          </a:xfrm>
-          <a:prstGeom prst="ellipse">
-            <a:avLst/>
-          </a:prstGeom>
-          <a:solidFill>
-            <a:srgbClr val="FF9800">
-              <a:alpha val="30000"/>
-            </a:srgbClr>
-          </a:solidFill>
-          <a:ln w="12700">
-            <a:solidFill>
-              <a:srgbClr val="FF9800">
-                <a:alpha val="0"/>
-              </a:srgbClr>
-            </a:solidFill>
-            <a:prstDash val="solid"/>
-          </a:ln>
-        </p:spPr>
-      </p:sp>
-      <p:sp>
-        <p:nvSpPr>
-          <p:cNvPr id="3" name="Shape 1"/>
-          <p:cNvSpPr/>
-          <p:nvPr/>
-        </p:nvSpPr>
-        <p:spPr>
-          <a:xfrm>
-            <a:off x="9875520" y="4663440"/>
-            <a:ext cx="3017520" cy="3017520"/>
-          </a:xfrm>
-          <a:prstGeom prst="ellipse">
-            <a:avLst/>
-          </a:prstGeom>
-          <a:solidFill>
-            <a:srgbClr val="FFC107">
-              <a:alpha val="32000"/>
-            </a:srgbClr>
-          </a:solidFill>
-          <a:ln w="12700">
-            <a:solidFill>
-              <a:srgbClr val="FFC107">
-                <a:alpha val="0"/>
-              </a:srgbClr>
-            </a:solidFill>
-            <a:prstDash val="solid"/>
-          </a:ln>
-        </p:spPr>
-      </p:sp>
-      <p:sp>
-        <p:nvSpPr>
-          <p:cNvPr id="4" name="Text 2"/>
-          <p:cNvSpPr txBox="1"/>
-          <p:nvPr/>
-        </p:nvSpPr>
-        <p:spPr>
-          <a:xfrm>
-            <a:off x="7315200" y="594360"/>
-            <a:ext cx="4160520" cy="320040"/>
-          </a:xfrm>
-          <a:prstGeom prst="rect">
-            <a:avLst/>
-          </a:prstGeom>
-          <a:noFill/>
-          <a:ln/>
-        </p:spPr>
-        <p:txBody>
-          <a:bodyPr wrap="square" lIns="0" tIns="0" rIns="0" bIns="0" rtlCol="0" anchor="ctr"/>
-          <a:lstStyle/>
-          <a:p>
-            <a:pPr algn="l" indent="0" marL="0">
-              <a:buNone/>
-            </a:pPr>
-            <a:r>
-              <a:rPr lang="en-US" altLang="en-US" sz="1000" b="1" dirty="0">
-                <a:solidFill>
-                  <a:srgbClr val="FFC107"/>
-                </a:solidFill>
-                <a:latin typeface="Vazirmatn" pitchFamily="34" charset="0"/>
-                <a:ea typeface="Vazirmatn" pitchFamily="34" charset="-122"/>
-                <a:cs typeface="Vazirmatn" pitchFamily="34" charset="-120"/>
-              </a:rPr>
-              <a:t>Infrastructure Needs</a:t>
-            </a:r>
-            <a:endParaRPr lang="en-US" sz="1000" dirty="0"/>
-          </a:p>
-        </p:txBody>
-      </p:sp>
-      <p:sp>
-        <p:nvSpPr>
-          <p:cNvPr id="5" name="Text 3"/>
-          <p:cNvSpPr txBox="1"/>
-          <p:nvPr/>
-        </p:nvSpPr>
-        <p:spPr>
-          <a:xfrm>
-            <a:off x="1005840" y="1115568"/>
-            <a:ext cx="10058400" cy="1600200"/>
-          </a:xfrm>
-          <a:prstGeom prst="rect">
-            <a:avLst/>
-          </a:prstGeom>
-          <a:noFill/>
-          <a:ln/>
-        </p:spPr>
-        <p:txBody>
-          <a:bodyPr wrap="square" lIns="0" tIns="0" rIns="0" bIns="0" rtlCol="0" anchor="ctr">
-            <a:normAutofit/>
-          </a:bodyPr>
-          <a:lstStyle/>
-          <a:p>
-            <a:pPr algn="ctr" indent="0" marL="0">
-              <a:buNone/>
-            </a:pPr>
-            <a:r>
-              <a:rPr lang="en-US" altLang="en-US" sz="3000" b="1" dirty="0">
-                <a:solidFill>
-                  <a:srgbClr val="FFFFFF"/>
-                </a:solidFill>
-                <a:latin typeface="Vazirmatn" pitchFamily="34" charset="0"/>
-                <a:ea typeface="Vazirmatn" pitchFamily="34" charset="-122"/>
-                <a:cs typeface="Vazirmatn" pitchFamily="34" charset="-120"/>
-              </a:rPr>
-              <a:t>The Role of Fast Charging in the National Network</a:t>
-            </a:r>
-            <a:endParaRPr lang="en-US" sz="3000" dirty="0"/>
-          </a:p>
-        </p:txBody>
-      </p:sp>
-      <p:sp>
-        <p:nvSpPr>
-          <p:cNvPr id="6" name="Shape 4"/>
-          <p:cNvSpPr/>
-          <p:nvPr/>
-        </p:nvSpPr>
-        <p:spPr>
-          <a:xfrm>
-            <a:off x="5212080" y="2944368"/>
-            <a:ext cx="1737360" cy="0"/>
-          </a:xfrm>
-          <a:prstGeom prst="line">
-            <a:avLst/>
-          </a:prstGeom>
-          <a:noFill/>
-          <a:ln w="38100">
-            <a:solidFill>
-              <a:srgbClr val="FFC107"/>
-            </a:solidFill>
-            <a:prstDash val="solid"/>
-            <a:headEnd type="none"/>
-            <a:tailEnd type="none"/>
-          </a:ln>
-        </p:spPr>
-      </p:sp>
-      <p:sp>
-        <p:nvSpPr>
-          <p:cNvPr id="7" name="Text 5"/>
-          <p:cNvSpPr txBox="1"/>
-          <p:nvPr/>
-        </p:nvSpPr>
-        <p:spPr>
-          <a:xfrm>
-            <a:off x="2148840" y="3127248"/>
-            <a:ext cx="7909560" cy="566928"/>
-          </a:xfrm>
-          <a:prstGeom prst="rect">
-            <a:avLst/>
-          </a:prstGeom>
-          <a:noFill/>
-          <a:ln/>
-        </p:spPr>
-        <p:txBody>
-          <a:bodyPr wrap="square" lIns="0" tIns="0" rIns="0" bIns="0" rtlCol="0" anchor="t">
-            <a:normAutofit/>
-          </a:bodyPr>
-          <a:lstStyle/>
-          <a:p>
-            <a:pPr algn="ctr" indent="0" marL="0">
-              <a:buNone/>
-            </a:pPr>
-            <a:endParaRPr lang="en-US" sz="1400" dirty="0"/>
-          </a:p>
-        </p:txBody>
-      </p:sp>
-      <p:sp>
-        <p:nvSpPr>
-          <p:cNvPr id="8" name="Text 6"/>
-          <p:cNvSpPr txBox="1"/>
-          <p:nvPr/>
-        </p:nvSpPr>
-        <p:spPr>
-          <a:xfrm>
-            <a:off x="1828800" y="3813048"/>
-            <a:ext cx="8549640" cy="1325880"/>
-          </a:xfrm>
-          <a:prstGeom prst="rect">
-            <a:avLst/>
-          </a:prstGeom>
-          <a:noFill/>
-          <a:ln/>
-        </p:spPr>
-        <p:txBody>
-          <a:bodyPr wrap="square" lIns="0" tIns="0" rIns="0" bIns="0" rtlCol="0" anchor="t">
-            <a:normAutofit/>
-          </a:bodyPr>
-          <a:lstStyle/>
-          <a:p>
-            <a:pPr algn="ctr" indent="0" marL="0">
-              <a:lnSpc>
-                <a:spcPct val="108000"/>
-              </a:lnSpc>
-              <a:buNone/>
-            </a:pPr>
-            <a:r>
-              <a:rPr lang="en-US" altLang="en-US" sz="1280" dirty="0">
-                <a:solidFill>
-                  <a:srgbClr val="FFFFFF"/>
-                </a:solidFill>
-                <a:latin typeface="Vazirmatn" pitchFamily="34" charset="0"/>
-                <a:ea typeface="Vazirmatn" pitchFamily="34" charset="-122"/>
-                <a:cs typeface="Vazirmatn" pitchFamily="34" charset="-120"/>
-              </a:rPr>
-              <a:t>By 2030, the U.S. will need 182,000 public DC fast-charging ports to support EV adoption. While this is a smaller portion of the total charging network (compared to home and Level 2 chargers), fast charging is critical for enabling road trips and supporting drivers without home access .</a:t>
-            </a:r>
-            <a:endParaRPr lang="en-US" sz="1280" dirty="0"/>
-          </a:p>
-        </p:txBody>
-      </p:sp>
-      <p:sp>
-        <p:nvSpPr>
-          <p:cNvPr id="9" name="Text 7"/>
-          <p:cNvSpPr txBox="1"/>
-          <p:nvPr/>
-        </p:nvSpPr>
-        <p:spPr>
-          <a:xfrm>
-            <a:off x="320040" y="6510528"/>
-            <a:ext cx="237744" cy="164592"/>
-          </a:xfrm>
-          <a:prstGeom prst="rect">
-            <a:avLst/>
-          </a:prstGeom>
-          <a:noFill/>
-          <a:ln/>
-        </p:spPr>
-        <p:txBody>
-          <a:bodyPr wrap="square" lIns="0" tIns="0" rIns="0" bIns="0" rtlCol="0" anchor="ctr"/>
-          <a:lstStyle/>
-          <a:p>
-            <a:pPr algn="ctr" indent="0" marL="0">
-              <a:buNone/>
-            </a:pPr>
-            <a:r>
-              <a:rPr lang="en-US" altLang="en-US" sz="750" dirty="0">
-                <a:solidFill>
-                  <a:srgbClr val="D9F3EF"/>
-                </a:solidFill>
-                <a:latin typeface="Vazirmatn" pitchFamily="34" charset="0"/>
-                <a:ea typeface="Vazirmatn" pitchFamily="34" charset="-122"/>
-                <a:cs typeface="Vazirmatn" pitchFamily="34" charset="-120"/>
-              </a:rPr>
-              <a:t>06</a:t>
-            </a:r>
-            <a:endParaRPr lang="en-US" sz="750" dirty="0"/>
-          </a:p>
-        </p:txBody>
-      </p:sp>
-      <p:sp>
-        <p:nvSpPr>
-          <p:cNvPr id="10" name="Text 8"/>
-          <p:cNvSpPr txBox="1"/>
-          <p:nvPr/>
-        </p:nvSpPr>
-        <p:spPr>
-          <a:xfrm>
-            <a:off x="557784" y="6510528"/>
-            <a:ext cx="128016" cy="164592"/>
-          </a:xfrm>
-          <a:prstGeom prst="rect">
-            <a:avLst/>
-          </a:prstGeom>
-          <a:noFill/>
-          <a:ln/>
-        </p:spPr>
-        <p:txBody>
-          <a:bodyPr wrap="square" lIns="0" tIns="0" rIns="0" bIns="0" rtlCol="0" anchor="ctr"/>
-          <a:lstStyle/>
-          <a:p>
-            <a:pPr algn="ctr" indent="0" marL="0">
-              <a:buNone/>
-            </a:pPr>
-            <a:r>
-              <a:rPr lang="en-US" altLang="en-US" sz="750" dirty="0">
-                <a:solidFill>
-                  <a:srgbClr val="D9F3EF"/>
-                </a:solidFill>
-                <a:latin typeface="Vazirmatn" pitchFamily="34" charset="0"/>
-                <a:ea typeface="Vazirmatn" pitchFamily="34" charset="-122"/>
-                <a:cs typeface="Vazirmatn" pitchFamily="34" charset="-120"/>
-              </a:rPr>
-              <a:t>/</a:t>
-            </a:r>
-            <a:endParaRPr lang="en-US" sz="750" dirty="0"/>
-          </a:p>
-        </p:txBody>
-      </p:sp>
-      <p:sp>
-        <p:nvSpPr>
-          <p:cNvPr id="11" name="Text 9"/>
-          <p:cNvSpPr txBox="1"/>
-          <p:nvPr/>
-        </p:nvSpPr>
-        <p:spPr>
-          <a:xfrm>
-            <a:off x="685800" y="6510528"/>
-            <a:ext cx="237744" cy="164592"/>
-          </a:xfrm>
-          <a:prstGeom prst="rect">
-            <a:avLst/>
-          </a:prstGeom>
-          <a:noFill/>
-          <a:ln/>
-        </p:spPr>
-        <p:txBody>
-          <a:bodyPr wrap="square" lIns="0" tIns="0" rIns="0" bIns="0" rtlCol="0" anchor="ctr"/>
-          <a:lstStyle/>
-          <a:p>
-            <a:pPr algn="ctr" indent="0" marL="0">
-              <a:buNone/>
-            </a:pPr>
-            <a:r>
-              <a:rPr lang="en-US" altLang="en-US" sz="750" dirty="0">
-                <a:solidFill>
-                  <a:srgbClr val="D9F3EF"/>
-                </a:solidFill>
-                <a:latin typeface="Vazirmatn" pitchFamily="34" charset="0"/>
-                <a:ea typeface="Vazirmatn" pitchFamily="34" charset="-122"/>
-                <a:cs typeface="Vazirmatn" pitchFamily="34" charset="-120"/>
-              </a:rPr>
-              <a:t>08</a:t>
-            </a:r>
-            <a:endParaRPr lang="en-US" sz="750" dirty="0"/>
-          </a:p>
-        </p:txBody>
-      </p:sp>
-    </p:spTree>
-  </p:cSld>
-  <p:clrMapOvr>
-    <a:masterClrMapping/>
-  </p:clrMapOvr>
-</p:sld>
-</file>
-
-<file path=ppt/slides/slide7.xml><?xml version="1.0" encoding="utf-8"?>
-<p:sld xmlns:a="http://schemas.openxmlformats.org/drawingml/2006/main" xmlns:r="http://schemas.openxmlformats.org/officeDocument/2006/relationships" xmlns:p="http://schemas.openxmlformats.org/presentationml/2006/main">
-  <p:cSld name="Slide 7">
-    <p:bg>
-      <p:bgPr>
-        <a:solidFill>
-          <a:srgbClr val="FAFAFA"/>
+          <a:srgbClr val="F8F9FA"/>
         </a:solidFill>
       </p:bgPr>
     </p:bg>
@@ -5168,7 +3324,7 @@
         </p:nvPicPr>
         <p:blipFill>
           <a:blip r:embed="rId1"/>
-          <a:srcRect l="24245" r="24245" t="0" b="0"/>
+          <a:srcRect l="27117" r="27117" t="0" b="0"/>
           <a:stretch/>
         </p:blipFill>
         <p:spPr>
@@ -5196,13 +3352,13 @@
             <a:avLst/>
           </a:prstGeom>
           <a:solidFill>
-            <a:srgbClr val="2E7D32">
+            <a:srgbClr val="0D5C75">
               <a:alpha val="22000"/>
             </a:srgbClr>
           </a:solidFill>
           <a:ln w="12700">
             <a:solidFill>
-              <a:srgbClr val="2E7D32">
+              <a:srgbClr val="0D5C75">
                 <a:alpha val="0"/>
               </a:srgbClr>
             </a:solidFill>
@@ -5225,11 +3381,11 @@
             <a:avLst/>
           </a:prstGeom>
           <a:solidFill>
-            <a:srgbClr val="FFC107"/>
+            <a:srgbClr val="F4A261"/>
           </a:solidFill>
           <a:ln w="12700">
             <a:solidFill>
-              <a:srgbClr val="FFC107">
+              <a:srgbClr val="F4A261">
                 <a:alpha val="0"/>
               </a:srgbClr>
             </a:solidFill>
@@ -5252,11 +3408,11 @@
             <a:avLst/>
           </a:prstGeom>
           <a:solidFill>
-            <a:srgbClr val="FFC107"/>
+            <a:srgbClr val="F4A261"/>
           </a:solidFill>
           <a:ln w="12700">
             <a:solidFill>
-              <a:srgbClr val="FFC107">
+              <a:srgbClr val="F4A261">
                 <a:alpha val="0"/>
               </a:srgbClr>
             </a:solidFill>
@@ -5291,13 +3447,13 @@
             <a:r>
               <a:rPr lang="en-US" altLang="en-US" sz="1050" b="1" spc="50" kern="0" dirty="0">
                 <a:solidFill>
-                  <a:srgbClr val="FFC107"/>
-                </a:solidFill>
-                <a:latin typeface="Vazirmatn" pitchFamily="34" charset="0"/>
-                <a:ea typeface="Vazirmatn" pitchFamily="34" charset="-122"/>
-                <a:cs typeface="Vazirmatn" pitchFamily="34" charset="-120"/>
-              </a:rPr>
-              <a:t>Grid Reliability</a:t>
+                  <a:srgbClr val="F4A261"/>
+                </a:solidFill>
+                <a:latin typeface="Vazirmatn" pitchFamily="34" charset="0"/>
+                <a:ea typeface="Vazirmatn" pitchFamily="34" charset="-122"/>
+                <a:cs typeface="Vazirmatn" pitchFamily="34" charset="-120"/>
+              </a:rPr>
+              <a:t>04</a:t>
             </a:r>
             <a:endParaRPr lang="en-US" sz="1050" dirty="0"/>
           </a:p>
@@ -5328,23 +3484,62 @@
               <a:buNone/>
             </a:pPr>
             <a:r>
-              <a:rPr lang="en-US" altLang="en-US" sz="2500" b="1" dirty="0">
-                <a:solidFill>
-                  <a:srgbClr val="212121"/>
-                </a:solidFill>
-                <a:latin typeface="Vazirmatn" pitchFamily="34" charset="0"/>
-                <a:ea typeface="Vazirmatn" pitchFamily="34" charset="-122"/>
-                <a:cs typeface="Vazirmatn" pitchFamily="34" charset="-120"/>
-              </a:rPr>
-              <a:t>How Retail Charging Supports the Grid</a:t>
-            </a:r>
-            <a:endParaRPr lang="en-US" sz="2500" dirty="0"/>
+              <a:rPr lang="en-US" altLang="en-US" sz="2400" b="1" dirty="0">
+                <a:solidFill>
+                  <a:srgbClr val="1D3557"/>
+                </a:solidFill>
+                <a:latin typeface="Vazirmatn" pitchFamily="34" charset="0"/>
+                <a:ea typeface="Vazirmatn" pitchFamily="34" charset="-122"/>
+                <a:cs typeface="Vazirmatn" pitchFamily="34" charset="-120"/>
+              </a:rPr>
+              <a:t>Early Retail Deployment: Ricker's Case Study</a:t>
+            </a:r>
+            <a:endParaRPr lang="en-US" sz="2400" dirty="0"/>
           </a:p>
         </p:txBody>
       </p:sp>
       <p:sp>
         <p:nvSpPr>
           <p:cNvPr id="8" name="Text 5"/>
+          <p:cNvSpPr txBox="1"/>
+          <p:nvPr/>
+        </p:nvSpPr>
+        <p:spPr>
+          <a:xfrm>
+            <a:off x="5486400" y="1783080"/>
+            <a:ext cx="6126480" cy="594360"/>
+          </a:xfrm>
+          <a:prstGeom prst="rect">
+            <a:avLst/>
+          </a:prstGeom>
+          <a:noFill/>
+          <a:ln/>
+        </p:spPr>
+        <p:txBody>
+          <a:bodyPr wrap="square" lIns="0" tIns="0" rIns="0" bIns="0" rtlCol="0" anchor="t"/>
+          <a:lstStyle/>
+          <a:p>
+            <a:pPr algn="r" indent="0" marL="0">
+              <a:buNone/>
+            </a:pPr>
+            <a:r>
+              <a:rPr lang="en-US" altLang="en-US" sz="1250" dirty="0">
+                <a:solidFill>
+                  <a:srgbClr val="6C757D"/>
+                </a:solidFill>
+                <a:latin typeface="Vazirmatn" pitchFamily="34" charset="0"/>
+                <a:ea typeface="Vazirmatn" pitchFamily="34" charset="-122"/>
+                <a:cs typeface="Vazirmatn" pitchFamily="34" charset="-120"/>
+              </a:rPr>
+              <a:t>Pioneering citywide DC fast charging at convenience store locations in Indianapolis</a:t>
+            </a:r>
+            <a:endParaRPr lang="en-US" sz="1250" dirty="0"/>
+          </a:p>
+        </p:txBody>
+      </p:sp>
+      <p:sp>
+        <p:nvSpPr>
+          <p:cNvPr id="9" name="Text 6"/>
           <p:cNvSpPr txBox="1"/>
           <p:nvPr/>
         </p:nvSpPr>
@@ -5369,13 +3564,13 @@
             <a:r>
               <a:rPr lang="en-US" altLang="en-US" sz="750" dirty="0">
                 <a:solidFill>
-                  <a:srgbClr val="757575"/>
-                </a:solidFill>
-                <a:latin typeface="Vazirmatn" pitchFamily="34" charset="0"/>
-                <a:ea typeface="Vazirmatn" pitchFamily="34" charset="-122"/>
-                <a:cs typeface="Vazirmatn" pitchFamily="34" charset="-120"/>
-              </a:rPr>
-              <a:t>07</a:t>
+                  <a:srgbClr val="6C757D"/>
+                </a:solidFill>
+                <a:latin typeface="Vazirmatn" pitchFamily="34" charset="0"/>
+                <a:ea typeface="Vazirmatn" pitchFamily="34" charset="-122"/>
+                <a:cs typeface="Vazirmatn" pitchFamily="34" charset="-120"/>
+              </a:rPr>
+              <a:t>04</a:t>
             </a:r>
             <a:endParaRPr lang="en-US" sz="750" dirty="0"/>
           </a:p>
@@ -5383,7 +3578,7 @@
       </p:sp>
       <p:sp>
         <p:nvSpPr>
-          <p:cNvPr id="9" name="Text 6"/>
+          <p:cNvPr id="10" name="Text 7"/>
           <p:cNvSpPr txBox="1"/>
           <p:nvPr/>
         </p:nvSpPr>
@@ -5408,7 +3603,7 @@
             <a:r>
               <a:rPr lang="en-US" altLang="en-US" sz="750" dirty="0">
                 <a:solidFill>
-                  <a:srgbClr val="757575"/>
+                  <a:srgbClr val="6C757D"/>
                 </a:solidFill>
                 <a:latin typeface="Vazirmatn" pitchFamily="34" charset="0"/>
                 <a:ea typeface="Vazirmatn" pitchFamily="34" charset="-122"/>
@@ -5422,7 +3617,7 @@
       </p:sp>
       <p:sp>
         <p:nvSpPr>
-          <p:cNvPr id="10" name="Text 7"/>
+          <p:cNvPr id="11" name="Text 8"/>
           <p:cNvSpPr txBox="1"/>
           <p:nvPr/>
         </p:nvSpPr>
@@ -5447,7 +3642,7 @@
             <a:r>
               <a:rPr lang="en-US" altLang="en-US" sz="750" dirty="0">
                 <a:solidFill>
-                  <a:srgbClr val="757575"/>
+                  <a:srgbClr val="6C757D"/>
                 </a:solidFill>
                 <a:latin typeface="Vazirmatn" pitchFamily="34" charset="0"/>
                 <a:ea typeface="Vazirmatn" pitchFamily="34" charset="-122"/>
@@ -5461,7 +3656,7 @@
       </p:sp>
       <p:sp>
         <p:nvSpPr>
-          <p:cNvPr id="11" name="Text 8"/>
+          <p:cNvPr id="12" name="Text 9"/>
           <p:cNvSpPr txBox="1"/>
           <p:nvPr/>
         </p:nvSpPr>
@@ -5486,13 +3681,13 @@
             <a:r>
               <a:rPr lang="en-US" altLang="en-US" sz="620" dirty="0">
                 <a:solidFill>
-                  <a:srgbClr val="757575"/>
-                </a:solidFill>
-                <a:latin typeface="Vazirmatn" pitchFamily="34" charset="0"/>
-                <a:ea typeface="Vazirmatn" pitchFamily="34" charset="-122"/>
-                <a:cs typeface="Vazirmatn" pitchFamily="34" charset="-120"/>
-              </a:rPr>
-              <a:t>Kindel Media</a:t>
+                  <a:srgbClr val="6C757D"/>
+                </a:solidFill>
+                <a:latin typeface="Vazirmatn" pitchFamily="34" charset="0"/>
+                <a:ea typeface="Vazirmatn" pitchFamily="34" charset="-122"/>
+                <a:cs typeface="Vazirmatn" pitchFamily="34" charset="-120"/>
+              </a:rPr>
+              <a:t>Erik Mclean</a:t>
             </a:r>
             <a:endParaRPr lang="en-US" sz="620" dirty="0"/>
           </a:p>
@@ -5506,13 +3701,13 @@
 </p:sld>
 </file>
 
-<file path=ppt/slides/slide8.xml><?xml version="1.0" encoding="utf-8"?>
+<file path=ppt/slides/slide5.xml><?xml version="1.0" encoding="utf-8"?>
 <p:sld xmlns:a="http://schemas.openxmlformats.org/drawingml/2006/main" xmlns:r="http://schemas.openxmlformats.org/officeDocument/2006/relationships" xmlns:p="http://schemas.openxmlformats.org/presentationml/2006/main">
-  <p:cSld name="Slide 8">
+  <p:cSld name="Slide 5">
     <p:bg>
       <p:bgPr>
         <a:solidFill>
-          <a:srgbClr val="2E7D32"/>
+          <a:srgbClr val="F8F9FA"/>
         </a:solidFill>
       </p:bgPr>
     </p:bg>
@@ -5538,20 +3733,18 @@
         </p:nvSpPr>
         <p:spPr>
           <a:xfrm>
-            <a:off x="109728" y="5074920"/>
-            <a:ext cx="1508760" cy="1508760"/>
-          </a:xfrm>
-          <a:prstGeom prst="ellipse">
+            <a:off x="11457432" y="347472"/>
+            <a:ext cx="155448" cy="310896"/>
+          </a:xfrm>
+          <a:prstGeom prst="rect">
             <a:avLst/>
           </a:prstGeom>
           <a:solidFill>
-            <a:srgbClr val="FF9800">
-              <a:alpha val="25000"/>
-            </a:srgbClr>
+            <a:srgbClr val="F4A261"/>
           </a:solidFill>
           <a:ln w="12700">
             <a:solidFill>
-              <a:srgbClr val="FF9800">
+              <a:srgbClr val="F4A261">
                 <a:alpha val="0"/>
               </a:srgbClr>
             </a:solidFill>
@@ -5561,26 +3754,175 @@
       </p:sp>
       <p:sp>
         <p:nvSpPr>
-          <p:cNvPr id="3" name="Shape 1"/>
+          <p:cNvPr id="3" name="Text 1"/>
+          <p:cNvSpPr txBox="1"/>
+          <p:nvPr/>
+        </p:nvSpPr>
+        <p:spPr>
+          <a:xfrm>
+            <a:off x="5212080" y="329184"/>
+            <a:ext cx="6126480" cy="365760"/>
+          </a:xfrm>
+          <a:prstGeom prst="rect">
+            <a:avLst/>
+          </a:prstGeom>
+          <a:noFill/>
+          <a:ln/>
+        </p:spPr>
+        <p:txBody>
+          <a:bodyPr wrap="square" lIns="0" tIns="0" rIns="0" bIns="0" rtlCol="0" anchor="ctr"/>
+          <a:lstStyle/>
+          <a:p>
+            <a:pPr algn="r" indent="0" marL="0">
+              <a:buNone/>
+            </a:pPr>
+            <a:r>
+              <a:rPr lang="en-US" altLang="en-US" sz="1050" b="1" spc="50" kern="0" dirty="0">
+                <a:solidFill>
+                  <a:srgbClr val="F4A261"/>
+                </a:solidFill>
+                <a:latin typeface="Vazirmatn" pitchFamily="34" charset="0"/>
+                <a:ea typeface="Vazirmatn" pitchFamily="34" charset="-122"/>
+                <a:cs typeface="Vazirmatn" pitchFamily="34" charset="-120"/>
+              </a:rPr>
+              <a:t>05</a:t>
+            </a:r>
+            <a:endParaRPr lang="en-US" sz="1050" dirty="0"/>
+          </a:p>
+        </p:txBody>
+      </p:sp>
+      <p:sp>
+        <p:nvSpPr>
+          <p:cNvPr id="4" name="Text 2"/>
+          <p:cNvSpPr txBox="1"/>
+          <p:nvPr/>
+        </p:nvSpPr>
+        <p:spPr>
+          <a:xfrm>
+            <a:off x="5212080" y="731520"/>
+            <a:ext cx="6400800" cy="868680"/>
+          </a:xfrm>
+          <a:prstGeom prst="rect">
+            <a:avLst/>
+          </a:prstGeom>
+          <a:noFill/>
+          <a:ln/>
+        </p:spPr>
+        <p:txBody>
+          <a:bodyPr wrap="square" lIns="0" tIns="0" rIns="0" bIns="0" rtlCol="0" anchor="t"/>
+          <a:lstStyle/>
+          <a:p>
+            <a:pPr algn="r" indent="0" marL="0">
+              <a:buNone/>
+            </a:pPr>
+            <a:r>
+              <a:rPr lang="en-US" altLang="en-US" sz="2400" b="1" dirty="0">
+                <a:solidFill>
+                  <a:srgbClr val="1D3557"/>
+                </a:solidFill>
+                <a:latin typeface="Vazirmatn" pitchFamily="34" charset="0"/>
+                <a:ea typeface="Vazirmatn" pitchFamily="34" charset="-122"/>
+                <a:cs typeface="Vazirmatn" pitchFamily="34" charset="-120"/>
+              </a:rPr>
+              <a:t>Modeling Travel Demand and Siting</a:t>
+            </a:r>
+            <a:endParaRPr lang="en-US" sz="2400" dirty="0"/>
+          </a:p>
+        </p:txBody>
+      </p:sp>
+      <p:sp>
+        <p:nvSpPr>
+          <p:cNvPr id="5" name="Text 3"/>
+          <p:cNvSpPr txBox="1"/>
+          <p:nvPr/>
+        </p:nvSpPr>
+        <p:spPr>
+          <a:xfrm>
+            <a:off x="5212080" y="1645920"/>
+            <a:ext cx="6400800" cy="594360"/>
+          </a:xfrm>
+          <a:prstGeom prst="rect">
+            <a:avLst/>
+          </a:prstGeom>
+          <a:noFill/>
+          <a:ln/>
+        </p:spPr>
+        <p:txBody>
+          <a:bodyPr wrap="square" lIns="0" tIns="0" rIns="0" bIns="0" rtlCol="0" anchor="t"/>
+          <a:lstStyle/>
+          <a:p>
+            <a:pPr algn="r" indent="0" marL="0">
+              <a:buNone/>
+            </a:pPr>
+            <a:r>
+              <a:rPr lang="en-US" altLang="en-US" sz="1250" dirty="0">
+                <a:solidFill>
+                  <a:srgbClr val="6C757D"/>
+                </a:solidFill>
+                <a:latin typeface="Vazirmatn" pitchFamily="34" charset="0"/>
+                <a:ea typeface="Vazirmatn" pitchFamily="34" charset="-122"/>
+                <a:cs typeface="Vazirmatn" pitchFamily="34" charset="-120"/>
+              </a:rPr>
+              <a:t>Using advanced simulation suites to predict optimal charger placement and usage</a:t>
+            </a:r>
+            <a:endParaRPr lang="en-US" sz="1250" dirty="0"/>
+          </a:p>
+        </p:txBody>
+      </p:sp>
+      <p:sp>
+        <p:nvSpPr>
+          <p:cNvPr id="6" name="Shape 4"/>
           <p:cNvSpPr/>
           <p:nvPr/>
         </p:nvSpPr>
         <p:spPr>
           <a:xfrm>
-            <a:off x="10561320" y="109728"/>
-            <a:ext cx="1417320" cy="1417320"/>
+            <a:off x="530352" y="2487168"/>
+            <a:ext cx="3569208" cy="3017520"/>
+          </a:xfrm>
+          <a:prstGeom prst="roundRect">
+            <a:avLst/>
+          </a:prstGeom>
+          <a:solidFill>
+            <a:srgbClr val="FFFFFF"/>
+          </a:solidFill>
+          <a:ln w="8890">
+            <a:solidFill>
+              <a:srgbClr val="E9EEF5">
+                <a:alpha val="65000"/>
+              </a:srgbClr>
+            </a:solidFill>
+            <a:prstDash val="solid"/>
+          </a:ln>
+          <a:effectLst>
+            <a:outerShdw sx="100000" sy="100000" kx="0" ky="0" algn="bl" rotWithShape="0" blurRad="25400" dist="13970" dir="2700000">
+              <a:srgbClr val="000000">
+                <a:alpha val="16000"/>
+              </a:srgbClr>
+            </a:outerShdw>
+          </a:effectLst>
+        </p:spPr>
+      </p:sp>
+      <p:sp>
+        <p:nvSpPr>
+          <p:cNvPr id="7" name="Shape 5"/>
+          <p:cNvSpPr/>
+          <p:nvPr/>
+        </p:nvSpPr>
+        <p:spPr>
+          <a:xfrm>
+            <a:off x="3441192" y="2816352"/>
+            <a:ext cx="384048" cy="384048"/>
           </a:xfrm>
           <a:prstGeom prst="ellipse">
             <a:avLst/>
           </a:prstGeom>
           <a:solidFill>
-            <a:srgbClr val="FFC107">
-              <a:alpha val="28000"/>
-            </a:srgbClr>
+            <a:srgbClr val="F4A261"/>
           </a:solidFill>
           <a:ln w="12700">
             <a:solidFill>
-              <a:srgbClr val="FFC107">
+              <a:srgbClr val="F4A261">
                 <a:alpha val="0"/>
               </a:srgbClr>
             </a:solidFill>
@@ -5588,180 +3930,9 @@
           </a:ln>
         </p:spPr>
       </p:sp>
-      <p:sp>
-        <p:nvSpPr>
-          <p:cNvPr id="4" name="Shape 2"/>
-          <p:cNvSpPr/>
-          <p:nvPr/>
-        </p:nvSpPr>
-        <p:spPr>
-          <a:xfrm>
-            <a:off x="11457432" y="347472"/>
-            <a:ext cx="155448" cy="310896"/>
-          </a:xfrm>
-          <a:prstGeom prst="rect">
-            <a:avLst/>
-          </a:prstGeom>
-          <a:solidFill>
-            <a:srgbClr val="FFC107"/>
-          </a:solidFill>
-          <a:ln w="12700">
-            <a:solidFill>
-              <a:srgbClr val="FFC107">
-                <a:alpha val="0"/>
-              </a:srgbClr>
-            </a:solidFill>
-            <a:prstDash val="solid"/>
-          </a:ln>
-        </p:spPr>
-      </p:sp>
-      <p:sp>
-        <p:nvSpPr>
-          <p:cNvPr id="5" name="Text 3"/>
-          <p:cNvSpPr txBox="1"/>
-          <p:nvPr/>
-        </p:nvSpPr>
-        <p:spPr>
-          <a:xfrm>
-            <a:off x="4572000" y="329184"/>
-            <a:ext cx="6766560" cy="365760"/>
-          </a:xfrm>
-          <a:prstGeom prst="rect">
-            <a:avLst/>
-          </a:prstGeom>
-          <a:noFill/>
-          <a:ln/>
-        </p:spPr>
-        <p:txBody>
-          <a:bodyPr wrap="square" lIns="0" tIns="0" rIns="0" bIns="0" rtlCol="0" anchor="ctr"/>
-          <a:lstStyle/>
-          <a:p>
-            <a:pPr algn="r" indent="0" marL="0">
-              <a:buNone/>
-            </a:pPr>
-            <a:r>
-              <a:rPr lang="en-US" altLang="en-US" sz="1050" b="1" spc="50" kern="0" dirty="0">
-                <a:solidFill>
-                  <a:srgbClr val="FFC107"/>
-                </a:solidFill>
-                <a:latin typeface="Vazirmatn" pitchFamily="34" charset="0"/>
-                <a:ea typeface="Vazirmatn" pitchFamily="34" charset="-122"/>
-                <a:cs typeface="Vazirmatn" pitchFamily="34" charset="-120"/>
-              </a:rPr>
-              <a:t>The Road Ahead</a:t>
-            </a:r>
-            <a:endParaRPr lang="en-US" sz="1050" dirty="0"/>
-          </a:p>
-        </p:txBody>
-      </p:sp>
-      <p:sp>
-        <p:nvSpPr>
-          <p:cNvPr id="6" name="Text 4"/>
-          <p:cNvSpPr txBox="1"/>
-          <p:nvPr/>
-        </p:nvSpPr>
-        <p:spPr>
-          <a:xfrm>
-            <a:off x="4572000" y="685800"/>
-            <a:ext cx="7040880" cy="960120"/>
-          </a:xfrm>
-          <a:prstGeom prst="rect">
-            <a:avLst/>
-          </a:prstGeom>
-          <a:noFill/>
-          <a:ln/>
-        </p:spPr>
-        <p:txBody>
-          <a:bodyPr wrap="square" lIns="0" tIns="0" rIns="0" bIns="0" rtlCol="0" anchor="t"/>
-          <a:lstStyle/>
-          <a:p>
-            <a:pPr algn="r" indent="0" marL="0">
-              <a:buNone/>
-            </a:pPr>
-            <a:r>
-              <a:rPr lang="en-US" altLang="en-US" sz="2600" b="1" dirty="0">
-                <a:solidFill>
-                  <a:srgbClr val="F8FAFC"/>
-                </a:solidFill>
-                <a:latin typeface="Vazirmatn" pitchFamily="34" charset="0"/>
-                <a:ea typeface="Vazirmatn" pitchFamily="34" charset="-122"/>
-                <a:cs typeface="Vazirmatn" pitchFamily="34" charset="-120"/>
-              </a:rPr>
-              <a:t>What’s Next for Retail EV Charging?</a:t>
-            </a:r>
-            <a:endParaRPr lang="en-US" sz="2600" dirty="0"/>
-          </a:p>
-        </p:txBody>
-      </p:sp>
-      <p:sp>
-        <p:nvSpPr>
-          <p:cNvPr id="7" name="Shape 5"/>
-          <p:cNvSpPr/>
-          <p:nvPr/>
-        </p:nvSpPr>
-        <p:spPr>
-          <a:xfrm>
-            <a:off x="594360" y="2788920"/>
-            <a:ext cx="3505200" cy="2331720"/>
-          </a:xfrm>
-          <a:prstGeom prst="roundRect">
-            <a:avLst/>
-          </a:prstGeom>
-          <a:solidFill>
-            <a:srgbClr val="151F31"/>
-          </a:solidFill>
-          <a:ln w="8890">
-            <a:solidFill>
-              <a:srgbClr val="FFC107">
-                <a:alpha val="65000"/>
-              </a:srgbClr>
-            </a:solidFill>
-            <a:prstDash val="solid"/>
-          </a:ln>
-        </p:spPr>
-      </p:sp>
-      <p:sp>
-        <p:nvSpPr>
-          <p:cNvPr id="8" name="Text 6"/>
-          <p:cNvSpPr txBox="1"/>
-          <p:nvPr/>
-        </p:nvSpPr>
-        <p:spPr>
-          <a:xfrm>
-            <a:off x="795528" y="2971800"/>
-            <a:ext cx="640080" cy="384048"/>
-          </a:xfrm>
-          <a:prstGeom prst="rect">
-            <a:avLst/>
-          </a:prstGeom>
-          <a:noFill/>
-          <a:ln/>
-        </p:spPr>
-        <p:txBody>
-          <a:bodyPr wrap="square" lIns="0" tIns="0" rIns="0" bIns="0" rtlCol="0" anchor="ctr"/>
-          <a:lstStyle/>
-          <a:p>
-            <a:pPr algn="l" indent="0" marL="0">
-              <a:buNone/>
-            </a:pPr>
-            <a:r>
-              <a:rPr lang="en-US" altLang="en-US" sz="1600" b="1" dirty="0">
-                <a:solidFill>
-                  <a:srgbClr val="FFC107"/>
-                </a:solidFill>
-                <a:latin typeface="Vazirmatn" pitchFamily="34" charset="0"/>
-                <a:ea typeface="Vazirmatn" pitchFamily="34" charset="-122"/>
-                <a:cs typeface="Vazirmatn" pitchFamily="34" charset="-120"/>
-              </a:rPr>
-              <a:t>01</a:t>
-            </a:r>
-            <a:endParaRPr lang="en-US" sz="1600" dirty="0"/>
-          </a:p>
-        </p:txBody>
-      </p:sp>
       <p:pic>
         <p:nvPicPr>
-          <p:cNvPr id="9" name="Image 0" descr="preencoded.png">    </p:cNvPr>
+          <p:cNvPr id="8" name="Image 0" descr="preencoded.png">    </p:cNvPr>
           <p:cNvPicPr>
             <a:picLocks noChangeAspect="1"/>
           </p:cNvPicPr>
@@ -5781,8 +3952,8 @@
         </p:blipFill>
         <p:spPr>
           <a:xfrm>
-            <a:off x="3505200" y="2999232"/>
-            <a:ext cx="347472" cy="347472"/>
+            <a:off x="3529523" y="2904683"/>
+            <a:ext cx="207386" cy="207386"/>
           </a:xfrm>
           <a:prstGeom prst="rect">
             <a:avLst/>
@@ -5791,14 +3962,53 @@
       </p:pic>
       <p:sp>
         <p:nvSpPr>
+          <p:cNvPr id="9" name="Text 6"/>
+          <p:cNvSpPr txBox="1"/>
+          <p:nvPr/>
+        </p:nvSpPr>
+        <p:spPr>
+          <a:xfrm>
+            <a:off x="758952" y="2743200"/>
+            <a:ext cx="2517648" cy="594360"/>
+          </a:xfrm>
+          <a:prstGeom prst="rect">
+            <a:avLst/>
+          </a:prstGeom>
+          <a:noFill/>
+          <a:ln/>
+        </p:spPr>
+        <p:txBody>
+          <a:bodyPr wrap="square" lIns="0" tIns="0" rIns="0" bIns="0" rtlCol="0" anchor="ctr"/>
+          <a:lstStyle/>
+          <a:p>
+            <a:pPr algn="l" indent="0" marL="0">
+              <a:buNone/>
+            </a:pPr>
+            <a:r>
+              <a:rPr lang="en-US" altLang="en-US" sz="2500" b="1" dirty="0">
+                <a:solidFill>
+                  <a:srgbClr val="1D3557"/>
+                </a:solidFill>
+                <a:latin typeface="Vazirmatn" pitchFamily="34" charset="0"/>
+                <a:ea typeface="Vazirmatn" pitchFamily="34" charset="-122"/>
+                <a:cs typeface="Vazirmatn" pitchFamily="34" charset="-120"/>
+              </a:rPr>
+              <a:t>EVI-Pro</a:t>
+            </a:r>
+            <a:endParaRPr lang="en-US" sz="2500" dirty="0"/>
+          </a:p>
+        </p:txBody>
+      </p:sp>
+      <p:sp>
+        <p:nvSpPr>
           <p:cNvPr id="10" name="Text 7"/>
           <p:cNvSpPr txBox="1"/>
           <p:nvPr/>
         </p:nvSpPr>
         <p:spPr>
           <a:xfrm>
-            <a:off x="822960" y="3657600"/>
-            <a:ext cx="3048000" cy="347472"/>
+            <a:off x="758952" y="3584448"/>
+            <a:ext cx="3112008" cy="411480"/>
           </a:xfrm>
           <a:prstGeom prst="rect">
             <a:avLst/>
@@ -5816,13 +4026,13 @@
             <a:r>
               <a:rPr lang="en-US" altLang="en-US" sz="1200" b="1" dirty="0">
                 <a:solidFill>
-                  <a:srgbClr val="FFFFFF"/>
-                </a:solidFill>
-                <a:latin typeface="Vazirmatn" pitchFamily="34" charset="0"/>
-                <a:ea typeface="Vazirmatn" pitchFamily="34" charset="-122"/>
-                <a:cs typeface="Vazirmatn" pitchFamily="34" charset="-120"/>
-              </a:rPr>
-              <a:t>**Retailers:** Install chargers to attract customers, future-proof your…</a:t>
+                  <a:srgbClr val="1D3557"/>
+                </a:solidFill>
+                <a:latin typeface="Vazirmatn" pitchFamily="34" charset="0"/>
+                <a:ea typeface="Vazirmatn" pitchFamily="34" charset="-122"/>
+                <a:cs typeface="Vazirmatn" pitchFamily="34" charset="-120"/>
+              </a:rPr>
+              <a:t>Typical daily charging needs based on national household travel surveys.</a:t>
             </a:r>
             <a:endParaRPr lang="en-US" sz="1200" dirty="0"/>
           </a:p>
@@ -5836,8 +4046,8 @@
         </p:nvSpPr>
         <p:spPr>
           <a:xfrm>
-            <a:off x="822960" y="4133088"/>
-            <a:ext cx="3048000" cy="640080"/>
+            <a:off x="758952" y="4096512"/>
+            <a:ext cx="3112008" cy="768096"/>
           </a:xfrm>
           <a:prstGeom prst="rect">
             <a:avLst/>
@@ -5852,7 +4062,7 @@
             <a:pPr algn="l" indent="0" marL="0">
               <a:buNone/>
             </a:pPr>
-            <a:endParaRPr lang="en-US" sz="1050" dirty="0"/>
+            <a:endParaRPr lang="en-US" sz="1150" dirty="0"/>
           </a:p>
         </p:txBody>
       </p:sp>
@@ -5864,67 +4074,116 @@
         </p:nvSpPr>
         <p:spPr>
           <a:xfrm>
-            <a:off x="4328160" y="2788920"/>
-            <a:ext cx="3505200" cy="2331720"/>
+            <a:off x="758952" y="5102352"/>
+            <a:ext cx="3112008" cy="73152"/>
           </a:xfrm>
           <a:prstGeom prst="roundRect">
             <a:avLst/>
           </a:prstGeom>
           <a:solidFill>
-            <a:srgbClr val="151F31"/>
+            <a:srgbClr val="E9EEF5"/>
+          </a:solidFill>
+          <a:ln w="12700">
+            <a:solidFill>
+              <a:srgbClr val="E9EEF5">
+                <a:alpha val="0"/>
+              </a:srgbClr>
+            </a:solidFill>
+            <a:prstDash val="solid"/>
+          </a:ln>
+        </p:spPr>
+      </p:sp>
+      <p:sp>
+        <p:nvSpPr>
+          <p:cNvPr id="13" name="Shape 10"/>
+          <p:cNvSpPr/>
+          <p:nvPr/>
+        </p:nvSpPr>
+        <p:spPr>
+          <a:xfrm>
+            <a:off x="758952" y="5102352"/>
+            <a:ext cx="1400404" cy="73152"/>
+          </a:xfrm>
+          <a:prstGeom prst="roundRect">
+            <a:avLst/>
+          </a:prstGeom>
+          <a:solidFill>
+            <a:srgbClr val="F4A261"/>
+          </a:solidFill>
+          <a:ln w="12700">
+            <a:solidFill>
+              <a:srgbClr val="F4A261">
+                <a:alpha val="0"/>
+              </a:srgbClr>
+            </a:solidFill>
+            <a:prstDash val="solid"/>
+          </a:ln>
+        </p:spPr>
+      </p:sp>
+      <p:sp>
+        <p:nvSpPr>
+          <p:cNvPr id="14" name="Shape 11"/>
+          <p:cNvSpPr/>
+          <p:nvPr/>
+        </p:nvSpPr>
+        <p:spPr>
+          <a:xfrm>
+            <a:off x="4300728" y="2487168"/>
+            <a:ext cx="3569208" cy="3017520"/>
+          </a:xfrm>
+          <a:prstGeom prst="roundRect">
+            <a:avLst/>
+          </a:prstGeom>
+          <a:solidFill>
+            <a:srgbClr val="FFFFFF"/>
           </a:solidFill>
           <a:ln w="8890">
             <a:solidFill>
-              <a:srgbClr val="FF9800">
+              <a:srgbClr val="E9EEF5">
                 <a:alpha val="65000"/>
               </a:srgbClr>
             </a:solidFill>
             <a:prstDash val="solid"/>
           </a:ln>
-        </p:spPr>
-      </p:sp>
-      <p:sp>
-        <p:nvSpPr>
-          <p:cNvPr id="13" name="Text 10"/>
-          <p:cNvSpPr txBox="1"/>
-          <p:nvPr/>
-        </p:nvSpPr>
-        <p:spPr>
-          <a:xfrm>
-            <a:off x="4529328" y="2971800"/>
-            <a:ext cx="640080" cy="384048"/>
-          </a:xfrm>
-          <a:prstGeom prst="rect">
-            <a:avLst/>
-          </a:prstGeom>
-          <a:noFill/>
-          <a:ln/>
-        </p:spPr>
-        <p:txBody>
-          <a:bodyPr wrap="square" lIns="0" tIns="0" rIns="0" bIns="0" rtlCol="0" anchor="ctr"/>
-          <a:lstStyle/>
-          <a:p>
-            <a:pPr algn="l" indent="0" marL="0">
-              <a:buNone/>
-            </a:pPr>
-            <a:r>
-              <a:rPr lang="en-US" altLang="en-US" sz="1600" b="1" dirty="0">
-                <a:solidFill>
-                  <a:srgbClr val="FF9800"/>
-                </a:solidFill>
-                <a:latin typeface="Vazirmatn" pitchFamily="34" charset="0"/>
-                <a:ea typeface="Vazirmatn" pitchFamily="34" charset="-122"/>
-                <a:cs typeface="Vazirmatn" pitchFamily="34" charset="-120"/>
-              </a:rPr>
-              <a:t>02</a:t>
-            </a:r>
-            <a:endParaRPr lang="en-US" sz="1600" dirty="0"/>
-          </a:p>
-        </p:txBody>
+          <a:effectLst>
+            <a:outerShdw sx="100000" sy="100000" kx="0" ky="0" algn="bl" rotWithShape="0" blurRad="25400" dist="13970" dir="2700000">
+              <a:srgbClr val="000000">
+                <a:alpha val="16000"/>
+              </a:srgbClr>
+            </a:outerShdw>
+          </a:effectLst>
+        </p:spPr>
+      </p:sp>
+      <p:sp>
+        <p:nvSpPr>
+          <p:cNvPr id="15" name="Shape 12"/>
+          <p:cNvSpPr/>
+          <p:nvPr/>
+        </p:nvSpPr>
+        <p:spPr>
+          <a:xfrm>
+            <a:off x="7211568" y="2816352"/>
+            <a:ext cx="384048" cy="384048"/>
+          </a:xfrm>
+          <a:prstGeom prst="ellipse">
+            <a:avLst/>
+          </a:prstGeom>
+          <a:solidFill>
+            <a:srgbClr val="E76F51"/>
+          </a:solidFill>
+          <a:ln w="12700">
+            <a:solidFill>
+              <a:srgbClr val="E76F51">
+                <a:alpha val="0"/>
+              </a:srgbClr>
+            </a:solidFill>
+            <a:prstDash val="solid"/>
+          </a:ln>
+        </p:spPr>
       </p:sp>
       <p:pic>
         <p:nvPicPr>
-          <p:cNvPr id="14" name="Image 1" descr="preencoded.png">    </p:cNvPr>
+          <p:cNvPr id="16" name="Image 1" descr="preencoded.png">    </p:cNvPr>
           <p:cNvPicPr>
             <a:picLocks noChangeAspect="1"/>
           </p:cNvPicPr>
@@ -5944,8 +4203,8 @@
         </p:blipFill>
         <p:spPr>
           <a:xfrm>
-            <a:off x="7239000" y="2999232"/>
-            <a:ext cx="347472" cy="347472"/>
+            <a:off x="7299899" y="2904683"/>
+            <a:ext cx="207386" cy="207386"/>
           </a:xfrm>
           <a:prstGeom prst="rect">
             <a:avLst/>
@@ -5954,14 +4213,14 @@
       </p:pic>
       <p:sp>
         <p:nvSpPr>
-          <p:cNvPr id="15" name="Text 11"/>
-          <p:cNvSpPr txBox="1"/>
-          <p:nvPr/>
-        </p:nvSpPr>
-        <p:spPr>
-          <a:xfrm>
-            <a:off x="4556760" y="3657600"/>
-            <a:ext cx="3048000" cy="347472"/>
+          <p:cNvPr id="17" name="Text 13"/>
+          <p:cNvSpPr txBox="1"/>
+          <p:nvPr/>
+        </p:nvSpPr>
+        <p:spPr>
+          <a:xfrm>
+            <a:off x="4529328" y="2743200"/>
+            <a:ext cx="2517648" cy="594360"/>
           </a:xfrm>
           <a:prstGeom prst="rect">
             <a:avLst/>
@@ -5977,15 +4236,54 @@
               <a:buNone/>
             </a:pPr>
             <a:r>
+              <a:rPr lang="en-US" altLang="en-US" sz="2500" b="1" dirty="0">
+                <a:solidFill>
+                  <a:srgbClr val="1D3557"/>
+                </a:solidFill>
+                <a:latin typeface="Vazirmatn" pitchFamily="34" charset="0"/>
+                <a:ea typeface="Vazirmatn" pitchFamily="34" charset="-122"/>
+                <a:cs typeface="Vazirmatn" pitchFamily="34" charset="-120"/>
+              </a:rPr>
+              <a:t>EVI-RoadTrip</a:t>
+            </a:r>
+            <a:endParaRPr lang="en-US" sz="2500" dirty="0"/>
+          </a:p>
+        </p:txBody>
+      </p:sp>
+      <p:sp>
+        <p:nvSpPr>
+          <p:cNvPr id="18" name="Text 14"/>
+          <p:cNvSpPr txBox="1"/>
+          <p:nvPr/>
+        </p:nvSpPr>
+        <p:spPr>
+          <a:xfrm>
+            <a:off x="4529328" y="3584448"/>
+            <a:ext cx="3112008" cy="411480"/>
+          </a:xfrm>
+          <a:prstGeom prst="rect">
+            <a:avLst/>
+          </a:prstGeom>
+          <a:noFill/>
+          <a:ln/>
+        </p:spPr>
+        <p:txBody>
+          <a:bodyPr wrap="square" lIns="0" tIns="0" rIns="0" bIns="0" rtlCol="0" anchor="ctr"/>
+          <a:lstStyle/>
+          <a:p>
+            <a:pPr algn="l" indent="0" marL="0">
+              <a:buNone/>
+            </a:pPr>
+            <a:r>
               <a:rPr lang="en-US" altLang="en-US" sz="1200" b="1" dirty="0">
                 <a:solidFill>
-                  <a:srgbClr val="FFFFFF"/>
-                </a:solidFill>
-                <a:latin typeface="Vazirmatn" pitchFamily="34" charset="0"/>
-                <a:ea typeface="Vazirmatn" pitchFamily="34" charset="-122"/>
-                <a:cs typeface="Vazirmatn" pitchFamily="34" charset="-120"/>
-              </a:rPr>
-              <a:t>**Drivers:** Advocate for charging infrastructure at your favorite stor…</a:t>
+                  <a:srgbClr val="1D3557"/>
+                </a:solidFill>
+                <a:latin typeface="Vazirmatn" pitchFamily="34" charset="0"/>
+                <a:ea typeface="Vazirmatn" pitchFamily="34" charset="-122"/>
+                <a:cs typeface="Vazirmatn" pitchFamily="34" charset="-120"/>
+              </a:rPr>
+              <a:t>Simulates interregional travel and clusters fast-charging demand near r…</a:t>
             </a:r>
             <a:endParaRPr lang="en-US" sz="1200" dirty="0"/>
           </a:p>
@@ -5993,14 +4291,14 @@
       </p:sp>
       <p:sp>
         <p:nvSpPr>
-          <p:cNvPr id="16" name="Text 12"/>
-          <p:cNvSpPr txBox="1"/>
-          <p:nvPr/>
-        </p:nvSpPr>
-        <p:spPr>
-          <a:xfrm>
-            <a:off x="4556760" y="4133088"/>
-            <a:ext cx="3048000" cy="640080"/>
+          <p:cNvPr id="19" name="Text 15"/>
+          <p:cNvSpPr txBox="1"/>
+          <p:nvPr/>
+        </p:nvSpPr>
+        <p:spPr>
+          <a:xfrm>
+            <a:off x="4529328" y="4096512"/>
+            <a:ext cx="3112008" cy="768096"/>
           </a:xfrm>
           <a:prstGeom prst="rect">
             <a:avLst/>
@@ -6015,79 +4313,128 @@
             <a:pPr algn="l" indent="0" marL="0">
               <a:buNone/>
             </a:pPr>
-            <a:endParaRPr lang="en-US" sz="1050" dirty="0"/>
-          </a:p>
-        </p:txBody>
-      </p:sp>
-      <p:sp>
-        <p:nvSpPr>
-          <p:cNvPr id="17" name="Shape 13"/>
+            <a:endParaRPr lang="en-US" sz="1150" dirty="0"/>
+          </a:p>
+        </p:txBody>
+      </p:sp>
+      <p:sp>
+        <p:nvSpPr>
+          <p:cNvPr id="20" name="Shape 16"/>
           <p:cNvSpPr/>
           <p:nvPr/>
         </p:nvSpPr>
         <p:spPr>
           <a:xfrm>
-            <a:off x="8061960" y="2788920"/>
-            <a:ext cx="3505200" cy="2331720"/>
+            <a:off x="4529328" y="5102352"/>
+            <a:ext cx="3112008" cy="73152"/>
           </a:xfrm>
           <a:prstGeom prst="roundRect">
             <a:avLst/>
           </a:prstGeom>
           <a:solidFill>
-            <a:srgbClr val="151F31"/>
+            <a:srgbClr val="E9EEF5"/>
+          </a:solidFill>
+          <a:ln w="12700">
+            <a:solidFill>
+              <a:srgbClr val="E9EEF5">
+                <a:alpha val="0"/>
+              </a:srgbClr>
+            </a:solidFill>
+            <a:prstDash val="solid"/>
+          </a:ln>
+        </p:spPr>
+      </p:sp>
+      <p:sp>
+        <p:nvSpPr>
+          <p:cNvPr id="21" name="Shape 17"/>
+          <p:cNvSpPr/>
+          <p:nvPr/>
+        </p:nvSpPr>
+        <p:spPr>
+          <a:xfrm>
+            <a:off x="4529328" y="5102352"/>
+            <a:ext cx="1711604" cy="73152"/>
+          </a:xfrm>
+          <a:prstGeom prst="roundRect">
+            <a:avLst/>
+          </a:prstGeom>
+          <a:solidFill>
+            <a:srgbClr val="E76F51"/>
+          </a:solidFill>
+          <a:ln w="12700">
+            <a:solidFill>
+              <a:srgbClr val="E76F51">
+                <a:alpha val="0"/>
+              </a:srgbClr>
+            </a:solidFill>
+            <a:prstDash val="solid"/>
+          </a:ln>
+        </p:spPr>
+      </p:sp>
+      <p:sp>
+        <p:nvSpPr>
+          <p:cNvPr id="22" name="Shape 18"/>
+          <p:cNvSpPr/>
+          <p:nvPr/>
+        </p:nvSpPr>
+        <p:spPr>
+          <a:xfrm>
+            <a:off x="8071104" y="2487168"/>
+            <a:ext cx="3569208" cy="3017520"/>
+          </a:xfrm>
+          <a:prstGeom prst="roundRect">
+            <a:avLst/>
+          </a:prstGeom>
+          <a:solidFill>
+            <a:srgbClr val="FFFFFF"/>
           </a:solidFill>
           <a:ln w="8890">
             <a:solidFill>
-              <a:srgbClr val="FFC107">
+              <a:srgbClr val="E9EEF5">
                 <a:alpha val="65000"/>
               </a:srgbClr>
             </a:solidFill>
             <a:prstDash val="solid"/>
           </a:ln>
-        </p:spPr>
-      </p:sp>
-      <p:sp>
-        <p:nvSpPr>
-          <p:cNvPr id="18" name="Text 14"/>
-          <p:cNvSpPr txBox="1"/>
-          <p:nvPr/>
-        </p:nvSpPr>
-        <p:spPr>
-          <a:xfrm>
-            <a:off x="8263128" y="2971800"/>
-            <a:ext cx="640080" cy="384048"/>
-          </a:xfrm>
-          <a:prstGeom prst="rect">
-            <a:avLst/>
-          </a:prstGeom>
-          <a:noFill/>
-          <a:ln/>
-        </p:spPr>
-        <p:txBody>
-          <a:bodyPr wrap="square" lIns="0" tIns="0" rIns="0" bIns="0" rtlCol="0" anchor="ctr"/>
-          <a:lstStyle/>
-          <a:p>
-            <a:pPr algn="l" indent="0" marL="0">
-              <a:buNone/>
-            </a:pPr>
-            <a:r>
-              <a:rPr lang="en-US" altLang="en-US" sz="1600" b="1" dirty="0">
-                <a:solidFill>
-                  <a:srgbClr val="FFC107"/>
-                </a:solidFill>
-                <a:latin typeface="Vazirmatn" pitchFamily="34" charset="0"/>
-                <a:ea typeface="Vazirmatn" pitchFamily="34" charset="-122"/>
-                <a:cs typeface="Vazirmatn" pitchFamily="34" charset="-120"/>
-              </a:rPr>
-              <a:t>03</a:t>
-            </a:r>
-            <a:endParaRPr lang="en-US" sz="1600" dirty="0"/>
-          </a:p>
-        </p:txBody>
+          <a:effectLst>
+            <a:outerShdw sx="100000" sy="100000" kx="0" ky="0" algn="bl" rotWithShape="0" blurRad="25400" dist="13970" dir="2700000">
+              <a:srgbClr val="000000">
+                <a:alpha val="16000"/>
+              </a:srgbClr>
+            </a:outerShdw>
+          </a:effectLst>
+        </p:spPr>
+      </p:sp>
+      <p:sp>
+        <p:nvSpPr>
+          <p:cNvPr id="23" name="Shape 19"/>
+          <p:cNvSpPr/>
+          <p:nvPr/>
+        </p:nvSpPr>
+        <p:spPr>
+          <a:xfrm>
+            <a:off x="10981944" y="2816352"/>
+            <a:ext cx="384048" cy="384048"/>
+          </a:xfrm>
+          <a:prstGeom prst="ellipse">
+            <a:avLst/>
+          </a:prstGeom>
+          <a:solidFill>
+            <a:srgbClr val="F4A261"/>
+          </a:solidFill>
+          <a:ln w="12700">
+            <a:solidFill>
+              <a:srgbClr val="F4A261">
+                <a:alpha val="0"/>
+              </a:srgbClr>
+            </a:solidFill>
+            <a:prstDash val="solid"/>
+          </a:ln>
+        </p:spPr>
       </p:sp>
       <p:pic>
         <p:nvPicPr>
-          <p:cNvPr id="19" name="Image 2" descr="preencoded.png">    </p:cNvPr>
+          <p:cNvPr id="24" name="Image 2" descr="preencoded.png">    </p:cNvPr>
           <p:cNvPicPr>
             <a:picLocks noChangeAspect="1"/>
           </p:cNvPicPr>
@@ -6107,6 +4454,2311 @@
         </p:blipFill>
         <p:spPr>
           <a:xfrm>
+            <a:off x="11070275" y="2904683"/>
+            <a:ext cx="207386" cy="207386"/>
+          </a:xfrm>
+          <a:prstGeom prst="rect">
+            <a:avLst/>
+          </a:prstGeom>
+        </p:spPr>
+      </p:pic>
+      <p:sp>
+        <p:nvSpPr>
+          <p:cNvPr id="25" name="Text 20"/>
+          <p:cNvSpPr txBox="1"/>
+          <p:nvPr/>
+        </p:nvSpPr>
+        <p:spPr>
+          <a:xfrm>
+            <a:off x="8299704" y="2743200"/>
+            <a:ext cx="2517648" cy="594360"/>
+          </a:xfrm>
+          <a:prstGeom prst="rect">
+            <a:avLst/>
+          </a:prstGeom>
+          <a:noFill/>
+          <a:ln/>
+        </p:spPr>
+        <p:txBody>
+          <a:bodyPr wrap="square" lIns="0" tIns="0" rIns="0" bIns="0" rtlCol="0" anchor="ctr"/>
+          <a:lstStyle/>
+          <a:p>
+            <a:pPr algn="l" indent="0" marL="0">
+              <a:buNone/>
+            </a:pPr>
+            <a:r>
+              <a:rPr lang="en-US" altLang="en-US" sz="2500" b="1" dirty="0">
+                <a:solidFill>
+                  <a:srgbClr val="1D3557"/>
+                </a:solidFill>
+                <a:latin typeface="Vazirmatn" pitchFamily="34" charset="0"/>
+                <a:ea typeface="Vazirmatn" pitchFamily="34" charset="-122"/>
+                <a:cs typeface="Vazirmatn" pitchFamily="34" charset="-120"/>
+              </a:rPr>
+              <a:t>EVI-OnDemand</a:t>
+            </a:r>
+            <a:endParaRPr lang="en-US" sz="2500" dirty="0"/>
+          </a:p>
+        </p:txBody>
+      </p:sp>
+      <p:sp>
+        <p:nvSpPr>
+          <p:cNvPr id="26" name="Text 21"/>
+          <p:cNvSpPr txBox="1"/>
+          <p:nvPr/>
+        </p:nvSpPr>
+        <p:spPr>
+          <a:xfrm>
+            <a:off x="8299704" y="3584448"/>
+            <a:ext cx="3112008" cy="411480"/>
+          </a:xfrm>
+          <a:prstGeom prst="rect">
+            <a:avLst/>
+          </a:prstGeom>
+          <a:noFill/>
+          <a:ln/>
+        </p:spPr>
+        <p:txBody>
+          <a:bodyPr wrap="square" lIns="0" tIns="0" rIns="0" bIns="0" rtlCol="0" anchor="ctr"/>
+          <a:lstStyle/>
+          <a:p>
+            <a:pPr algn="l" indent="0" marL="0">
+              <a:buNone/>
+            </a:pPr>
+            <a:r>
+              <a:rPr lang="en-US" altLang="en-US" sz="1200" b="1" dirty="0">
+                <a:solidFill>
+                  <a:srgbClr val="1D3557"/>
+                </a:solidFill>
+                <a:latin typeface="Vazirmatn" pitchFamily="34" charset="0"/>
+                <a:ea typeface="Vazirmatn" pitchFamily="34" charset="-122"/>
+                <a:cs typeface="Vazirmatn" pitchFamily="34" charset="-120"/>
+              </a:rPr>
+              <a:t>Estimates urban ride-hailing fleet electrification and public charging…</a:t>
+            </a:r>
+            <a:endParaRPr lang="en-US" sz="1200" dirty="0"/>
+          </a:p>
+        </p:txBody>
+      </p:sp>
+      <p:sp>
+        <p:nvSpPr>
+          <p:cNvPr id="27" name="Text 22"/>
+          <p:cNvSpPr txBox="1"/>
+          <p:nvPr/>
+        </p:nvSpPr>
+        <p:spPr>
+          <a:xfrm>
+            <a:off x="8299704" y="4096512"/>
+            <a:ext cx="3112008" cy="768096"/>
+          </a:xfrm>
+          <a:prstGeom prst="rect">
+            <a:avLst/>
+          </a:prstGeom>
+          <a:noFill/>
+          <a:ln/>
+        </p:spPr>
+        <p:txBody>
+          <a:bodyPr wrap="square" lIns="0" tIns="0" rIns="0" bIns="0" rtlCol="0" anchor="t"/>
+          <a:lstStyle/>
+          <a:p>
+            <a:pPr algn="l" indent="0" marL="0">
+              <a:buNone/>
+            </a:pPr>
+            <a:endParaRPr lang="en-US" sz="1150" dirty="0"/>
+          </a:p>
+        </p:txBody>
+      </p:sp>
+      <p:sp>
+        <p:nvSpPr>
+          <p:cNvPr id="28" name="Shape 23"/>
+          <p:cNvSpPr/>
+          <p:nvPr/>
+        </p:nvSpPr>
+        <p:spPr>
+          <a:xfrm>
+            <a:off x="8299704" y="5102352"/>
+            <a:ext cx="3112008" cy="73152"/>
+          </a:xfrm>
+          <a:prstGeom prst="roundRect">
+            <a:avLst/>
+          </a:prstGeom>
+          <a:solidFill>
+            <a:srgbClr val="E9EEF5"/>
+          </a:solidFill>
+          <a:ln w="12700">
+            <a:solidFill>
+              <a:srgbClr val="E9EEF5">
+                <a:alpha val="0"/>
+              </a:srgbClr>
+            </a:solidFill>
+            <a:prstDash val="solid"/>
+          </a:ln>
+        </p:spPr>
+      </p:sp>
+      <p:sp>
+        <p:nvSpPr>
+          <p:cNvPr id="29" name="Shape 24"/>
+          <p:cNvSpPr/>
+          <p:nvPr/>
+        </p:nvSpPr>
+        <p:spPr>
+          <a:xfrm>
+            <a:off x="8299704" y="5102352"/>
+            <a:ext cx="2022805" cy="73152"/>
+          </a:xfrm>
+          <a:prstGeom prst="roundRect">
+            <a:avLst/>
+          </a:prstGeom>
+          <a:solidFill>
+            <a:srgbClr val="F4A261"/>
+          </a:solidFill>
+          <a:ln w="12700">
+            <a:solidFill>
+              <a:srgbClr val="F4A261">
+                <a:alpha val="0"/>
+              </a:srgbClr>
+            </a:solidFill>
+            <a:prstDash val="solid"/>
+          </a:ln>
+        </p:spPr>
+      </p:sp>
+      <p:sp>
+        <p:nvSpPr>
+          <p:cNvPr id="30" name="Text 25"/>
+          <p:cNvSpPr txBox="1"/>
+          <p:nvPr/>
+        </p:nvSpPr>
+        <p:spPr>
+          <a:xfrm>
+            <a:off x="320040" y="6510528"/>
+            <a:ext cx="237744" cy="164592"/>
+          </a:xfrm>
+          <a:prstGeom prst="rect">
+            <a:avLst/>
+          </a:prstGeom>
+          <a:noFill/>
+          <a:ln/>
+        </p:spPr>
+        <p:txBody>
+          <a:bodyPr wrap="square" lIns="0" tIns="0" rIns="0" bIns="0" rtlCol="0" anchor="ctr"/>
+          <a:lstStyle/>
+          <a:p>
+            <a:pPr algn="ctr" indent="0" marL="0">
+              <a:buNone/>
+            </a:pPr>
+            <a:r>
+              <a:rPr lang="en-US" altLang="en-US" sz="750" dirty="0">
+                <a:solidFill>
+                  <a:srgbClr val="6C757D"/>
+                </a:solidFill>
+                <a:latin typeface="Vazirmatn" pitchFamily="34" charset="0"/>
+                <a:ea typeface="Vazirmatn" pitchFamily="34" charset="-122"/>
+                <a:cs typeface="Vazirmatn" pitchFamily="34" charset="-120"/>
+              </a:rPr>
+              <a:t>05</a:t>
+            </a:r>
+            <a:endParaRPr lang="en-US" sz="750" dirty="0"/>
+          </a:p>
+        </p:txBody>
+      </p:sp>
+      <p:sp>
+        <p:nvSpPr>
+          <p:cNvPr id="31" name="Text 26"/>
+          <p:cNvSpPr txBox="1"/>
+          <p:nvPr/>
+        </p:nvSpPr>
+        <p:spPr>
+          <a:xfrm>
+            <a:off x="557784" y="6510528"/>
+            <a:ext cx="128016" cy="164592"/>
+          </a:xfrm>
+          <a:prstGeom prst="rect">
+            <a:avLst/>
+          </a:prstGeom>
+          <a:noFill/>
+          <a:ln/>
+        </p:spPr>
+        <p:txBody>
+          <a:bodyPr wrap="square" lIns="0" tIns="0" rIns="0" bIns="0" rtlCol="0" anchor="ctr"/>
+          <a:lstStyle/>
+          <a:p>
+            <a:pPr algn="ctr" indent="0" marL="0">
+              <a:buNone/>
+            </a:pPr>
+            <a:r>
+              <a:rPr lang="en-US" altLang="en-US" sz="750" dirty="0">
+                <a:solidFill>
+                  <a:srgbClr val="6C757D"/>
+                </a:solidFill>
+                <a:latin typeface="Vazirmatn" pitchFamily="34" charset="0"/>
+                <a:ea typeface="Vazirmatn" pitchFamily="34" charset="-122"/>
+                <a:cs typeface="Vazirmatn" pitchFamily="34" charset="-120"/>
+              </a:rPr>
+              <a:t>/</a:t>
+            </a:r>
+            <a:endParaRPr lang="en-US" sz="750" dirty="0"/>
+          </a:p>
+        </p:txBody>
+      </p:sp>
+      <p:sp>
+        <p:nvSpPr>
+          <p:cNvPr id="32" name="Text 27"/>
+          <p:cNvSpPr txBox="1"/>
+          <p:nvPr/>
+        </p:nvSpPr>
+        <p:spPr>
+          <a:xfrm>
+            <a:off x="685800" y="6510528"/>
+            <a:ext cx="237744" cy="164592"/>
+          </a:xfrm>
+          <a:prstGeom prst="rect">
+            <a:avLst/>
+          </a:prstGeom>
+          <a:noFill/>
+          <a:ln/>
+        </p:spPr>
+        <p:txBody>
+          <a:bodyPr wrap="square" lIns="0" tIns="0" rIns="0" bIns="0" rtlCol="0" anchor="ctr"/>
+          <a:lstStyle/>
+          <a:p>
+            <a:pPr algn="ctr" indent="0" marL="0">
+              <a:buNone/>
+            </a:pPr>
+            <a:r>
+              <a:rPr lang="en-US" altLang="en-US" sz="750" dirty="0">
+                <a:solidFill>
+                  <a:srgbClr val="6C757D"/>
+                </a:solidFill>
+                <a:latin typeface="Vazirmatn" pitchFamily="34" charset="0"/>
+                <a:ea typeface="Vazirmatn" pitchFamily="34" charset="-122"/>
+                <a:cs typeface="Vazirmatn" pitchFamily="34" charset="-120"/>
+              </a:rPr>
+              <a:t>08</a:t>
+            </a:r>
+            <a:endParaRPr lang="en-US" sz="750" dirty="0"/>
+          </a:p>
+        </p:txBody>
+      </p:sp>
+    </p:spTree>
+  </p:cSld>
+  <p:clrMapOvr>
+    <a:masterClrMapping/>
+  </p:clrMapOvr>
+</p:sld>
+</file>
+
+<file path=ppt/slides/slide6.xml><?xml version="1.0" encoding="utf-8"?>
+<p:sld xmlns:a="http://schemas.openxmlformats.org/drawingml/2006/main" xmlns:r="http://schemas.openxmlformats.org/officeDocument/2006/relationships" xmlns:p="http://schemas.openxmlformats.org/presentationml/2006/main">
+  <p:cSld name="Slide 6">
+    <p:bg>
+      <p:bgPr>
+        <a:solidFill>
+          <a:srgbClr val="0D5C75"/>
+        </a:solidFill>
+      </p:bgPr>
+    </p:bg>
+    <p:spTree>
+      <p:nvGrpSpPr>
+        <p:cNvPr id="1" name=""/>
+        <p:cNvGrpSpPr/>
+        <p:nvPr/>
+      </p:nvGrpSpPr>
+      <p:grpSpPr>
+        <a:xfrm>
+          <a:off x="0" y="0"/>
+          <a:ext cx="0" cy="0"/>
+          <a:chOff x="0" y="0"/>
+          <a:chExt cx="0" cy="0"/>
+        </a:xfrm>
+      </p:grpSpPr>
+      <p:sp>
+        <p:nvSpPr>
+          <p:cNvPr id="2" name="Shape 0"/>
+          <p:cNvSpPr/>
+          <p:nvPr/>
+        </p:nvSpPr>
+        <p:spPr>
+          <a:xfrm>
+            <a:off x="11503152" y="347472"/>
+            <a:ext cx="155448" cy="310896"/>
+          </a:xfrm>
+          <a:prstGeom prst="rect">
+            <a:avLst/>
+          </a:prstGeom>
+          <a:solidFill>
+            <a:srgbClr val="F4A261"/>
+          </a:solidFill>
+          <a:ln w="12700">
+            <a:solidFill>
+              <a:srgbClr val="F4A261">
+                <a:alpha val="0"/>
+              </a:srgbClr>
+            </a:solidFill>
+            <a:prstDash val="solid"/>
+          </a:ln>
+        </p:spPr>
+      </p:sp>
+      <p:sp>
+        <p:nvSpPr>
+          <p:cNvPr id="3" name="Text 1"/>
+          <p:cNvSpPr txBox="1"/>
+          <p:nvPr/>
+        </p:nvSpPr>
+        <p:spPr>
+          <a:xfrm>
+            <a:off x="4663440" y="329184"/>
+            <a:ext cx="6720840" cy="365760"/>
+          </a:xfrm>
+          <a:prstGeom prst="rect">
+            <a:avLst/>
+          </a:prstGeom>
+          <a:noFill/>
+          <a:ln/>
+        </p:spPr>
+        <p:txBody>
+          <a:bodyPr wrap="square" lIns="0" tIns="0" rIns="0" bIns="0" rtlCol="0" anchor="ctr"/>
+          <a:lstStyle/>
+          <a:p>
+            <a:pPr algn="r" indent="0" marL="0">
+              <a:buNone/>
+            </a:pPr>
+            <a:r>
+              <a:rPr lang="en-US" altLang="en-US" sz="1050" b="1" spc="50" kern="0" dirty="0">
+                <a:solidFill>
+                  <a:srgbClr val="F4A261"/>
+                </a:solidFill>
+                <a:latin typeface="Vazirmatn" pitchFamily="34" charset="0"/>
+                <a:ea typeface="Vazirmatn" pitchFamily="34" charset="-122"/>
+                <a:cs typeface="Vazirmatn" pitchFamily="34" charset="-120"/>
+              </a:rPr>
+              <a:t>06</a:t>
+            </a:r>
+            <a:endParaRPr lang="en-US" sz="1050" dirty="0"/>
+          </a:p>
+        </p:txBody>
+      </p:sp>
+      <p:sp>
+        <p:nvSpPr>
+          <p:cNvPr id="4" name="Text 2"/>
+          <p:cNvSpPr txBox="1"/>
+          <p:nvPr/>
+        </p:nvSpPr>
+        <p:spPr>
+          <a:xfrm>
+            <a:off x="4663440" y="731520"/>
+            <a:ext cx="6995160" cy="868680"/>
+          </a:xfrm>
+          <a:prstGeom prst="rect">
+            <a:avLst/>
+          </a:prstGeom>
+          <a:noFill/>
+          <a:ln/>
+        </p:spPr>
+        <p:txBody>
+          <a:bodyPr wrap="square" lIns="0" tIns="0" rIns="0" bIns="0" rtlCol="0" anchor="t"/>
+          <a:lstStyle/>
+          <a:p>
+            <a:pPr algn="r" indent="0" marL="0">
+              <a:buNone/>
+            </a:pPr>
+            <a:r>
+              <a:rPr lang="en-US" altLang="en-US" sz="2400" b="1" dirty="0">
+                <a:solidFill>
+                  <a:srgbClr val="F8FAFC"/>
+                </a:solidFill>
+                <a:latin typeface="Vazirmatn" pitchFamily="34" charset="0"/>
+                <a:ea typeface="Vazirmatn" pitchFamily="34" charset="-122"/>
+                <a:cs typeface="Vazirmatn" pitchFamily="34" charset="-120"/>
+              </a:rPr>
+              <a:t>Grid Integration and Smart Charging</a:t>
+            </a:r>
+            <a:endParaRPr lang="en-US" sz="2400" dirty="0"/>
+          </a:p>
+        </p:txBody>
+      </p:sp>
+      <p:sp>
+        <p:nvSpPr>
+          <p:cNvPr id="5" name="Text 3"/>
+          <p:cNvSpPr txBox="1"/>
+          <p:nvPr/>
+        </p:nvSpPr>
+        <p:spPr>
+          <a:xfrm>
+            <a:off x="4663440" y="1572768"/>
+            <a:ext cx="6995160" cy="594360"/>
+          </a:xfrm>
+          <a:prstGeom prst="rect">
+            <a:avLst/>
+          </a:prstGeom>
+          <a:noFill/>
+          <a:ln/>
+        </p:spPr>
+        <p:txBody>
+          <a:bodyPr wrap="square" lIns="0" tIns="0" rIns="0" bIns="0" rtlCol="0" anchor="t"/>
+          <a:lstStyle/>
+          <a:p>
+            <a:pPr algn="r" indent="0" marL="0">
+              <a:buNone/>
+            </a:pPr>
+            <a:r>
+              <a:rPr lang="en-US" altLang="en-US" sz="1250" dirty="0">
+                <a:solidFill>
+                  <a:srgbClr val="CBD5E1"/>
+                </a:solidFill>
+                <a:latin typeface="Vazirmatn" pitchFamily="34" charset="0"/>
+                <a:ea typeface="Vazirmatn" pitchFamily="34" charset="-122"/>
+                <a:cs typeface="Vazirmatn" pitchFamily="34" charset="-120"/>
+              </a:rPr>
+              <a:t>Coordinated strategies to optimize charging infrastructure for electrical grid support</a:t>
+            </a:r>
+            <a:endParaRPr lang="en-US" sz="1250" dirty="0"/>
+          </a:p>
+        </p:txBody>
+      </p:sp>
+      <p:sp>
+        <p:nvSpPr>
+          <p:cNvPr id="6" name="Shape 4"/>
+          <p:cNvSpPr/>
+          <p:nvPr/>
+        </p:nvSpPr>
+        <p:spPr>
+          <a:xfrm>
+            <a:off x="530352" y="2788920"/>
+            <a:ext cx="3614928" cy="2487168"/>
+          </a:xfrm>
+          <a:prstGeom prst="roundRect">
+            <a:avLst/>
+          </a:prstGeom>
+          <a:solidFill>
+            <a:srgbClr val="182035"/>
+          </a:solidFill>
+          <a:ln w="8890">
+            <a:solidFill>
+              <a:srgbClr val="F4A261">
+                <a:alpha val="65000"/>
+              </a:srgbClr>
+            </a:solidFill>
+            <a:prstDash val="solid"/>
+          </a:ln>
+        </p:spPr>
+      </p:sp>
+      <p:sp>
+        <p:nvSpPr>
+          <p:cNvPr id="7" name="Text 5"/>
+          <p:cNvSpPr txBox="1"/>
+          <p:nvPr/>
+        </p:nvSpPr>
+        <p:spPr>
+          <a:xfrm>
+            <a:off x="694944" y="2971800"/>
+            <a:ext cx="685800" cy="320040"/>
+          </a:xfrm>
+          <a:prstGeom prst="rect">
+            <a:avLst/>
+          </a:prstGeom>
+          <a:noFill/>
+          <a:ln/>
+        </p:spPr>
+        <p:txBody>
+          <a:bodyPr wrap="square" lIns="0" tIns="0" rIns="0" bIns="0" rtlCol="0" anchor="ctr"/>
+          <a:lstStyle/>
+          <a:p>
+            <a:pPr algn="l" indent="0" marL="0">
+              <a:buNone/>
+            </a:pPr>
+            <a:r>
+              <a:rPr lang="en-US" altLang="en-US" sz="1200" b="1" dirty="0">
+                <a:solidFill>
+                  <a:srgbClr val="F4A261"/>
+                </a:solidFill>
+                <a:latin typeface="Vazirmatn" pitchFamily="34" charset="0"/>
+                <a:ea typeface="Vazirmatn" pitchFamily="34" charset="-122"/>
+                <a:cs typeface="Vazirmatn" pitchFamily="34" charset="-120"/>
+              </a:rPr>
+              <a:t>01</a:t>
+            </a:r>
+            <a:endParaRPr lang="en-US" sz="1200" dirty="0"/>
+          </a:p>
+        </p:txBody>
+      </p:sp>
+      <p:pic>
+        <p:nvPicPr>
+          <p:cNvPr id="8" name="Image 0" descr="preencoded.png">    </p:cNvPr>
+          <p:cNvPicPr>
+            <a:picLocks noChangeAspect="1"/>
+          </p:cNvPicPr>
+          <p:nvPr/>
+        </p:nvPicPr>
+        <p:blipFill>
+          <a:blip r:embed="rId1">
+            <a:extLst>
+              <a:ext uri="{96DAC541-7B7A-43D3-8B79-37D633B846F1}">
+                <asvg:svgBlip xmlns:asvg="http://schemas.microsoft.com/office/drawing/2016/SVG/main" r:embed="rId2"/>
+              </a:ext>
+            </a:extLst>
+          </a:blip>
+          <a:stretch>
+            <a:fillRect/>
+          </a:stretch>
+        </p:blipFill>
+        <p:spPr>
+          <a:xfrm>
+            <a:off x="3578352" y="2990088"/>
+            <a:ext cx="347472" cy="347472"/>
+          </a:xfrm>
+          <a:prstGeom prst="rect">
+            <a:avLst/>
+          </a:prstGeom>
+        </p:spPr>
+      </p:pic>
+      <p:sp>
+        <p:nvSpPr>
+          <p:cNvPr id="9" name="Text 6"/>
+          <p:cNvSpPr txBox="1"/>
+          <p:nvPr/>
+        </p:nvSpPr>
+        <p:spPr>
+          <a:xfrm>
+            <a:off x="731520" y="3611880"/>
+            <a:ext cx="3212592" cy="411480"/>
+          </a:xfrm>
+          <a:prstGeom prst="rect">
+            <a:avLst/>
+          </a:prstGeom>
+          <a:noFill/>
+          <a:ln/>
+        </p:spPr>
+        <p:txBody>
+          <a:bodyPr wrap="square" lIns="0" tIns="0" rIns="0" bIns="0" rtlCol="0" anchor="ctr"/>
+          <a:lstStyle/>
+          <a:p>
+            <a:pPr algn="l" indent="0" marL="0">
+              <a:buNone/>
+            </a:pPr>
+            <a:r>
+              <a:rPr lang="en-US" altLang="en-US" sz="1100" b="1" dirty="0">
+                <a:solidFill>
+                  <a:srgbClr val="FFFFFF"/>
+                </a:solidFill>
+                <a:latin typeface="Vazirmatn" pitchFamily="34" charset="0"/>
+                <a:ea typeface="Vazirmatn" pitchFamily="34" charset="-122"/>
+                <a:cs typeface="Vazirmatn" pitchFamily="34" charset="-120"/>
+              </a:rPr>
+              <a:t>Evaluate Strategies</a:t>
+            </a:r>
+            <a:endParaRPr lang="en-US" sz="1100" dirty="0"/>
+          </a:p>
+        </p:txBody>
+      </p:sp>
+      <p:sp>
+        <p:nvSpPr>
+          <p:cNvPr id="10" name="Text 7"/>
+          <p:cNvSpPr txBox="1"/>
+          <p:nvPr/>
+        </p:nvSpPr>
+        <p:spPr>
+          <a:xfrm>
+            <a:off x="731520" y="4114800"/>
+            <a:ext cx="3212592" cy="749808"/>
+          </a:xfrm>
+          <a:prstGeom prst="rect">
+            <a:avLst/>
+          </a:prstGeom>
+          <a:noFill/>
+          <a:ln/>
+        </p:spPr>
+        <p:txBody>
+          <a:bodyPr wrap="square" lIns="0" tIns="0" rIns="0" bIns="0" rtlCol="0" anchor="t"/>
+          <a:lstStyle/>
+          <a:p>
+            <a:pPr algn="l" indent="0" marL="0">
+              <a:buNone/>
+            </a:pPr>
+            <a:r>
+              <a:rPr lang="en-US" altLang="en-US" sz="1050" dirty="0">
+                <a:solidFill>
+                  <a:srgbClr val="B9C4D6"/>
+                </a:solidFill>
+                <a:latin typeface="Vazirmatn" pitchFamily="34" charset="0"/>
+                <a:ea typeface="Vazirmatn" pitchFamily="34" charset="-122"/>
+                <a:cs typeface="Vazirmatn" pitchFamily="34" charset="-120"/>
+              </a:rPr>
+              <a:t>Assess charge management effectiveness to identify highest grid value during mass EV adoption.</a:t>
+            </a:r>
+            <a:endParaRPr lang="en-US" sz="1050" dirty="0"/>
+          </a:p>
+        </p:txBody>
+      </p:sp>
+      <p:sp>
+        <p:nvSpPr>
+          <p:cNvPr id="11" name="Text 8"/>
+          <p:cNvSpPr txBox="1"/>
+          <p:nvPr/>
+        </p:nvSpPr>
+        <p:spPr>
+          <a:xfrm>
+            <a:off x="4126992" y="3776472"/>
+            <a:ext cx="256032" cy="347472"/>
+          </a:xfrm>
+          <a:prstGeom prst="rect">
+            <a:avLst/>
+          </a:prstGeom>
+          <a:noFill/>
+          <a:ln/>
+        </p:spPr>
+        <p:txBody>
+          <a:bodyPr wrap="square" lIns="0" tIns="0" rIns="0" bIns="0" rtlCol="0" anchor="ctr"/>
+          <a:lstStyle/>
+          <a:p>
+            <a:pPr algn="ctr" indent="0" marL="0">
+              <a:buNone/>
+            </a:pPr>
+            <a:r>
+              <a:rPr lang="en-US" altLang="en-US" sz="1500" b="1" dirty="0">
+                <a:solidFill>
+                  <a:srgbClr val="F4A261"/>
+                </a:solidFill>
+                <a:latin typeface="Vazirmatn" pitchFamily="34" charset="0"/>
+                <a:ea typeface="Vazirmatn" pitchFamily="34" charset="-122"/>
+                <a:cs typeface="Vazirmatn" pitchFamily="34" charset="-120"/>
+              </a:rPr>
+              <a:t>→</a:t>
+            </a:r>
+            <a:endParaRPr lang="en-US" sz="1500" dirty="0"/>
+          </a:p>
+        </p:txBody>
+      </p:sp>
+      <p:sp>
+        <p:nvSpPr>
+          <p:cNvPr id="12" name="Shape 9"/>
+          <p:cNvSpPr/>
+          <p:nvPr/>
+        </p:nvSpPr>
+        <p:spPr>
+          <a:xfrm>
+            <a:off x="4291584" y="2788920"/>
+            <a:ext cx="3614928" cy="2487168"/>
+          </a:xfrm>
+          <a:prstGeom prst="roundRect">
+            <a:avLst/>
+          </a:prstGeom>
+          <a:solidFill>
+            <a:srgbClr val="17283A"/>
+          </a:solidFill>
+          <a:ln w="8890">
+            <a:solidFill>
+              <a:srgbClr val="E76F51">
+                <a:alpha val="65000"/>
+              </a:srgbClr>
+            </a:solidFill>
+            <a:prstDash val="solid"/>
+          </a:ln>
+        </p:spPr>
+      </p:sp>
+      <p:sp>
+        <p:nvSpPr>
+          <p:cNvPr id="13" name="Text 10"/>
+          <p:cNvSpPr txBox="1"/>
+          <p:nvPr/>
+        </p:nvSpPr>
+        <p:spPr>
+          <a:xfrm>
+            <a:off x="4456176" y="2971800"/>
+            <a:ext cx="685800" cy="320040"/>
+          </a:xfrm>
+          <a:prstGeom prst="rect">
+            <a:avLst/>
+          </a:prstGeom>
+          <a:noFill/>
+          <a:ln/>
+        </p:spPr>
+        <p:txBody>
+          <a:bodyPr wrap="square" lIns="0" tIns="0" rIns="0" bIns="0" rtlCol="0" anchor="ctr"/>
+          <a:lstStyle/>
+          <a:p>
+            <a:pPr algn="l" indent="0" marL="0">
+              <a:buNone/>
+            </a:pPr>
+            <a:r>
+              <a:rPr lang="en-US" altLang="en-US" sz="1200" b="1" dirty="0">
+                <a:solidFill>
+                  <a:srgbClr val="E76F51"/>
+                </a:solidFill>
+                <a:latin typeface="Vazirmatn" pitchFamily="34" charset="0"/>
+                <a:ea typeface="Vazirmatn" pitchFamily="34" charset="-122"/>
+                <a:cs typeface="Vazirmatn" pitchFamily="34" charset="-120"/>
+              </a:rPr>
+              <a:t>02</a:t>
+            </a:r>
+            <a:endParaRPr lang="en-US" sz="1200" dirty="0"/>
+          </a:p>
+        </p:txBody>
+      </p:sp>
+      <p:pic>
+        <p:nvPicPr>
+          <p:cNvPr id="14" name="Image 1" descr="preencoded.png">    </p:cNvPr>
+          <p:cNvPicPr>
+            <a:picLocks noChangeAspect="1"/>
+          </p:cNvPicPr>
+          <p:nvPr/>
+        </p:nvPicPr>
+        <p:blipFill>
+          <a:blip r:embed="rId3">
+            <a:extLst>
+              <a:ext uri="{96DAC541-7B7A-43D3-8B79-37D633B846F1}">
+                <asvg:svgBlip xmlns:asvg="http://schemas.microsoft.com/office/drawing/2016/SVG/main" r:embed="rId4"/>
+              </a:ext>
+            </a:extLst>
+          </a:blip>
+          <a:stretch>
+            <a:fillRect/>
+          </a:stretch>
+        </p:blipFill>
+        <p:spPr>
+          <a:xfrm>
+            <a:off x="7339584" y="2990088"/>
+            <a:ext cx="347472" cy="347472"/>
+          </a:xfrm>
+          <a:prstGeom prst="rect">
+            <a:avLst/>
+          </a:prstGeom>
+        </p:spPr>
+      </p:pic>
+      <p:sp>
+        <p:nvSpPr>
+          <p:cNvPr id="15" name="Text 11"/>
+          <p:cNvSpPr txBox="1"/>
+          <p:nvPr/>
+        </p:nvSpPr>
+        <p:spPr>
+          <a:xfrm>
+            <a:off x="4492752" y="3611880"/>
+            <a:ext cx="3212592" cy="411480"/>
+          </a:xfrm>
+          <a:prstGeom prst="rect">
+            <a:avLst/>
+          </a:prstGeom>
+          <a:noFill/>
+          <a:ln/>
+        </p:spPr>
+        <p:txBody>
+          <a:bodyPr wrap="square" lIns="0" tIns="0" rIns="0" bIns="0" rtlCol="0" anchor="ctr"/>
+          <a:lstStyle/>
+          <a:p>
+            <a:pPr algn="l" indent="0" marL="0">
+              <a:buNone/>
+            </a:pPr>
+            <a:r>
+              <a:rPr lang="en-US" altLang="en-US" sz="1100" b="1" dirty="0">
+                <a:solidFill>
+                  <a:srgbClr val="FFFFFF"/>
+                </a:solidFill>
+                <a:latin typeface="Vazirmatn" pitchFamily="34" charset="0"/>
+                <a:ea typeface="Vazirmatn" pitchFamily="34" charset="-122"/>
+                <a:cs typeface="Vazirmatn" pitchFamily="34" charset="-120"/>
+              </a:rPr>
+              <a:t>Shift Demand</a:t>
+            </a:r>
+            <a:endParaRPr lang="en-US" sz="1100" dirty="0"/>
+          </a:p>
+        </p:txBody>
+      </p:sp>
+      <p:sp>
+        <p:nvSpPr>
+          <p:cNvPr id="16" name="Text 12"/>
+          <p:cNvSpPr txBox="1"/>
+          <p:nvPr/>
+        </p:nvSpPr>
+        <p:spPr>
+          <a:xfrm>
+            <a:off x="4492752" y="4114800"/>
+            <a:ext cx="3212592" cy="749808"/>
+          </a:xfrm>
+          <a:prstGeom prst="rect">
+            <a:avLst/>
+          </a:prstGeom>
+          <a:noFill/>
+          <a:ln/>
+        </p:spPr>
+        <p:txBody>
+          <a:bodyPr wrap="square" lIns="0" tIns="0" rIns="0" bIns="0" rtlCol="0" anchor="t"/>
+          <a:lstStyle/>
+          <a:p>
+            <a:pPr algn="l" indent="0" marL="0">
+              <a:buNone/>
+            </a:pPr>
+            <a:r>
+              <a:rPr lang="en-US" altLang="en-US" sz="1050" dirty="0">
+                <a:solidFill>
+                  <a:srgbClr val="B9C4D6"/>
+                </a:solidFill>
+                <a:latin typeface="Vazirmatn" pitchFamily="34" charset="0"/>
+                <a:ea typeface="Vazirmatn" pitchFamily="34" charset="-122"/>
+                <a:cs typeface="Vazirmatn" pitchFamily="34" charset="-120"/>
+              </a:rPr>
+              <a:t>Use smart charging patterns over daily cycles to integrate clean distributed energy resources.</a:t>
+            </a:r>
+            <a:endParaRPr lang="en-US" sz="1050" dirty="0"/>
+          </a:p>
+        </p:txBody>
+      </p:sp>
+      <p:sp>
+        <p:nvSpPr>
+          <p:cNvPr id="17" name="Text 13"/>
+          <p:cNvSpPr txBox="1"/>
+          <p:nvPr/>
+        </p:nvSpPr>
+        <p:spPr>
+          <a:xfrm>
+            <a:off x="7888224" y="3776472"/>
+            <a:ext cx="256032" cy="347472"/>
+          </a:xfrm>
+          <a:prstGeom prst="rect">
+            <a:avLst/>
+          </a:prstGeom>
+          <a:noFill/>
+          <a:ln/>
+        </p:spPr>
+        <p:txBody>
+          <a:bodyPr wrap="square" lIns="0" tIns="0" rIns="0" bIns="0" rtlCol="0" anchor="ctr"/>
+          <a:lstStyle/>
+          <a:p>
+            <a:pPr algn="ctr" indent="0" marL="0">
+              <a:buNone/>
+            </a:pPr>
+            <a:r>
+              <a:rPr lang="en-US" altLang="en-US" sz="1500" b="1" dirty="0">
+                <a:solidFill>
+                  <a:srgbClr val="F4A261"/>
+                </a:solidFill>
+                <a:latin typeface="Vazirmatn" pitchFamily="34" charset="0"/>
+                <a:ea typeface="Vazirmatn" pitchFamily="34" charset="-122"/>
+                <a:cs typeface="Vazirmatn" pitchFamily="34" charset="-120"/>
+              </a:rPr>
+              <a:t>→</a:t>
+            </a:r>
+            <a:endParaRPr lang="en-US" sz="1500" dirty="0"/>
+          </a:p>
+        </p:txBody>
+      </p:sp>
+      <p:sp>
+        <p:nvSpPr>
+          <p:cNvPr id="18" name="Shape 14"/>
+          <p:cNvSpPr/>
+          <p:nvPr/>
+        </p:nvSpPr>
+        <p:spPr>
+          <a:xfrm>
+            <a:off x="8052816" y="2788920"/>
+            <a:ext cx="3614928" cy="2487168"/>
+          </a:xfrm>
+          <a:prstGeom prst="roundRect">
+            <a:avLst/>
+          </a:prstGeom>
+          <a:solidFill>
+            <a:srgbClr val="182035"/>
+          </a:solidFill>
+          <a:ln w="8890">
+            <a:solidFill>
+              <a:srgbClr val="F4A261">
+                <a:alpha val="65000"/>
+              </a:srgbClr>
+            </a:solidFill>
+            <a:prstDash val="solid"/>
+          </a:ln>
+        </p:spPr>
+      </p:sp>
+      <p:sp>
+        <p:nvSpPr>
+          <p:cNvPr id="19" name="Text 15"/>
+          <p:cNvSpPr txBox="1"/>
+          <p:nvPr/>
+        </p:nvSpPr>
+        <p:spPr>
+          <a:xfrm>
+            <a:off x="8217408" y="2971800"/>
+            <a:ext cx="685800" cy="320040"/>
+          </a:xfrm>
+          <a:prstGeom prst="rect">
+            <a:avLst/>
+          </a:prstGeom>
+          <a:noFill/>
+          <a:ln/>
+        </p:spPr>
+        <p:txBody>
+          <a:bodyPr wrap="square" lIns="0" tIns="0" rIns="0" bIns="0" rtlCol="0" anchor="ctr"/>
+          <a:lstStyle/>
+          <a:p>
+            <a:pPr algn="l" indent="0" marL="0">
+              <a:buNone/>
+            </a:pPr>
+            <a:r>
+              <a:rPr lang="en-US" altLang="en-US" sz="1200" b="1" dirty="0">
+                <a:solidFill>
+                  <a:srgbClr val="F4A261"/>
+                </a:solidFill>
+                <a:latin typeface="Vazirmatn" pitchFamily="34" charset="0"/>
+                <a:ea typeface="Vazirmatn" pitchFamily="34" charset="-122"/>
+                <a:cs typeface="Vazirmatn" pitchFamily="34" charset="-120"/>
+              </a:rPr>
+              <a:t>03</a:t>
+            </a:r>
+            <a:endParaRPr lang="en-US" sz="1200" dirty="0"/>
+          </a:p>
+        </p:txBody>
+      </p:sp>
+      <p:pic>
+        <p:nvPicPr>
+          <p:cNvPr id="20" name="Image 2" descr="preencoded.png">    </p:cNvPr>
+          <p:cNvPicPr>
+            <a:picLocks noChangeAspect="1"/>
+          </p:cNvPicPr>
+          <p:nvPr/>
+        </p:nvPicPr>
+        <p:blipFill>
+          <a:blip r:embed="rId5">
+            <a:extLst>
+              <a:ext uri="{96DAC541-7B7A-43D3-8B79-37D633B846F1}">
+                <asvg:svgBlip xmlns:asvg="http://schemas.microsoft.com/office/drawing/2016/SVG/main" r:embed="rId6"/>
+              </a:ext>
+            </a:extLst>
+          </a:blip>
+          <a:stretch>
+            <a:fillRect/>
+          </a:stretch>
+        </p:blipFill>
+        <p:spPr>
+          <a:xfrm>
+            <a:off x="11100816" y="2990088"/>
+            <a:ext cx="347472" cy="347472"/>
+          </a:xfrm>
+          <a:prstGeom prst="rect">
+            <a:avLst/>
+          </a:prstGeom>
+        </p:spPr>
+      </p:pic>
+      <p:sp>
+        <p:nvSpPr>
+          <p:cNvPr id="21" name="Text 16"/>
+          <p:cNvSpPr txBox="1"/>
+          <p:nvPr/>
+        </p:nvSpPr>
+        <p:spPr>
+          <a:xfrm>
+            <a:off x="8253984" y="3611880"/>
+            <a:ext cx="3212592" cy="411480"/>
+          </a:xfrm>
+          <a:prstGeom prst="rect">
+            <a:avLst/>
+          </a:prstGeom>
+          <a:noFill/>
+          <a:ln/>
+        </p:spPr>
+        <p:txBody>
+          <a:bodyPr wrap="square" lIns="0" tIns="0" rIns="0" bIns="0" rtlCol="0" anchor="ctr"/>
+          <a:lstStyle/>
+          <a:p>
+            <a:pPr algn="l" indent="0" marL="0">
+              <a:buNone/>
+            </a:pPr>
+            <a:r>
+              <a:rPr lang="en-US" altLang="en-US" sz="1100" b="1" dirty="0">
+                <a:solidFill>
+                  <a:srgbClr val="FFFFFF"/>
+                </a:solidFill>
+                <a:latin typeface="Vazirmatn" pitchFamily="34" charset="0"/>
+                <a:ea typeface="Vazirmatn" pitchFamily="34" charset="-122"/>
+                <a:cs typeface="Vazirmatn" pitchFamily="34" charset="-120"/>
+              </a:rPr>
+              <a:t>Provide Services</a:t>
+            </a:r>
+            <a:endParaRPr lang="en-US" sz="1100" dirty="0"/>
+          </a:p>
+        </p:txBody>
+      </p:sp>
+      <p:sp>
+        <p:nvSpPr>
+          <p:cNvPr id="22" name="Text 17"/>
+          <p:cNvSpPr txBox="1"/>
+          <p:nvPr/>
+        </p:nvSpPr>
+        <p:spPr>
+          <a:xfrm>
+            <a:off x="8253984" y="4114800"/>
+            <a:ext cx="3212592" cy="749808"/>
+          </a:xfrm>
+          <a:prstGeom prst="rect">
+            <a:avLst/>
+          </a:prstGeom>
+          <a:noFill/>
+          <a:ln/>
+        </p:spPr>
+        <p:txBody>
+          <a:bodyPr wrap="square" lIns="0" tIns="0" rIns="0" bIns="0" rtlCol="0" anchor="t"/>
+          <a:lstStyle/>
+          <a:p>
+            <a:pPr algn="l" indent="0" marL="0">
+              <a:buNone/>
+            </a:pPr>
+            <a:r>
+              <a:rPr lang="en-US" altLang="en-US" sz="1050" dirty="0">
+                <a:solidFill>
+                  <a:srgbClr val="B9C4D6"/>
+                </a:solidFill>
+                <a:latin typeface="Vazirmatn" pitchFamily="34" charset="0"/>
+                <a:ea typeface="Vazirmatn" pitchFamily="34" charset="-122"/>
+                <a:cs typeface="Vazirmatn" pitchFamily="34" charset="-120"/>
+              </a:rPr>
+              <a:t>Validate smart hubs for load flexibility, frequency regulation, and grid stabilization.</a:t>
+            </a:r>
+            <a:endParaRPr lang="en-US" sz="1050" dirty="0"/>
+          </a:p>
+        </p:txBody>
+      </p:sp>
+      <p:sp>
+        <p:nvSpPr>
+          <p:cNvPr id="23" name="Text 18"/>
+          <p:cNvSpPr txBox="1"/>
+          <p:nvPr/>
+        </p:nvSpPr>
+        <p:spPr>
+          <a:xfrm>
+            <a:off x="320040" y="6510528"/>
+            <a:ext cx="237744" cy="164592"/>
+          </a:xfrm>
+          <a:prstGeom prst="rect">
+            <a:avLst/>
+          </a:prstGeom>
+          <a:noFill/>
+          <a:ln/>
+        </p:spPr>
+        <p:txBody>
+          <a:bodyPr wrap="square" lIns="0" tIns="0" rIns="0" bIns="0" rtlCol="0" anchor="ctr"/>
+          <a:lstStyle/>
+          <a:p>
+            <a:pPr algn="ctr" indent="0" marL="0">
+              <a:buNone/>
+            </a:pPr>
+            <a:r>
+              <a:rPr lang="en-US" altLang="en-US" sz="750" dirty="0">
+                <a:solidFill>
+                  <a:srgbClr val="CBD5E1"/>
+                </a:solidFill>
+                <a:latin typeface="Vazirmatn" pitchFamily="34" charset="0"/>
+                <a:ea typeface="Vazirmatn" pitchFamily="34" charset="-122"/>
+                <a:cs typeface="Vazirmatn" pitchFamily="34" charset="-120"/>
+              </a:rPr>
+              <a:t>06</a:t>
+            </a:r>
+            <a:endParaRPr lang="en-US" sz="750" dirty="0"/>
+          </a:p>
+        </p:txBody>
+      </p:sp>
+      <p:sp>
+        <p:nvSpPr>
+          <p:cNvPr id="24" name="Text 19"/>
+          <p:cNvSpPr txBox="1"/>
+          <p:nvPr/>
+        </p:nvSpPr>
+        <p:spPr>
+          <a:xfrm>
+            <a:off x="557784" y="6510528"/>
+            <a:ext cx="128016" cy="164592"/>
+          </a:xfrm>
+          <a:prstGeom prst="rect">
+            <a:avLst/>
+          </a:prstGeom>
+          <a:noFill/>
+          <a:ln/>
+        </p:spPr>
+        <p:txBody>
+          <a:bodyPr wrap="square" lIns="0" tIns="0" rIns="0" bIns="0" rtlCol="0" anchor="ctr"/>
+          <a:lstStyle/>
+          <a:p>
+            <a:pPr algn="ctr" indent="0" marL="0">
+              <a:buNone/>
+            </a:pPr>
+            <a:r>
+              <a:rPr lang="en-US" altLang="en-US" sz="750" dirty="0">
+                <a:solidFill>
+                  <a:srgbClr val="CBD5E1"/>
+                </a:solidFill>
+                <a:latin typeface="Vazirmatn" pitchFamily="34" charset="0"/>
+                <a:ea typeface="Vazirmatn" pitchFamily="34" charset="-122"/>
+                <a:cs typeface="Vazirmatn" pitchFamily="34" charset="-120"/>
+              </a:rPr>
+              <a:t>/</a:t>
+            </a:r>
+            <a:endParaRPr lang="en-US" sz="750" dirty="0"/>
+          </a:p>
+        </p:txBody>
+      </p:sp>
+      <p:sp>
+        <p:nvSpPr>
+          <p:cNvPr id="25" name="Text 20"/>
+          <p:cNvSpPr txBox="1"/>
+          <p:nvPr/>
+        </p:nvSpPr>
+        <p:spPr>
+          <a:xfrm>
+            <a:off x="685800" y="6510528"/>
+            <a:ext cx="237744" cy="164592"/>
+          </a:xfrm>
+          <a:prstGeom prst="rect">
+            <a:avLst/>
+          </a:prstGeom>
+          <a:noFill/>
+          <a:ln/>
+        </p:spPr>
+        <p:txBody>
+          <a:bodyPr wrap="square" lIns="0" tIns="0" rIns="0" bIns="0" rtlCol="0" anchor="ctr"/>
+          <a:lstStyle/>
+          <a:p>
+            <a:pPr algn="ctr" indent="0" marL="0">
+              <a:buNone/>
+            </a:pPr>
+            <a:r>
+              <a:rPr lang="en-US" altLang="en-US" sz="750" dirty="0">
+                <a:solidFill>
+                  <a:srgbClr val="CBD5E1"/>
+                </a:solidFill>
+                <a:latin typeface="Vazirmatn" pitchFamily="34" charset="0"/>
+                <a:ea typeface="Vazirmatn" pitchFamily="34" charset="-122"/>
+                <a:cs typeface="Vazirmatn" pitchFamily="34" charset="-120"/>
+              </a:rPr>
+              <a:t>08</a:t>
+            </a:r>
+            <a:endParaRPr lang="en-US" sz="750" dirty="0"/>
+          </a:p>
+        </p:txBody>
+      </p:sp>
+    </p:spTree>
+  </p:cSld>
+  <p:clrMapOvr>
+    <a:masterClrMapping/>
+  </p:clrMapOvr>
+</p:sld>
+</file>
+
+<file path=ppt/slides/slide7.xml><?xml version="1.0" encoding="utf-8"?>
+<p:sld xmlns:a="http://schemas.openxmlformats.org/drawingml/2006/main" xmlns:r="http://schemas.openxmlformats.org/officeDocument/2006/relationships" xmlns:p="http://schemas.openxmlformats.org/presentationml/2006/main">
+  <p:cSld name="Slide 7">
+    <p:spTree>
+      <p:nvGrpSpPr>
+        <p:cNvPr id="1" name=""/>
+        <p:cNvGrpSpPr/>
+        <p:nvPr/>
+      </p:nvGrpSpPr>
+      <p:grpSpPr>
+        <a:xfrm>
+          <a:off x="0" y="0"/>
+          <a:ext cx="0" cy="0"/>
+          <a:chOff x="0" y="0"/>
+          <a:chExt cx="0" cy="0"/>
+        </a:xfrm>
+      </p:grpSpPr>
+      <p:pic>
+        <p:nvPicPr>
+          <p:cNvPr id="2" name="Image 0" descr="preencoded.png">    </p:cNvPr>
+          <p:cNvPicPr>
+            <a:picLocks noChangeAspect="1"/>
+          </p:cNvPicPr>
+          <p:nvPr/>
+        </p:nvPicPr>
+        <p:blipFill>
+          <a:blip r:embed="rId1"/>
+          <a:srcRect l="0" r="0" t="7800" b="7800"/>
+          <a:stretch/>
+        </p:blipFill>
+        <p:spPr>
+          <a:xfrm>
+            <a:off x="0" y="0"/>
+            <a:ext cx="12191695" cy="6858000"/>
+          </a:xfrm>
+          <a:prstGeom prst="rect">
+            <a:avLst/>
+          </a:prstGeom>
+        </p:spPr>
+      </p:pic>
+      <p:sp>
+        <p:nvSpPr>
+          <p:cNvPr id="3" name="Shape 0"/>
+          <p:cNvSpPr/>
+          <p:nvPr/>
+        </p:nvSpPr>
+        <p:spPr>
+          <a:xfrm>
+            <a:off x="0" y="0"/>
+            <a:ext cx="12191695" cy="6858000"/>
+          </a:xfrm>
+          <a:prstGeom prst="rect">
+            <a:avLst/>
+          </a:prstGeom>
+          <a:solidFill>
+            <a:srgbClr val="06101C">
+              <a:alpha val="75000"/>
+            </a:srgbClr>
+          </a:solidFill>
+          <a:ln w="12700">
+            <a:solidFill>
+              <a:srgbClr val="06101C">
+                <a:alpha val="0"/>
+              </a:srgbClr>
+            </a:solidFill>
+            <a:prstDash val="solid"/>
+          </a:ln>
+        </p:spPr>
+      </p:sp>
+      <p:sp>
+        <p:nvSpPr>
+          <p:cNvPr id="4" name="Shape 1"/>
+          <p:cNvSpPr/>
+          <p:nvPr/>
+        </p:nvSpPr>
+        <p:spPr>
+          <a:xfrm>
+            <a:off x="0" y="0"/>
+            <a:ext cx="6629400" cy="6858000"/>
+          </a:xfrm>
+          <a:prstGeom prst="rect">
+            <a:avLst/>
+          </a:prstGeom>
+          <a:solidFill>
+            <a:srgbClr val="07111F">
+              <a:alpha val="82000"/>
+            </a:srgbClr>
+          </a:solidFill>
+          <a:ln w="12700">
+            <a:solidFill>
+              <a:srgbClr val="07111F">
+                <a:alpha val="0"/>
+              </a:srgbClr>
+            </a:solidFill>
+            <a:prstDash val="solid"/>
+          </a:ln>
+        </p:spPr>
+      </p:sp>
+      <p:sp>
+        <p:nvSpPr>
+          <p:cNvPr id="5" name="Text 2"/>
+          <p:cNvSpPr txBox="1"/>
+          <p:nvPr/>
+        </p:nvSpPr>
+        <p:spPr>
+          <a:xfrm>
+            <a:off x="777240" y="594360"/>
+            <a:ext cx="1097280" cy="1097280"/>
+          </a:xfrm>
+          <a:prstGeom prst="rect">
+            <a:avLst/>
+          </a:prstGeom>
+          <a:noFill/>
+          <a:ln/>
+        </p:spPr>
+        <p:txBody>
+          <a:bodyPr wrap="square" lIns="0" tIns="0" rIns="0" bIns="0" rtlCol="0" anchor="ctr"/>
+          <a:lstStyle/>
+          <a:p>
+            <a:pPr algn="l" indent="0" marL="0">
+              <a:buNone/>
+            </a:pPr>
+            <a:r>
+              <a:rPr lang="en-US" altLang="en-US" sz="5400" b="1" dirty="0">
+                <a:solidFill>
+                  <a:srgbClr val="E76F51"/>
+                </a:solidFill>
+                <a:latin typeface="Vazirmatn" pitchFamily="34" charset="0"/>
+                <a:ea typeface="Vazirmatn" pitchFamily="34" charset="-122"/>
+                <a:cs typeface="Vazirmatn" pitchFamily="34" charset="-120"/>
+              </a:rPr>
+              <a:t>“</a:t>
+            </a:r>
+            <a:endParaRPr lang="en-US" sz="5400" dirty="0"/>
+          </a:p>
+        </p:txBody>
+      </p:sp>
+      <p:sp>
+        <p:nvSpPr>
+          <p:cNvPr id="6" name="Text 3"/>
+          <p:cNvSpPr txBox="1"/>
+          <p:nvPr/>
+        </p:nvSpPr>
+        <p:spPr>
+          <a:xfrm>
+            <a:off x="868680" y="1417320"/>
+            <a:ext cx="5349240" cy="2148840"/>
+          </a:xfrm>
+          <a:prstGeom prst="rect">
+            <a:avLst/>
+          </a:prstGeom>
+          <a:noFill/>
+          <a:ln/>
+        </p:spPr>
+        <p:txBody>
+          <a:bodyPr wrap="square" lIns="0" tIns="0" rIns="0" bIns="0" rtlCol="0" anchor="t"/>
+          <a:lstStyle/>
+          <a:p>
+            <a:pPr algn="l" indent="0" marL="0">
+              <a:buNone/>
+            </a:pPr>
+            <a:r>
+              <a:rPr lang="en-US" altLang="en-US" sz="2500" b="1" dirty="0">
+                <a:solidFill>
+                  <a:srgbClr val="FFFFFF"/>
+                </a:solidFill>
+                <a:latin typeface="Vazirmatn" pitchFamily="34" charset="0"/>
+                <a:ea typeface="Vazirmatn" pitchFamily="34" charset="-122"/>
+                <a:cs typeface="Vazirmatn" pitchFamily="34" charset="-120"/>
+              </a:rPr>
+              <a:t>We've seen a steady increase in our customer base since installing the equipment a couple of years ago.</a:t>
+            </a:r>
+            <a:endParaRPr lang="en-US" sz="2500" dirty="0"/>
+          </a:p>
+        </p:txBody>
+      </p:sp>
+      <p:sp>
+        <p:nvSpPr>
+          <p:cNvPr id="7" name="Text 4"/>
+          <p:cNvSpPr txBox="1"/>
+          <p:nvPr/>
+        </p:nvSpPr>
+        <p:spPr>
+          <a:xfrm>
+            <a:off x="914400" y="3840480"/>
+            <a:ext cx="4389120" cy="320040"/>
+          </a:xfrm>
+          <a:prstGeom prst="rect">
+            <a:avLst/>
+          </a:prstGeom>
+          <a:noFill/>
+          <a:ln/>
+        </p:spPr>
+        <p:txBody>
+          <a:bodyPr wrap="square" lIns="0" tIns="0" rIns="0" bIns="0" rtlCol="0" anchor="ctr"/>
+          <a:lstStyle/>
+          <a:p>
+            <a:pPr algn="l" indent="0" marL="0">
+              <a:buNone/>
+            </a:pPr>
+            <a:r>
+              <a:rPr lang="en-US" altLang="en-US" sz="1050" b="1" dirty="0">
+                <a:solidFill>
+                  <a:srgbClr val="E76F51"/>
+                </a:solidFill>
+                <a:latin typeface="Vazirmatn" pitchFamily="34" charset="0"/>
+                <a:ea typeface="Vazirmatn" pitchFamily="34" charset="-122"/>
+                <a:cs typeface="Vazirmatn" pitchFamily="34" charset="-120"/>
+              </a:rPr>
+              <a:t>Jay Ricker, Owner of Ricker's Convenience Stores</a:t>
+            </a:r>
+            <a:endParaRPr lang="en-US" sz="1050" dirty="0"/>
+          </a:p>
+        </p:txBody>
+      </p:sp>
+      <p:sp>
+        <p:nvSpPr>
+          <p:cNvPr id="8" name="Text 5"/>
+          <p:cNvSpPr txBox="1"/>
+          <p:nvPr/>
+        </p:nvSpPr>
+        <p:spPr>
+          <a:xfrm>
+            <a:off x="868680" y="4590288"/>
+            <a:ext cx="5212080" cy="731520"/>
+          </a:xfrm>
+          <a:prstGeom prst="rect">
+            <a:avLst/>
+          </a:prstGeom>
+          <a:noFill/>
+          <a:ln/>
+        </p:spPr>
+        <p:txBody>
+          <a:bodyPr wrap="square" lIns="0" tIns="0" rIns="0" bIns="0" rtlCol="0" anchor="t"/>
+          <a:lstStyle/>
+          <a:p>
+            <a:pPr algn="l" indent="0" marL="0">
+              <a:buNone/>
+            </a:pPr>
+            <a:r>
+              <a:rPr lang="en-US" altLang="en-US" sz="1200" dirty="0">
+                <a:solidFill>
+                  <a:srgbClr val="D8E0EB"/>
+                </a:solidFill>
+                <a:latin typeface="Vazirmatn" pitchFamily="34" charset="0"/>
+                <a:ea typeface="Vazirmatn" pitchFamily="34" charset="-122"/>
+                <a:cs typeface="Vazirmatn" pitchFamily="34" charset="-120"/>
+              </a:rPr>
+              <a:t>Eliminating range anxiety through reliable on-the-go charging access</a:t>
+            </a:r>
+            <a:endParaRPr lang="en-US" sz="1200" dirty="0"/>
+          </a:p>
+        </p:txBody>
+      </p:sp>
+      <p:sp>
+        <p:nvSpPr>
+          <p:cNvPr id="9" name="Text 6"/>
+          <p:cNvSpPr txBox="1"/>
+          <p:nvPr/>
+        </p:nvSpPr>
+        <p:spPr>
+          <a:xfrm>
+            <a:off x="7315200" y="594360"/>
+            <a:ext cx="4297680" cy="274320"/>
+          </a:xfrm>
+          <a:prstGeom prst="rect">
+            <a:avLst/>
+          </a:prstGeom>
+          <a:noFill/>
+          <a:ln/>
+        </p:spPr>
+        <p:txBody>
+          <a:bodyPr wrap="square" lIns="0" tIns="0" rIns="0" bIns="0" rtlCol="0" anchor="ctr"/>
+          <a:lstStyle/>
+          <a:p>
+            <a:pPr algn="r" indent="0" marL="0">
+              <a:buNone/>
+            </a:pPr>
+            <a:r>
+              <a:rPr lang="en-US" altLang="en-US" sz="900" b="1" dirty="0">
+                <a:solidFill>
+                  <a:srgbClr val="F4A261"/>
+                </a:solidFill>
+                <a:latin typeface="Vazirmatn" pitchFamily="34" charset="0"/>
+                <a:ea typeface="Vazirmatn" pitchFamily="34" charset="-122"/>
+                <a:cs typeface="Vazirmatn" pitchFamily="34" charset="-120"/>
+              </a:rPr>
+              <a:t>07</a:t>
+            </a:r>
+            <a:endParaRPr lang="en-US" sz="900" dirty="0"/>
+          </a:p>
+        </p:txBody>
+      </p:sp>
+      <p:sp>
+        <p:nvSpPr>
+          <p:cNvPr id="10" name="Text 7"/>
+          <p:cNvSpPr txBox="1"/>
+          <p:nvPr/>
+        </p:nvSpPr>
+        <p:spPr>
+          <a:xfrm>
+            <a:off x="320040" y="6510528"/>
+            <a:ext cx="237744" cy="164592"/>
+          </a:xfrm>
+          <a:prstGeom prst="rect">
+            <a:avLst/>
+          </a:prstGeom>
+          <a:noFill/>
+          <a:ln/>
+        </p:spPr>
+        <p:txBody>
+          <a:bodyPr wrap="square" lIns="0" tIns="0" rIns="0" bIns="0" rtlCol="0" anchor="ctr"/>
+          <a:lstStyle/>
+          <a:p>
+            <a:pPr algn="ctr" indent="0" marL="0">
+              <a:buNone/>
+            </a:pPr>
+            <a:r>
+              <a:rPr lang="en-US" altLang="en-US" sz="750" dirty="0">
+                <a:solidFill>
+                  <a:srgbClr val="E2E8F0"/>
+                </a:solidFill>
+                <a:latin typeface="Vazirmatn" pitchFamily="34" charset="0"/>
+                <a:ea typeface="Vazirmatn" pitchFamily="34" charset="-122"/>
+                <a:cs typeface="Vazirmatn" pitchFamily="34" charset="-120"/>
+              </a:rPr>
+              <a:t>07</a:t>
+            </a:r>
+            <a:endParaRPr lang="en-US" sz="750" dirty="0"/>
+          </a:p>
+        </p:txBody>
+      </p:sp>
+      <p:sp>
+        <p:nvSpPr>
+          <p:cNvPr id="11" name="Text 8"/>
+          <p:cNvSpPr txBox="1"/>
+          <p:nvPr/>
+        </p:nvSpPr>
+        <p:spPr>
+          <a:xfrm>
+            <a:off x="557784" y="6510528"/>
+            <a:ext cx="128016" cy="164592"/>
+          </a:xfrm>
+          <a:prstGeom prst="rect">
+            <a:avLst/>
+          </a:prstGeom>
+          <a:noFill/>
+          <a:ln/>
+        </p:spPr>
+        <p:txBody>
+          <a:bodyPr wrap="square" lIns="0" tIns="0" rIns="0" bIns="0" rtlCol="0" anchor="ctr"/>
+          <a:lstStyle/>
+          <a:p>
+            <a:pPr algn="ctr" indent="0" marL="0">
+              <a:buNone/>
+            </a:pPr>
+            <a:r>
+              <a:rPr lang="en-US" altLang="en-US" sz="750" dirty="0">
+                <a:solidFill>
+                  <a:srgbClr val="E2E8F0"/>
+                </a:solidFill>
+                <a:latin typeface="Vazirmatn" pitchFamily="34" charset="0"/>
+                <a:ea typeface="Vazirmatn" pitchFamily="34" charset="-122"/>
+                <a:cs typeface="Vazirmatn" pitchFamily="34" charset="-120"/>
+              </a:rPr>
+              <a:t>/</a:t>
+            </a:r>
+            <a:endParaRPr lang="en-US" sz="750" dirty="0"/>
+          </a:p>
+        </p:txBody>
+      </p:sp>
+      <p:sp>
+        <p:nvSpPr>
+          <p:cNvPr id="12" name="Text 9"/>
+          <p:cNvSpPr txBox="1"/>
+          <p:nvPr/>
+        </p:nvSpPr>
+        <p:spPr>
+          <a:xfrm>
+            <a:off x="685800" y="6510528"/>
+            <a:ext cx="237744" cy="164592"/>
+          </a:xfrm>
+          <a:prstGeom prst="rect">
+            <a:avLst/>
+          </a:prstGeom>
+          <a:noFill/>
+          <a:ln/>
+        </p:spPr>
+        <p:txBody>
+          <a:bodyPr wrap="square" lIns="0" tIns="0" rIns="0" bIns="0" rtlCol="0" anchor="ctr"/>
+          <a:lstStyle/>
+          <a:p>
+            <a:pPr algn="ctr" indent="0" marL="0">
+              <a:buNone/>
+            </a:pPr>
+            <a:r>
+              <a:rPr lang="en-US" altLang="en-US" sz="750" dirty="0">
+                <a:solidFill>
+                  <a:srgbClr val="E2E8F0"/>
+                </a:solidFill>
+                <a:latin typeface="Vazirmatn" pitchFamily="34" charset="0"/>
+                <a:ea typeface="Vazirmatn" pitchFamily="34" charset="-122"/>
+                <a:cs typeface="Vazirmatn" pitchFamily="34" charset="-120"/>
+              </a:rPr>
+              <a:t>08</a:t>
+            </a:r>
+            <a:endParaRPr lang="en-US" sz="750" dirty="0"/>
+          </a:p>
+        </p:txBody>
+      </p:sp>
+      <p:sp>
+        <p:nvSpPr>
+          <p:cNvPr id="13" name="Text 10"/>
+          <p:cNvSpPr txBox="1"/>
+          <p:nvPr/>
+        </p:nvSpPr>
+        <p:spPr>
+          <a:xfrm>
+            <a:off x="9326880" y="6473952"/>
+            <a:ext cx="2514600" cy="182880"/>
+          </a:xfrm>
+          <a:prstGeom prst="rect">
+            <a:avLst/>
+          </a:prstGeom>
+          <a:noFill/>
+          <a:ln/>
+        </p:spPr>
+        <p:txBody>
+          <a:bodyPr wrap="square" lIns="0" tIns="0" rIns="0" bIns="0" rtlCol="0" anchor="ctr"/>
+          <a:lstStyle/>
+          <a:p>
+            <a:pPr algn="r" indent="0" marL="0">
+              <a:buNone/>
+            </a:pPr>
+            <a:r>
+              <a:rPr lang="en-US" altLang="en-US" sz="620" dirty="0">
+                <a:solidFill>
+                  <a:srgbClr val="E2E8F0"/>
+                </a:solidFill>
+                <a:latin typeface="Vazirmatn" pitchFamily="34" charset="0"/>
+                <a:ea typeface="Vazirmatn" pitchFamily="34" charset="-122"/>
+                <a:cs typeface="Vazirmatn" pitchFamily="34" charset="-120"/>
+              </a:rPr>
+              <a:t>Gustavo Fring</a:t>
+            </a:r>
+            <a:endParaRPr lang="en-US" sz="620" dirty="0"/>
+          </a:p>
+        </p:txBody>
+      </p:sp>
+    </p:spTree>
+  </p:cSld>
+  <p:clrMapOvr>
+    <a:masterClrMapping/>
+  </p:clrMapOvr>
+</p:sld>
+</file>
+
+<file path=ppt/slides/slide8.xml><?xml version="1.0" encoding="utf-8"?>
+<p:sld xmlns:a="http://schemas.openxmlformats.org/drawingml/2006/main" xmlns:r="http://schemas.openxmlformats.org/officeDocument/2006/relationships" xmlns:p="http://schemas.openxmlformats.org/presentationml/2006/main">
+  <p:cSld name="Slide 8">
+    <p:bg>
+      <p:bgPr>
+        <a:solidFill>
+          <a:srgbClr val="0D5C75"/>
+        </a:solidFill>
+      </p:bgPr>
+    </p:bg>
+    <p:spTree>
+      <p:nvGrpSpPr>
+        <p:cNvPr id="1" name=""/>
+        <p:cNvGrpSpPr/>
+        <p:nvPr/>
+      </p:nvGrpSpPr>
+      <p:grpSpPr>
+        <a:xfrm>
+          <a:off x="0" y="0"/>
+          <a:ext cx="0" cy="0"/>
+          <a:chOff x="0" y="0"/>
+          <a:chExt cx="0" cy="0"/>
+        </a:xfrm>
+      </p:grpSpPr>
+      <p:sp>
+        <p:nvSpPr>
+          <p:cNvPr id="2" name="Shape 0"/>
+          <p:cNvSpPr/>
+          <p:nvPr/>
+        </p:nvSpPr>
+        <p:spPr>
+          <a:xfrm>
+            <a:off x="109728" y="5074920"/>
+            <a:ext cx="1508760" cy="1508760"/>
+          </a:xfrm>
+          <a:prstGeom prst="ellipse">
+            <a:avLst/>
+          </a:prstGeom>
+          <a:solidFill>
+            <a:srgbClr val="E76F51">
+              <a:alpha val="25000"/>
+            </a:srgbClr>
+          </a:solidFill>
+          <a:ln w="12700">
+            <a:solidFill>
+              <a:srgbClr val="E76F51">
+                <a:alpha val="0"/>
+              </a:srgbClr>
+            </a:solidFill>
+            <a:prstDash val="solid"/>
+          </a:ln>
+        </p:spPr>
+      </p:sp>
+      <p:sp>
+        <p:nvSpPr>
+          <p:cNvPr id="3" name="Shape 1"/>
+          <p:cNvSpPr/>
+          <p:nvPr/>
+        </p:nvSpPr>
+        <p:spPr>
+          <a:xfrm>
+            <a:off x="10561320" y="109728"/>
+            <a:ext cx="1417320" cy="1417320"/>
+          </a:xfrm>
+          <a:prstGeom prst="ellipse">
+            <a:avLst/>
+          </a:prstGeom>
+          <a:solidFill>
+            <a:srgbClr val="F4A261">
+              <a:alpha val="28000"/>
+            </a:srgbClr>
+          </a:solidFill>
+          <a:ln w="12700">
+            <a:solidFill>
+              <a:srgbClr val="F4A261">
+                <a:alpha val="0"/>
+              </a:srgbClr>
+            </a:solidFill>
+            <a:prstDash val="solid"/>
+          </a:ln>
+        </p:spPr>
+      </p:sp>
+      <p:sp>
+        <p:nvSpPr>
+          <p:cNvPr id="4" name="Shape 2"/>
+          <p:cNvSpPr/>
+          <p:nvPr/>
+        </p:nvSpPr>
+        <p:spPr>
+          <a:xfrm>
+            <a:off x="11457432" y="347472"/>
+            <a:ext cx="155448" cy="310896"/>
+          </a:xfrm>
+          <a:prstGeom prst="rect">
+            <a:avLst/>
+          </a:prstGeom>
+          <a:solidFill>
+            <a:srgbClr val="F4A261"/>
+          </a:solidFill>
+          <a:ln w="12700">
+            <a:solidFill>
+              <a:srgbClr val="F4A261">
+                <a:alpha val="0"/>
+              </a:srgbClr>
+            </a:solidFill>
+            <a:prstDash val="solid"/>
+          </a:ln>
+        </p:spPr>
+      </p:sp>
+      <p:sp>
+        <p:nvSpPr>
+          <p:cNvPr id="5" name="Text 3"/>
+          <p:cNvSpPr txBox="1"/>
+          <p:nvPr/>
+        </p:nvSpPr>
+        <p:spPr>
+          <a:xfrm>
+            <a:off x="4572000" y="329184"/>
+            <a:ext cx="6766560" cy="365760"/>
+          </a:xfrm>
+          <a:prstGeom prst="rect">
+            <a:avLst/>
+          </a:prstGeom>
+          <a:noFill/>
+          <a:ln/>
+        </p:spPr>
+        <p:txBody>
+          <a:bodyPr wrap="square" lIns="0" tIns="0" rIns="0" bIns="0" rtlCol="0" anchor="ctr"/>
+          <a:lstStyle/>
+          <a:p>
+            <a:pPr algn="r" indent="0" marL="0">
+              <a:buNone/>
+            </a:pPr>
+            <a:r>
+              <a:rPr lang="en-US" altLang="en-US" sz="1050" b="1" spc="50" kern="0" dirty="0">
+                <a:solidFill>
+                  <a:srgbClr val="F4A261"/>
+                </a:solidFill>
+                <a:latin typeface="Vazirmatn" pitchFamily="34" charset="0"/>
+                <a:ea typeface="Vazirmatn" pitchFamily="34" charset="-122"/>
+                <a:cs typeface="Vazirmatn" pitchFamily="34" charset="-120"/>
+              </a:rPr>
+              <a:t>08</a:t>
+            </a:r>
+            <a:endParaRPr lang="en-US" sz="1050" dirty="0"/>
+          </a:p>
+        </p:txBody>
+      </p:sp>
+      <p:sp>
+        <p:nvSpPr>
+          <p:cNvPr id="6" name="Text 4"/>
+          <p:cNvSpPr txBox="1"/>
+          <p:nvPr/>
+        </p:nvSpPr>
+        <p:spPr>
+          <a:xfrm>
+            <a:off x="4572000" y="685800"/>
+            <a:ext cx="7040880" cy="960120"/>
+          </a:xfrm>
+          <a:prstGeom prst="rect">
+            <a:avLst/>
+          </a:prstGeom>
+          <a:noFill/>
+          <a:ln/>
+        </p:spPr>
+        <p:txBody>
+          <a:bodyPr wrap="square" lIns="0" tIns="0" rIns="0" bIns="0" rtlCol="0" anchor="t"/>
+          <a:lstStyle/>
+          <a:p>
+            <a:pPr algn="r" indent="0" marL="0">
+              <a:buNone/>
+            </a:pPr>
+            <a:r>
+              <a:rPr lang="en-US" altLang="en-US" sz="2600" b="1" dirty="0">
+                <a:solidFill>
+                  <a:srgbClr val="F8FAFC"/>
+                </a:solidFill>
+                <a:latin typeface="Vazirmatn" pitchFamily="34" charset="0"/>
+                <a:ea typeface="Vazirmatn" pitchFamily="34" charset="-122"/>
+                <a:cs typeface="Vazirmatn" pitchFamily="34" charset="-120"/>
+              </a:rPr>
+              <a:t>Accelerating the Transition</a:t>
+            </a:r>
+            <a:endParaRPr lang="en-US" sz="2600" dirty="0"/>
+          </a:p>
+        </p:txBody>
+      </p:sp>
+      <p:sp>
+        <p:nvSpPr>
+          <p:cNvPr id="7" name="Text 5"/>
+          <p:cNvSpPr txBox="1"/>
+          <p:nvPr/>
+        </p:nvSpPr>
+        <p:spPr>
+          <a:xfrm>
+            <a:off x="4572000" y="1737360"/>
+            <a:ext cx="7040880" cy="594360"/>
+          </a:xfrm>
+          <a:prstGeom prst="rect">
+            <a:avLst/>
+          </a:prstGeom>
+          <a:noFill/>
+          <a:ln/>
+        </p:spPr>
+        <p:txBody>
+          <a:bodyPr wrap="square" lIns="0" tIns="0" rIns="0" bIns="0" rtlCol="0" anchor="t"/>
+          <a:lstStyle/>
+          <a:p>
+            <a:pPr algn="r" indent="0" marL="0">
+              <a:buNone/>
+            </a:pPr>
+            <a:r>
+              <a:rPr lang="en-US" altLang="en-US" sz="1250" dirty="0">
+                <a:solidFill>
+                  <a:srgbClr val="CBD5E1"/>
+                </a:solidFill>
+                <a:latin typeface="Vazirmatn" pitchFamily="34" charset="0"/>
+                <a:ea typeface="Vazirmatn" pitchFamily="34" charset="-122"/>
+                <a:cs typeface="Vazirmatn" pitchFamily="34" charset="-120"/>
+              </a:rPr>
+              <a:t>Key takeaways for scaling retail EV charging infrastructure successfully</a:t>
+            </a:r>
+            <a:endParaRPr lang="en-US" sz="1250" dirty="0"/>
+          </a:p>
+        </p:txBody>
+      </p:sp>
+      <p:sp>
+        <p:nvSpPr>
+          <p:cNvPr id="8" name="Shape 6"/>
+          <p:cNvSpPr/>
+          <p:nvPr/>
+        </p:nvSpPr>
+        <p:spPr>
+          <a:xfrm>
+            <a:off x="594360" y="2788920"/>
+            <a:ext cx="3505200" cy="2331720"/>
+          </a:xfrm>
+          <a:prstGeom prst="roundRect">
+            <a:avLst/>
+          </a:prstGeom>
+          <a:solidFill>
+            <a:srgbClr val="151F31"/>
+          </a:solidFill>
+          <a:ln w="8890">
+            <a:solidFill>
+              <a:srgbClr val="F4A261">
+                <a:alpha val="65000"/>
+              </a:srgbClr>
+            </a:solidFill>
+            <a:prstDash val="solid"/>
+          </a:ln>
+        </p:spPr>
+      </p:sp>
+      <p:sp>
+        <p:nvSpPr>
+          <p:cNvPr id="9" name="Text 7"/>
+          <p:cNvSpPr txBox="1"/>
+          <p:nvPr/>
+        </p:nvSpPr>
+        <p:spPr>
+          <a:xfrm>
+            <a:off x="795528" y="2971800"/>
+            <a:ext cx="640080" cy="384048"/>
+          </a:xfrm>
+          <a:prstGeom prst="rect">
+            <a:avLst/>
+          </a:prstGeom>
+          <a:noFill/>
+          <a:ln/>
+        </p:spPr>
+        <p:txBody>
+          <a:bodyPr wrap="square" lIns="0" tIns="0" rIns="0" bIns="0" rtlCol="0" anchor="ctr"/>
+          <a:lstStyle/>
+          <a:p>
+            <a:pPr algn="l" indent="0" marL="0">
+              <a:buNone/>
+            </a:pPr>
+            <a:r>
+              <a:rPr lang="en-US" altLang="en-US" sz="1600" b="1" dirty="0">
+                <a:solidFill>
+                  <a:srgbClr val="F4A261"/>
+                </a:solidFill>
+                <a:latin typeface="Vazirmatn" pitchFamily="34" charset="0"/>
+                <a:ea typeface="Vazirmatn" pitchFamily="34" charset="-122"/>
+                <a:cs typeface="Vazirmatn" pitchFamily="34" charset="-120"/>
+              </a:rPr>
+              <a:t>1</a:t>
+            </a:r>
+            <a:endParaRPr lang="en-US" sz="1600" dirty="0"/>
+          </a:p>
+        </p:txBody>
+      </p:sp>
+      <p:pic>
+        <p:nvPicPr>
+          <p:cNvPr id="10" name="Image 0" descr="preencoded.png">    </p:cNvPr>
+          <p:cNvPicPr>
+            <a:picLocks noChangeAspect="1"/>
+          </p:cNvPicPr>
+          <p:nvPr/>
+        </p:nvPicPr>
+        <p:blipFill>
+          <a:blip r:embed="rId1">
+            <a:extLst>
+              <a:ext uri="{96DAC541-7B7A-43D3-8B79-37D633B846F1}">
+                <asvg:svgBlip xmlns:asvg="http://schemas.microsoft.com/office/drawing/2016/SVG/main" r:embed="rId2"/>
+              </a:ext>
+            </a:extLst>
+          </a:blip>
+          <a:stretch>
+            <a:fillRect/>
+          </a:stretch>
+        </p:blipFill>
+        <p:spPr>
+          <a:xfrm>
+            <a:off x="3505200" y="2999232"/>
+            <a:ext cx="347472" cy="347472"/>
+          </a:xfrm>
+          <a:prstGeom prst="rect">
+            <a:avLst/>
+          </a:prstGeom>
+        </p:spPr>
+      </p:pic>
+      <p:sp>
+        <p:nvSpPr>
+          <p:cNvPr id="11" name="Text 8"/>
+          <p:cNvSpPr txBox="1"/>
+          <p:nvPr/>
+        </p:nvSpPr>
+        <p:spPr>
+          <a:xfrm>
+            <a:off x="822960" y="3657600"/>
+            <a:ext cx="3048000" cy="347472"/>
+          </a:xfrm>
+          <a:prstGeom prst="rect">
+            <a:avLst/>
+          </a:prstGeom>
+          <a:noFill/>
+          <a:ln/>
+        </p:spPr>
+        <p:txBody>
+          <a:bodyPr wrap="square" lIns="0" tIns="0" rIns="0" bIns="0" rtlCol="0" anchor="ctr"/>
+          <a:lstStyle/>
+          <a:p>
+            <a:pPr algn="l" indent="0" marL="0">
+              <a:buNone/>
+            </a:pPr>
+            <a:r>
+              <a:rPr lang="en-US" altLang="en-US" sz="1200" b="1" dirty="0">
+                <a:solidFill>
+                  <a:srgbClr val="FFFFFF"/>
+                </a:solidFill>
+                <a:latin typeface="Vazirmatn" pitchFamily="34" charset="0"/>
+                <a:ea typeface="Vazirmatn" pitchFamily="34" charset="-122"/>
+                <a:cs typeface="Vazirmatn" pitchFamily="34" charset="-120"/>
+              </a:rPr>
+              <a:t>Align with Retail Dwells</a:t>
+            </a:r>
+            <a:endParaRPr lang="en-US" sz="1200" dirty="0"/>
+          </a:p>
+        </p:txBody>
+      </p:sp>
+      <p:sp>
+        <p:nvSpPr>
+          <p:cNvPr id="12" name="Text 9"/>
+          <p:cNvSpPr txBox="1"/>
+          <p:nvPr/>
+        </p:nvSpPr>
+        <p:spPr>
+          <a:xfrm>
+            <a:off x="822960" y="4133088"/>
+            <a:ext cx="3048000" cy="640080"/>
+          </a:xfrm>
+          <a:prstGeom prst="rect">
+            <a:avLst/>
+          </a:prstGeom>
+          <a:noFill/>
+          <a:ln/>
+        </p:spPr>
+        <p:txBody>
+          <a:bodyPr wrap="square" lIns="0" tIns="0" rIns="0" bIns="0" rtlCol="0" anchor="t"/>
+          <a:lstStyle/>
+          <a:p>
+            <a:pPr algn="l" indent="0" marL="0">
+              <a:buNone/>
+            </a:pPr>
+            <a:r>
+              <a:rPr lang="en-US" altLang="en-US" sz="1050" dirty="0">
+                <a:solidFill>
+                  <a:srgbClr val="B8C3D4"/>
+                </a:solidFill>
+                <a:latin typeface="Vazirmatn" pitchFamily="34" charset="0"/>
+                <a:ea typeface="Vazirmatn" pitchFamily="34" charset="-122"/>
+                <a:cs typeface="Vazirmatn" pitchFamily="34" charset="-120"/>
+              </a:rPr>
+              <a:t>Target locations where natural customer dwell times match appropriate Level 2 or DC fast charging speeds.</a:t>
+            </a:r>
+            <a:endParaRPr lang="en-US" sz="1050" dirty="0"/>
+          </a:p>
+        </p:txBody>
+      </p:sp>
+      <p:sp>
+        <p:nvSpPr>
+          <p:cNvPr id="13" name="Shape 10"/>
+          <p:cNvSpPr/>
+          <p:nvPr/>
+        </p:nvSpPr>
+        <p:spPr>
+          <a:xfrm>
+            <a:off x="4328160" y="2788920"/>
+            <a:ext cx="3505200" cy="2331720"/>
+          </a:xfrm>
+          <a:prstGeom prst="roundRect">
+            <a:avLst/>
+          </a:prstGeom>
+          <a:solidFill>
+            <a:srgbClr val="151F31"/>
+          </a:solidFill>
+          <a:ln w="8890">
+            <a:solidFill>
+              <a:srgbClr val="E76F51">
+                <a:alpha val="65000"/>
+              </a:srgbClr>
+            </a:solidFill>
+            <a:prstDash val="solid"/>
+          </a:ln>
+        </p:spPr>
+      </p:sp>
+      <p:sp>
+        <p:nvSpPr>
+          <p:cNvPr id="14" name="Text 11"/>
+          <p:cNvSpPr txBox="1"/>
+          <p:nvPr/>
+        </p:nvSpPr>
+        <p:spPr>
+          <a:xfrm>
+            <a:off x="4529328" y="2971800"/>
+            <a:ext cx="640080" cy="384048"/>
+          </a:xfrm>
+          <a:prstGeom prst="rect">
+            <a:avLst/>
+          </a:prstGeom>
+          <a:noFill/>
+          <a:ln/>
+        </p:spPr>
+        <p:txBody>
+          <a:bodyPr wrap="square" lIns="0" tIns="0" rIns="0" bIns="0" rtlCol="0" anchor="ctr"/>
+          <a:lstStyle/>
+          <a:p>
+            <a:pPr algn="l" indent="0" marL="0">
+              <a:buNone/>
+            </a:pPr>
+            <a:r>
+              <a:rPr lang="en-US" altLang="en-US" sz="1600" b="1" dirty="0">
+                <a:solidFill>
+                  <a:srgbClr val="E76F51"/>
+                </a:solidFill>
+                <a:latin typeface="Vazirmatn" pitchFamily="34" charset="0"/>
+                <a:ea typeface="Vazirmatn" pitchFamily="34" charset="-122"/>
+                <a:cs typeface="Vazirmatn" pitchFamily="34" charset="-120"/>
+              </a:rPr>
+              <a:t>2</a:t>
+            </a:r>
+            <a:endParaRPr lang="en-US" sz="1600" dirty="0"/>
+          </a:p>
+        </p:txBody>
+      </p:sp>
+      <p:pic>
+        <p:nvPicPr>
+          <p:cNvPr id="15" name="Image 1" descr="preencoded.png">    </p:cNvPr>
+          <p:cNvPicPr>
+            <a:picLocks noChangeAspect="1"/>
+          </p:cNvPicPr>
+          <p:nvPr/>
+        </p:nvPicPr>
+        <p:blipFill>
+          <a:blip r:embed="rId3">
+            <a:extLst>
+              <a:ext uri="{96DAC541-7B7A-43D3-8B79-37D633B846F1}">
+                <asvg:svgBlip xmlns:asvg="http://schemas.microsoft.com/office/drawing/2016/SVG/main" r:embed="rId4"/>
+              </a:ext>
+            </a:extLst>
+          </a:blip>
+          <a:stretch>
+            <a:fillRect/>
+          </a:stretch>
+        </p:blipFill>
+        <p:spPr>
+          <a:xfrm>
+            <a:off x="7239000" y="2999232"/>
+            <a:ext cx="347472" cy="347472"/>
+          </a:xfrm>
+          <a:prstGeom prst="rect">
+            <a:avLst/>
+          </a:prstGeom>
+        </p:spPr>
+      </p:pic>
+      <p:sp>
+        <p:nvSpPr>
+          <p:cNvPr id="16" name="Text 12"/>
+          <p:cNvSpPr txBox="1"/>
+          <p:nvPr/>
+        </p:nvSpPr>
+        <p:spPr>
+          <a:xfrm>
+            <a:off x="4556760" y="3657600"/>
+            <a:ext cx="3048000" cy="347472"/>
+          </a:xfrm>
+          <a:prstGeom prst="rect">
+            <a:avLst/>
+          </a:prstGeom>
+          <a:noFill/>
+          <a:ln/>
+        </p:spPr>
+        <p:txBody>
+          <a:bodyPr wrap="square" lIns="0" tIns="0" rIns="0" bIns="0" rtlCol="0" anchor="ctr"/>
+          <a:lstStyle/>
+          <a:p>
+            <a:pPr algn="l" indent="0" marL="0">
+              <a:buNone/>
+            </a:pPr>
+            <a:r>
+              <a:rPr lang="en-US" altLang="en-US" sz="1200" b="1" dirty="0">
+                <a:solidFill>
+                  <a:srgbClr val="FFFFFF"/>
+                </a:solidFill>
+                <a:latin typeface="Vazirmatn" pitchFamily="34" charset="0"/>
+                <a:ea typeface="Vazirmatn" pitchFamily="34" charset="-122"/>
+                <a:cs typeface="Vazirmatn" pitchFamily="34" charset="-120"/>
+              </a:rPr>
+              <a:t>Leverage Partnerships</a:t>
+            </a:r>
+            <a:endParaRPr lang="en-US" sz="1200" dirty="0"/>
+          </a:p>
+        </p:txBody>
+      </p:sp>
+      <p:sp>
+        <p:nvSpPr>
+          <p:cNvPr id="17" name="Text 13"/>
+          <p:cNvSpPr txBox="1"/>
+          <p:nvPr/>
+        </p:nvSpPr>
+        <p:spPr>
+          <a:xfrm>
+            <a:off x="4556760" y="4133088"/>
+            <a:ext cx="3048000" cy="640080"/>
+          </a:xfrm>
+          <a:prstGeom prst="rect">
+            <a:avLst/>
+          </a:prstGeom>
+          <a:noFill/>
+          <a:ln/>
+        </p:spPr>
+        <p:txBody>
+          <a:bodyPr wrap="square" lIns="0" tIns="0" rIns="0" bIns="0" rtlCol="0" anchor="t"/>
+          <a:lstStyle/>
+          <a:p>
+            <a:pPr algn="l" indent="0" marL="0">
+              <a:buNone/>
+            </a:pPr>
+            <a:r>
+              <a:rPr lang="en-US" altLang="en-US" sz="1050" dirty="0">
+                <a:solidFill>
+                  <a:srgbClr val="B8C3D4"/>
+                </a:solidFill>
+                <a:latin typeface="Vazirmatn" pitchFamily="34" charset="0"/>
+                <a:ea typeface="Vazirmatn" pitchFamily="34" charset="-122"/>
+                <a:cs typeface="Vazirmatn" pitchFamily="34" charset="-120"/>
+              </a:rPr>
+              <a:t>Combine automaker initiatives, clean cities coalitions, and site host investments to minimize deployment barriers.</a:t>
+            </a:r>
+            <a:endParaRPr lang="en-US" sz="1050" dirty="0"/>
+          </a:p>
+        </p:txBody>
+      </p:sp>
+      <p:sp>
+        <p:nvSpPr>
+          <p:cNvPr id="18" name="Shape 14"/>
+          <p:cNvSpPr/>
+          <p:nvPr/>
+        </p:nvSpPr>
+        <p:spPr>
+          <a:xfrm>
+            <a:off x="8061960" y="2788920"/>
+            <a:ext cx="3505200" cy="2331720"/>
+          </a:xfrm>
+          <a:prstGeom prst="roundRect">
+            <a:avLst/>
+          </a:prstGeom>
+          <a:solidFill>
+            <a:srgbClr val="151F31"/>
+          </a:solidFill>
+          <a:ln w="8890">
+            <a:solidFill>
+              <a:srgbClr val="F4A261">
+                <a:alpha val="65000"/>
+              </a:srgbClr>
+            </a:solidFill>
+            <a:prstDash val="solid"/>
+          </a:ln>
+        </p:spPr>
+      </p:sp>
+      <p:sp>
+        <p:nvSpPr>
+          <p:cNvPr id="19" name="Text 15"/>
+          <p:cNvSpPr txBox="1"/>
+          <p:nvPr/>
+        </p:nvSpPr>
+        <p:spPr>
+          <a:xfrm>
+            <a:off x="8263128" y="2971800"/>
+            <a:ext cx="640080" cy="384048"/>
+          </a:xfrm>
+          <a:prstGeom prst="rect">
+            <a:avLst/>
+          </a:prstGeom>
+          <a:noFill/>
+          <a:ln/>
+        </p:spPr>
+        <p:txBody>
+          <a:bodyPr wrap="square" lIns="0" tIns="0" rIns="0" bIns="0" rtlCol="0" anchor="ctr"/>
+          <a:lstStyle/>
+          <a:p>
+            <a:pPr algn="l" indent="0" marL="0">
+              <a:buNone/>
+            </a:pPr>
+            <a:r>
+              <a:rPr lang="en-US" altLang="en-US" sz="1600" b="1" dirty="0">
+                <a:solidFill>
+                  <a:srgbClr val="F4A261"/>
+                </a:solidFill>
+                <a:latin typeface="Vazirmatn" pitchFamily="34" charset="0"/>
+                <a:ea typeface="Vazirmatn" pitchFamily="34" charset="-122"/>
+                <a:cs typeface="Vazirmatn" pitchFamily="34" charset="-120"/>
+              </a:rPr>
+              <a:t>3</a:t>
+            </a:r>
+            <a:endParaRPr lang="en-US" sz="1600" dirty="0"/>
+          </a:p>
+        </p:txBody>
+      </p:sp>
+      <p:pic>
+        <p:nvPicPr>
+          <p:cNvPr id="20" name="Image 2" descr="preencoded.png">    </p:cNvPr>
+          <p:cNvPicPr>
+            <a:picLocks noChangeAspect="1"/>
+          </p:cNvPicPr>
+          <p:nvPr/>
+        </p:nvPicPr>
+        <p:blipFill>
+          <a:blip r:embed="rId5">
+            <a:extLst>
+              <a:ext uri="{96DAC541-7B7A-43D3-8B79-37D633B846F1}">
+                <asvg:svgBlip xmlns:asvg="http://schemas.microsoft.com/office/drawing/2016/SVG/main" r:embed="rId6"/>
+              </a:ext>
+            </a:extLst>
+          </a:blip>
+          <a:stretch>
+            <a:fillRect/>
+          </a:stretch>
+        </p:blipFill>
+        <p:spPr>
+          <a:xfrm>
             <a:off x="10972800" y="2999232"/>
             <a:ext cx="347472" cy="347472"/>
           </a:xfrm>
@@ -6117,7 +6769,7 @@
       </p:pic>
       <p:sp>
         <p:nvSpPr>
-          <p:cNvPr id="20" name="Text 15"/>
+          <p:cNvPr id="21" name="Text 16"/>
           <p:cNvSpPr txBox="1"/>
           <p:nvPr/>
         </p:nvSpPr>
@@ -6148,7 +6800,7 @@
                 <a:ea typeface="Vazirmatn" pitchFamily="34" charset="-122"/>
                 <a:cs typeface="Vazirmatn" pitchFamily="34" charset="-120"/>
               </a:rPr>
-              <a:t>**Planners:** Support pre-normative research to harmonize technical req…</a:t>
+              <a:t>Plan for Grid Integration</a:t>
             </a:r>
             <a:endParaRPr lang="en-US" sz="1200" dirty="0"/>
           </a:p>
@@ -6156,7 +6808,7 @@
       </p:sp>
       <p:sp>
         <p:nvSpPr>
-          <p:cNvPr id="21" name="Text 16"/>
+          <p:cNvPr id="22" name="Text 17"/>
           <p:cNvSpPr txBox="1"/>
           <p:nvPr/>
         </p:nvSpPr>
@@ -6178,13 +6830,24 @@
             <a:pPr algn="l" indent="0" marL="0">
               <a:buNone/>
             </a:pPr>
+            <a:r>
+              <a:rPr lang="en-US" altLang="en-US" sz="1050" dirty="0">
+                <a:solidFill>
+                  <a:srgbClr val="B8C3D4"/>
+                </a:solidFill>
+                <a:latin typeface="Vazirmatn" pitchFamily="34" charset="0"/>
+                <a:ea typeface="Vazirmatn" pitchFamily="34" charset="-122"/>
+                <a:cs typeface="Vazirmatn" pitchFamily="34" charset="-120"/>
+              </a:rPr>
+              <a:t>Incorporate smart charging, storage, and load management to support long-term grid stability and clean energy goals.</a:t>
+            </a:r>
             <a:endParaRPr lang="en-US" sz="1050" dirty="0"/>
           </a:p>
         </p:txBody>
       </p:sp>
       <p:sp>
         <p:nvSpPr>
-          <p:cNvPr id="22" name="Text 17"/>
+          <p:cNvPr id="23" name="Text 18"/>
           <p:cNvSpPr txBox="1"/>
           <p:nvPr/>
         </p:nvSpPr>
@@ -6223,7 +6886,7 @@
       </p:sp>
       <p:sp>
         <p:nvSpPr>
-          <p:cNvPr id="23" name="Text 18"/>
+          <p:cNvPr id="24" name="Text 19"/>
           <p:cNvSpPr txBox="1"/>
           <p:nvPr/>
         </p:nvSpPr>
@@ -6262,7 +6925,7 @@
       </p:sp>
       <p:sp>
         <p:nvSpPr>
-          <p:cNvPr id="24" name="Text 19"/>
+          <p:cNvPr id="25" name="Text 20"/>
           <p:cNvSpPr txBox="1"/>
           <p:nvPr/>
         </p:nvSpPr>
